--- a/project_3/analyze-a_b-test-results-template.pptx
+++ b/project_3/analyze-a_b-test-results-template.pptx
@@ -1,47 +1,46 @@
 
 <file path=ppt/presentation.xml><?xml version="1.0" encoding="utf-8"?>
-<p:presentation xmlns:a="http://schemas.openxmlformats.org/drawingml/2006/main" xmlns:r="http://schemas.openxmlformats.org/officeDocument/2006/relationships" xmlns:mc="http://schemas.openxmlformats.org/markup-compatibility/2006" xmlns:mv="urn:schemas-microsoft-com:mac:vml" xmlns:p="http://schemas.openxmlformats.org/presentationml/2006/main" xmlns:c="http://schemas.openxmlformats.org/drawingml/2006/chart" xmlns:dgm="http://schemas.openxmlformats.org/drawingml/2006/diagram" xmlns:o="urn:schemas-microsoft-com:office:office" xmlns:v="urn:schemas-microsoft-com:vml" xmlns:pvml="urn:schemas-microsoft-com:office:powerpoint" xmlns:com="http://schemas.openxmlformats.org/drawingml/2006/compatibility" xmlns:p14="http://schemas.microsoft.com/office/powerpoint/2010/main" xmlns:p15="http://schemas.microsoft.com/office/powerpoint/2012/main" xmlns:ahyp="http://schemas.microsoft.com/office/drawing/2018/hyperlinkcolor" autoCompressPictures="0" embedTrueTypeFonts="1" strictFirstAndLastChars="0" saveSubsetFonts="1">
+<p:presentation xmlns:a="http://schemas.openxmlformats.org/drawingml/2006/main" xmlns:r="http://schemas.openxmlformats.org/officeDocument/2006/relationships" xmlns:p="http://schemas.openxmlformats.org/presentationml/2006/main" strictFirstAndLastChars="0" embedTrueTypeFonts="1" saveSubsetFonts="1" autoCompressPictures="0">
   <p:sldMasterIdLst>
-    <p:sldMasterId id="2147483659" r:id="rId5"/>
+    <p:sldMasterId id="2147483659" r:id="rId1"/>
   </p:sldMasterIdLst>
   <p:notesMasterIdLst>
-    <p:notesMasterId r:id="rId6"/>
+    <p:notesMasterId r:id="rId7"/>
   </p:notesMasterIdLst>
   <p:sldIdLst>
-    <p:sldId id="256" r:id="rId7"/>
-    <p:sldId id="257" r:id="rId8"/>
-    <p:sldId id="258" r:id="rId9"/>
-    <p:sldId id="259" r:id="rId10"/>
-    <p:sldId id="260" r:id="rId11"/>
-    <p:sldId id="261" r:id="rId12"/>
+    <p:sldId id="256" r:id="rId2"/>
+    <p:sldId id="258" r:id="rId3"/>
+    <p:sldId id="259" r:id="rId4"/>
+    <p:sldId id="260" r:id="rId5"/>
+    <p:sldId id="261" r:id="rId6"/>
   </p:sldIdLst>
-  <p:sldSz cy="10287000" cx="18288000"/>
+  <p:sldSz cx="18288000" cy="10287000"/>
   <p:notesSz cx="6858000" cy="9144000"/>
   <p:embeddedFontLst>
     <p:embeddedFont>
-      <p:font typeface="Roboto Mono Light"/>
-      <p:regular r:id="rId13"/>
-      <p:bold r:id="rId14"/>
-      <p:italic r:id="rId15"/>
-      <p:boldItalic r:id="rId16"/>
+      <p:font typeface="Open Sans" panose="020B0606030504020204" pitchFamily="34" charset="0"/>
+      <p:regular r:id="rId8"/>
+      <p:bold r:id="rId9"/>
+      <p:italic r:id="rId10"/>
+      <p:boldItalic r:id="rId11"/>
     </p:embeddedFont>
     <p:embeddedFont>
-      <p:font typeface="Open Sans Light"/>
-      <p:regular r:id="rId17"/>
-      <p:bold r:id="rId18"/>
-      <p:italic r:id="rId19"/>
-      <p:boldItalic r:id="rId20"/>
+      <p:font typeface="Open Sans Light" panose="020B0306030504020204" pitchFamily="34" charset="0"/>
+      <p:regular r:id="rId12"/>
+      <p:bold r:id="rId13"/>
+      <p:italic r:id="rId14"/>
+      <p:boldItalic r:id="rId15"/>
     </p:embeddedFont>
     <p:embeddedFont>
-      <p:font typeface="Open Sans"/>
-      <p:regular r:id="rId21"/>
-      <p:bold r:id="rId22"/>
-      <p:italic r:id="rId23"/>
-      <p:boldItalic r:id="rId24"/>
+      <p:font typeface="Roboto Mono Light" panose="00000009000000000000" pitchFamily="49" charset="0"/>
+      <p:regular r:id="rId16"/>
+      <p:bold r:id="rId17"/>
+      <p:italic r:id="rId18"/>
+      <p:boldItalic r:id="rId19"/>
     </p:embeddedFont>
   </p:embeddedFontLst>
   <p:defaultTextStyle>
-    <a:defPPr lvl="0" marR="0" rtl="0" algn="l">
+    <a:defPPr marR="0" lvl="0" algn="l" rtl="0">
       <a:lnSpc>
         <a:spcPct val="100000"/>
       </a:lnSpc>
@@ -52,7 +51,7 @@
         <a:spcPts val="0"/>
       </a:spcAft>
     </a:defPPr>
-    <a:lvl1pPr lvl="0" marR="0" rtl="0" algn="l">
+    <a:lvl1pPr marR="0" lvl="0" algn="l" rtl="0">
       <a:lnSpc>
         <a:spcPct val="100000"/>
       </a:lnSpc>
@@ -66,7 +65,7 @@
         <a:srgbClr val="000000"/>
       </a:buClr>
       <a:buFont typeface="Arial"/>
-      <a:defRPr b="0" i="0" sz="1400" u="none" cap="none" strike="noStrike">
+      <a:defRPr sz="1400" b="0" i="0" u="none" strike="noStrike" cap="none">
         <a:solidFill>
           <a:srgbClr val="000000"/>
         </a:solidFill>
@@ -76,7 +75,7 @@
         <a:sym typeface="Arial"/>
       </a:defRPr>
     </a:lvl1pPr>
-    <a:lvl2pPr lvl="1" marR="0" rtl="0" algn="l">
+    <a:lvl2pPr marR="0" lvl="1" algn="l" rtl="0">
       <a:lnSpc>
         <a:spcPct val="100000"/>
       </a:lnSpc>
@@ -90,7 +89,7 @@
         <a:srgbClr val="000000"/>
       </a:buClr>
       <a:buFont typeface="Arial"/>
-      <a:defRPr b="0" i="0" sz="1400" u="none" cap="none" strike="noStrike">
+      <a:defRPr sz="1400" b="0" i="0" u="none" strike="noStrike" cap="none">
         <a:solidFill>
           <a:srgbClr val="000000"/>
         </a:solidFill>
@@ -100,7 +99,7 @@
         <a:sym typeface="Arial"/>
       </a:defRPr>
     </a:lvl2pPr>
-    <a:lvl3pPr lvl="2" marR="0" rtl="0" algn="l">
+    <a:lvl3pPr marR="0" lvl="2" algn="l" rtl="0">
       <a:lnSpc>
         <a:spcPct val="100000"/>
       </a:lnSpc>
@@ -114,7 +113,7 @@
         <a:srgbClr val="000000"/>
       </a:buClr>
       <a:buFont typeface="Arial"/>
-      <a:defRPr b="0" i="0" sz="1400" u="none" cap="none" strike="noStrike">
+      <a:defRPr sz="1400" b="0" i="0" u="none" strike="noStrike" cap="none">
         <a:solidFill>
           <a:srgbClr val="000000"/>
         </a:solidFill>
@@ -124,7 +123,7 @@
         <a:sym typeface="Arial"/>
       </a:defRPr>
     </a:lvl3pPr>
-    <a:lvl4pPr lvl="3" marR="0" rtl="0" algn="l">
+    <a:lvl4pPr marR="0" lvl="3" algn="l" rtl="0">
       <a:lnSpc>
         <a:spcPct val="100000"/>
       </a:lnSpc>
@@ -138,7 +137,7 @@
         <a:srgbClr val="000000"/>
       </a:buClr>
       <a:buFont typeface="Arial"/>
-      <a:defRPr b="0" i="0" sz="1400" u="none" cap="none" strike="noStrike">
+      <a:defRPr sz="1400" b="0" i="0" u="none" strike="noStrike" cap="none">
         <a:solidFill>
           <a:srgbClr val="000000"/>
         </a:solidFill>
@@ -148,7 +147,7 @@
         <a:sym typeface="Arial"/>
       </a:defRPr>
     </a:lvl4pPr>
-    <a:lvl5pPr lvl="4" marR="0" rtl="0" algn="l">
+    <a:lvl5pPr marR="0" lvl="4" algn="l" rtl="0">
       <a:lnSpc>
         <a:spcPct val="100000"/>
       </a:lnSpc>
@@ -162,7 +161,7 @@
         <a:srgbClr val="000000"/>
       </a:buClr>
       <a:buFont typeface="Arial"/>
-      <a:defRPr b="0" i="0" sz="1400" u="none" cap="none" strike="noStrike">
+      <a:defRPr sz="1400" b="0" i="0" u="none" strike="noStrike" cap="none">
         <a:solidFill>
           <a:srgbClr val="000000"/>
         </a:solidFill>
@@ -172,7 +171,7 @@
         <a:sym typeface="Arial"/>
       </a:defRPr>
     </a:lvl5pPr>
-    <a:lvl6pPr lvl="5" marR="0" rtl="0" algn="l">
+    <a:lvl6pPr marR="0" lvl="5" algn="l" rtl="0">
       <a:lnSpc>
         <a:spcPct val="100000"/>
       </a:lnSpc>
@@ -186,7 +185,7 @@
         <a:srgbClr val="000000"/>
       </a:buClr>
       <a:buFont typeface="Arial"/>
-      <a:defRPr b="0" i="0" sz="1400" u="none" cap="none" strike="noStrike">
+      <a:defRPr sz="1400" b="0" i="0" u="none" strike="noStrike" cap="none">
         <a:solidFill>
           <a:srgbClr val="000000"/>
         </a:solidFill>
@@ -196,7 +195,7 @@
         <a:sym typeface="Arial"/>
       </a:defRPr>
     </a:lvl6pPr>
-    <a:lvl7pPr lvl="6" marR="0" rtl="0" algn="l">
+    <a:lvl7pPr marR="0" lvl="6" algn="l" rtl="0">
       <a:lnSpc>
         <a:spcPct val="100000"/>
       </a:lnSpc>
@@ -210,7 +209,7 @@
         <a:srgbClr val="000000"/>
       </a:buClr>
       <a:buFont typeface="Arial"/>
-      <a:defRPr b="0" i="0" sz="1400" u="none" cap="none" strike="noStrike">
+      <a:defRPr sz="1400" b="0" i="0" u="none" strike="noStrike" cap="none">
         <a:solidFill>
           <a:srgbClr val="000000"/>
         </a:solidFill>
@@ -220,7 +219,7 @@
         <a:sym typeface="Arial"/>
       </a:defRPr>
     </a:lvl7pPr>
-    <a:lvl8pPr lvl="7" marR="0" rtl="0" algn="l">
+    <a:lvl8pPr marR="0" lvl="7" algn="l" rtl="0">
       <a:lnSpc>
         <a:spcPct val="100000"/>
       </a:lnSpc>
@@ -234,7 +233,7 @@
         <a:srgbClr val="000000"/>
       </a:buClr>
       <a:buFont typeface="Arial"/>
-      <a:defRPr b="0" i="0" sz="1400" u="none" cap="none" strike="noStrike">
+      <a:defRPr sz="1400" b="0" i="0" u="none" strike="noStrike" cap="none">
         <a:solidFill>
           <a:srgbClr val="000000"/>
         </a:solidFill>
@@ -244,7 +243,7 @@
         <a:sym typeface="Arial"/>
       </a:defRPr>
     </a:lvl8pPr>
-    <a:lvl9pPr lvl="8" marR="0" rtl="0" algn="l">
+    <a:lvl9pPr marR="0" lvl="8" algn="l" rtl="0">
       <a:lnSpc>
         <a:spcPct val="100000"/>
       </a:lnSpc>
@@ -258,7 +257,7 @@
         <a:srgbClr val="000000"/>
       </a:buClr>
       <a:buFont typeface="Arial"/>
-      <a:defRPr b="0" i="0" sz="1400" u="none" cap="none" strike="noStrike">
+      <a:defRPr sz="1400" b="0" i="0" u="none" strike="noStrike" cap="none">
         <a:solidFill>
           <a:srgbClr val="000000"/>
         </a:solidFill>
@@ -271,7 +270,7 @@
   </p:defaultTextStyle>
   <p:extLst>
     <p:ext uri="{EFAFB233-063F-42B5-8137-9DF3F51BA10A}">
-      <p15:sldGuideLst>
+      <p15:sldGuideLst xmlns:p15="http://schemas.microsoft.com/office/powerpoint/2012/main">
         <p15:guide id="1" orient="horz" pos="3240">
           <p15:clr>
             <a:srgbClr val="A4A3A4"/>
@@ -289,11 +288,16 @@
 </file>
 
 <file path=ppt/notesMasters/notesMaster1.xml><?xml version="1.0" encoding="utf-8"?>
-<p:notesMaster xmlns:a="http://schemas.openxmlformats.org/drawingml/2006/main" xmlns:r="http://schemas.openxmlformats.org/officeDocument/2006/relationships" xmlns:mc="http://schemas.openxmlformats.org/markup-compatibility/2006" xmlns:mv="urn:schemas-microsoft-com:mac:vml" xmlns:p="http://schemas.openxmlformats.org/presentationml/2006/main" xmlns:c="http://schemas.openxmlformats.org/drawingml/2006/chart" xmlns:dgm="http://schemas.openxmlformats.org/drawingml/2006/diagram" xmlns:o="urn:schemas-microsoft-com:office:office" xmlns:v="urn:schemas-microsoft-com:vml" xmlns:pvml="urn:schemas-microsoft-com:office:powerpoint" xmlns:com="http://schemas.openxmlformats.org/drawingml/2006/compatibility" xmlns:p14="http://schemas.microsoft.com/office/powerpoint/2010/main" xmlns:p15="http://schemas.microsoft.com/office/powerpoint/2012/main" xmlns:ahyp="http://schemas.microsoft.com/office/drawing/2018/hyperlinkcolor">
+<p:notesMaster xmlns:a="http://schemas.openxmlformats.org/drawingml/2006/main" xmlns:r="http://schemas.openxmlformats.org/officeDocument/2006/relationships" xmlns:p="http://schemas.openxmlformats.org/presentationml/2006/main">
   <p:cSld>
+    <p:bg>
+      <p:bgRef idx="1001">
+        <a:schemeClr val="bg1"/>
+      </p:bgRef>
+    </p:bg>
     <p:spTree>
       <p:nvGrpSpPr>
-        <p:cNvPr id="2" name="Shape 2"/>
+        <p:cNvPr id="1" name="Shape 2"/>
         <p:cNvGrpSpPr/>
         <p:nvPr/>
       </p:nvGrpSpPr>
@@ -308,9 +312,11 @@
       <p:sp>
         <p:nvSpPr>
           <p:cNvPr id="3" name="Google Shape;3;n"/>
-          <p:cNvSpPr/>
+          <p:cNvSpPr>
+            <a:spLocks noGrp="1" noRot="1" noChangeAspect="1"/>
+          </p:cNvSpPr>
           <p:nvPr>
-            <p:ph idx="2" type="sldImg"/>
+            <p:ph type="sldImg" idx="2"/>
           </p:nvPr>
         </p:nvSpPr>
         <p:spPr>
@@ -319,9 +325,13 @@
             <a:ext cx="6096075" cy="3429000"/>
           </a:xfrm>
           <a:custGeom>
-            <a:rect b="b" l="l" r="r" t="t"/>
+            <a:avLst/>
+            <a:gdLst/>
+            <a:ahLst/>
+            <a:cxnLst/>
+            <a:rect l="l" t="t" r="r" b="b"/>
             <a:pathLst>
-              <a:path extrusionOk="0" h="120000" w="120000">
+              <a:path w="120000" h="120000" extrusionOk="0">
                 <a:moveTo>
                   <a:pt x="0" y="0"/>
                 </a:moveTo>
@@ -339,23 +349,25 @@
             </a:pathLst>
           </a:custGeom>
           <a:noFill/>
-          <a:ln cap="flat" cmpd="sng" w="9525">
+          <a:ln w="9525" cap="flat" cmpd="sng">
             <a:solidFill>
               <a:srgbClr val="000000"/>
             </a:solidFill>
             <a:prstDash val="solid"/>
             <a:round/>
-            <a:headEnd len="sm" w="sm" type="none"/>
-            <a:tailEnd len="sm" w="sm" type="none"/>
+            <a:headEnd type="none" w="sm" len="sm"/>
+            <a:tailEnd type="none" w="sm" len="sm"/>
           </a:ln>
         </p:spPr>
       </p:sp>
       <p:sp>
         <p:nvSpPr>
           <p:cNvPr id="4" name="Google Shape;4;n"/>
-          <p:cNvSpPr txBox="1"/>
+          <p:cNvSpPr txBox="1">
+            <a:spLocks noGrp="1"/>
+          </p:cNvSpPr>
           <p:nvPr>
-            <p:ph idx="1" type="body"/>
+            <p:ph type="body" idx="1"/>
           </p:nvPr>
         </p:nvSpPr>
         <p:spPr>
@@ -372,11 +384,11 @@
           </a:ln>
         </p:spPr>
         <p:txBody>
-          <a:bodyPr anchorCtr="0" anchor="t" bIns="91425" lIns="91425" spcFirstLastPara="1" rIns="91425" wrap="square" tIns="91425">
+          <a:bodyPr spcFirstLastPara="1" wrap="square" lIns="91425" tIns="91425" rIns="91425" bIns="91425" anchor="t" anchorCtr="0">
             <a:noAutofit/>
           </a:bodyPr>
           <a:lstStyle>
-            <a:lvl1pPr indent="-298450" lvl="0" marL="457200">
+            <a:lvl1pPr marL="457200" lvl="0" indent="-298450">
               <a:spcBef>
                 <a:spcPts val="0"/>
               </a:spcBef>
@@ -387,7 +399,7 @@
               <a:buChar char="●"/>
               <a:defRPr sz="1100"/>
             </a:lvl1pPr>
-            <a:lvl2pPr indent="-298450" lvl="1" marL="914400">
+            <a:lvl2pPr marL="914400" lvl="1" indent="-298450">
               <a:spcBef>
                 <a:spcPts val="0"/>
               </a:spcBef>
@@ -398,7 +410,7 @@
               <a:buChar char="○"/>
               <a:defRPr sz="1100"/>
             </a:lvl2pPr>
-            <a:lvl3pPr indent="-298450" lvl="2" marL="1371600">
+            <a:lvl3pPr marL="1371600" lvl="2" indent="-298450">
               <a:spcBef>
                 <a:spcPts val="0"/>
               </a:spcBef>
@@ -409,7 +421,7 @@
               <a:buChar char="■"/>
               <a:defRPr sz="1100"/>
             </a:lvl3pPr>
-            <a:lvl4pPr indent="-298450" lvl="3" marL="1828800">
+            <a:lvl4pPr marL="1828800" lvl="3" indent="-298450">
               <a:spcBef>
                 <a:spcPts val="0"/>
               </a:spcBef>
@@ -420,7 +432,7 @@
               <a:buChar char="●"/>
               <a:defRPr sz="1100"/>
             </a:lvl4pPr>
-            <a:lvl5pPr indent="-298450" lvl="4" marL="2286000">
+            <a:lvl5pPr marL="2286000" lvl="4" indent="-298450">
               <a:spcBef>
                 <a:spcPts val="0"/>
               </a:spcBef>
@@ -431,7 +443,7 @@
               <a:buChar char="○"/>
               <a:defRPr sz="1100"/>
             </a:lvl5pPr>
-            <a:lvl6pPr indent="-298450" lvl="5" marL="2743200">
+            <a:lvl6pPr marL="2743200" lvl="5" indent="-298450">
               <a:spcBef>
                 <a:spcPts val="0"/>
               </a:spcBef>
@@ -442,7 +454,7 @@
               <a:buChar char="■"/>
               <a:defRPr sz="1100"/>
             </a:lvl6pPr>
-            <a:lvl7pPr indent="-298450" lvl="6" marL="3200400">
+            <a:lvl7pPr marL="3200400" lvl="6" indent="-298450">
               <a:spcBef>
                 <a:spcPts val="0"/>
               </a:spcBef>
@@ -453,7 +465,7 @@
               <a:buChar char="●"/>
               <a:defRPr sz="1100"/>
             </a:lvl7pPr>
-            <a:lvl8pPr indent="-298450" lvl="7" marL="3657600">
+            <a:lvl8pPr marL="3657600" lvl="7" indent="-298450">
               <a:spcBef>
                 <a:spcPts val="0"/>
               </a:spcBef>
@@ -464,7 +476,7 @@
               <a:buChar char="○"/>
               <a:defRPr sz="1100"/>
             </a:lvl8pPr>
-            <a:lvl9pPr indent="-298450" lvl="8" marL="4114800">
+            <a:lvl9pPr marL="4114800" lvl="8" indent="-298450">
               <a:spcBef>
                 <a:spcPts val="0"/>
               </a:spcBef>
@@ -476,14 +488,16 @@
               <a:defRPr sz="1100"/>
             </a:lvl9pPr>
           </a:lstStyle>
-          <a:p/>
+          <a:p>
+            <a:endParaRPr/>
+          </a:p>
         </p:txBody>
       </p:sp>
     </p:spTree>
   </p:cSld>
-  <p:clrMap accent1="accent1" accent2="accent2" accent3="accent3" accent4="accent4" accent5="accent5" accent6="accent6" bg1="lt1" bg2="dk2" tx1="dk1" tx2="lt2" folHlink="folHlink" hlink="hlink"/>
+  <p:clrMap bg1="lt1" tx1="dk1" bg2="dk2" tx2="lt2" accent1="accent1" accent2="accent2" accent3="accent3" accent4="accent4" accent5="accent5" accent6="accent6" hlink="hlink" folHlink="folHlink"/>
   <p:notesStyle>
-    <a:defPPr lvl="0" marR="0" rtl="0" algn="l">
+    <a:defPPr marR="0" lvl="0" algn="l" rtl="0">
       <a:lnSpc>
         <a:spcPct val="100000"/>
       </a:lnSpc>
@@ -494,7 +508,7 @@
         <a:spcPts val="0"/>
       </a:spcAft>
     </a:defPPr>
-    <a:lvl1pPr lvl="0" marR="0" rtl="0" algn="l">
+    <a:lvl1pPr marR="0" lvl="0" algn="l" rtl="0">
       <a:lnSpc>
         <a:spcPct val="100000"/>
       </a:lnSpc>
@@ -508,7 +522,7 @@
         <a:srgbClr val="000000"/>
       </a:buClr>
       <a:buFont typeface="Arial"/>
-      <a:defRPr b="0" i="0" sz="1400" u="none" cap="none" strike="noStrike">
+      <a:defRPr sz="1400" b="0" i="0" u="none" strike="noStrike" cap="none">
         <a:solidFill>
           <a:srgbClr val="000000"/>
         </a:solidFill>
@@ -518,7 +532,7 @@
         <a:sym typeface="Arial"/>
       </a:defRPr>
     </a:lvl1pPr>
-    <a:lvl2pPr lvl="1" marR="0" rtl="0" algn="l">
+    <a:lvl2pPr marR="0" lvl="1" algn="l" rtl="0">
       <a:lnSpc>
         <a:spcPct val="100000"/>
       </a:lnSpc>
@@ -532,7 +546,7 @@
         <a:srgbClr val="000000"/>
       </a:buClr>
       <a:buFont typeface="Arial"/>
-      <a:defRPr b="0" i="0" sz="1400" u="none" cap="none" strike="noStrike">
+      <a:defRPr sz="1400" b="0" i="0" u="none" strike="noStrike" cap="none">
         <a:solidFill>
           <a:srgbClr val="000000"/>
         </a:solidFill>
@@ -542,7 +556,7 @@
         <a:sym typeface="Arial"/>
       </a:defRPr>
     </a:lvl2pPr>
-    <a:lvl3pPr lvl="2" marR="0" rtl="0" algn="l">
+    <a:lvl3pPr marR="0" lvl="2" algn="l" rtl="0">
       <a:lnSpc>
         <a:spcPct val="100000"/>
       </a:lnSpc>
@@ -556,7 +570,7 @@
         <a:srgbClr val="000000"/>
       </a:buClr>
       <a:buFont typeface="Arial"/>
-      <a:defRPr b="0" i="0" sz="1400" u="none" cap="none" strike="noStrike">
+      <a:defRPr sz="1400" b="0" i="0" u="none" strike="noStrike" cap="none">
         <a:solidFill>
           <a:srgbClr val="000000"/>
         </a:solidFill>
@@ -566,7 +580,7 @@
         <a:sym typeface="Arial"/>
       </a:defRPr>
     </a:lvl3pPr>
-    <a:lvl4pPr lvl="3" marR="0" rtl="0" algn="l">
+    <a:lvl4pPr marR="0" lvl="3" algn="l" rtl="0">
       <a:lnSpc>
         <a:spcPct val="100000"/>
       </a:lnSpc>
@@ -580,7 +594,7 @@
         <a:srgbClr val="000000"/>
       </a:buClr>
       <a:buFont typeface="Arial"/>
-      <a:defRPr b="0" i="0" sz="1400" u="none" cap="none" strike="noStrike">
+      <a:defRPr sz="1400" b="0" i="0" u="none" strike="noStrike" cap="none">
         <a:solidFill>
           <a:srgbClr val="000000"/>
         </a:solidFill>
@@ -590,7 +604,7 @@
         <a:sym typeface="Arial"/>
       </a:defRPr>
     </a:lvl4pPr>
-    <a:lvl5pPr lvl="4" marR="0" rtl="0" algn="l">
+    <a:lvl5pPr marR="0" lvl="4" algn="l" rtl="0">
       <a:lnSpc>
         <a:spcPct val="100000"/>
       </a:lnSpc>
@@ -604,7 +618,7 @@
         <a:srgbClr val="000000"/>
       </a:buClr>
       <a:buFont typeface="Arial"/>
-      <a:defRPr b="0" i="0" sz="1400" u="none" cap="none" strike="noStrike">
+      <a:defRPr sz="1400" b="0" i="0" u="none" strike="noStrike" cap="none">
         <a:solidFill>
           <a:srgbClr val="000000"/>
         </a:solidFill>
@@ -614,7 +628,7 @@
         <a:sym typeface="Arial"/>
       </a:defRPr>
     </a:lvl5pPr>
-    <a:lvl6pPr lvl="5" marR="0" rtl="0" algn="l">
+    <a:lvl6pPr marR="0" lvl="5" algn="l" rtl="0">
       <a:lnSpc>
         <a:spcPct val="100000"/>
       </a:lnSpc>
@@ -628,7 +642,7 @@
         <a:srgbClr val="000000"/>
       </a:buClr>
       <a:buFont typeface="Arial"/>
-      <a:defRPr b="0" i="0" sz="1400" u="none" cap="none" strike="noStrike">
+      <a:defRPr sz="1400" b="0" i="0" u="none" strike="noStrike" cap="none">
         <a:solidFill>
           <a:srgbClr val="000000"/>
         </a:solidFill>
@@ -638,7 +652,7 @@
         <a:sym typeface="Arial"/>
       </a:defRPr>
     </a:lvl6pPr>
-    <a:lvl7pPr lvl="6" marR="0" rtl="0" algn="l">
+    <a:lvl7pPr marR="0" lvl="6" algn="l" rtl="0">
       <a:lnSpc>
         <a:spcPct val="100000"/>
       </a:lnSpc>
@@ -652,7 +666,7 @@
         <a:srgbClr val="000000"/>
       </a:buClr>
       <a:buFont typeface="Arial"/>
-      <a:defRPr b="0" i="0" sz="1400" u="none" cap="none" strike="noStrike">
+      <a:defRPr sz="1400" b="0" i="0" u="none" strike="noStrike" cap="none">
         <a:solidFill>
           <a:srgbClr val="000000"/>
         </a:solidFill>
@@ -662,7 +676,7 @@
         <a:sym typeface="Arial"/>
       </a:defRPr>
     </a:lvl7pPr>
-    <a:lvl8pPr lvl="7" marR="0" rtl="0" algn="l">
+    <a:lvl8pPr marR="0" lvl="7" algn="l" rtl="0">
       <a:lnSpc>
         <a:spcPct val="100000"/>
       </a:lnSpc>
@@ -676,7 +690,7 @@
         <a:srgbClr val="000000"/>
       </a:buClr>
       <a:buFont typeface="Arial"/>
-      <a:defRPr b="0" i="0" sz="1400" u="none" cap="none" strike="noStrike">
+      <a:defRPr sz="1400" b="0" i="0" u="none" strike="noStrike" cap="none">
         <a:solidFill>
           <a:srgbClr val="000000"/>
         </a:solidFill>
@@ -686,7 +700,7 @@
         <a:sym typeface="Arial"/>
       </a:defRPr>
     </a:lvl8pPr>
-    <a:lvl9pPr lvl="8" marR="0" rtl="0" algn="l">
+    <a:lvl9pPr marR="0" lvl="8" algn="l" rtl="0">
       <a:lnSpc>
         <a:spcPct val="100000"/>
       </a:lnSpc>
@@ -700,7 +714,7 @@
         <a:srgbClr val="000000"/>
       </a:buClr>
       <a:buFont typeface="Arial"/>
-      <a:defRPr b="0" i="0" sz="1400" u="none" cap="none" strike="noStrike">
+      <a:defRPr sz="1400" b="0" i="0" u="none" strike="noStrike" cap="none">
         <a:solidFill>
           <a:srgbClr val="000000"/>
         </a:solidFill>
@@ -715,11 +729,11 @@
 </file>
 
 <file path=ppt/notesSlides/notesSlide1.xml><?xml version="1.0" encoding="utf-8"?>
-<p:notes xmlns:a="http://schemas.openxmlformats.org/drawingml/2006/main" xmlns:r="http://schemas.openxmlformats.org/officeDocument/2006/relationships" xmlns:mc="http://schemas.openxmlformats.org/markup-compatibility/2006" xmlns:mv="urn:schemas-microsoft-com:mac:vml" xmlns:p="http://schemas.openxmlformats.org/presentationml/2006/main" xmlns:c="http://schemas.openxmlformats.org/drawingml/2006/chart" xmlns:dgm="http://schemas.openxmlformats.org/drawingml/2006/diagram" xmlns:o="urn:schemas-microsoft-com:office:office" xmlns:v="urn:schemas-microsoft-com:vml" xmlns:pvml="urn:schemas-microsoft-com:office:powerpoint" xmlns:com="http://schemas.openxmlformats.org/drawingml/2006/compatibility" xmlns:p14="http://schemas.microsoft.com/office/powerpoint/2010/main" xmlns:p15="http://schemas.microsoft.com/office/powerpoint/2012/main" xmlns:ahyp="http://schemas.microsoft.com/office/drawing/2018/hyperlinkcolor" showMasterPhAnim="0" showMasterSp="0">
+<p:notes xmlns:a="http://schemas.openxmlformats.org/drawingml/2006/main" xmlns:r="http://schemas.openxmlformats.org/officeDocument/2006/relationships" xmlns:p="http://schemas.openxmlformats.org/presentationml/2006/main" showMasterSp="0" showMasterPhAnim="0">
   <p:cSld>
     <p:spTree>
       <p:nvGrpSpPr>
-        <p:cNvPr id="102" name="Shape 102"/>
+        <p:cNvPr id="1" name="Shape 102"/>
         <p:cNvGrpSpPr/>
         <p:nvPr/>
       </p:nvGrpSpPr>
@@ -734,9 +748,11 @@
       <p:sp>
         <p:nvSpPr>
           <p:cNvPr id="103" name="Google Shape;103;g305b2e72063_0_231:notes"/>
-          <p:cNvSpPr txBox="1"/>
+          <p:cNvSpPr txBox="1">
+            <a:spLocks noGrp="1"/>
+          </p:cNvSpPr>
           <p:nvPr>
-            <p:ph idx="1" type="body"/>
+            <p:ph type="body" idx="1"/>
           </p:nvPr>
         </p:nvSpPr>
         <p:spPr>
@@ -753,12 +769,12 @@
           </a:ln>
         </p:spPr>
         <p:txBody>
-          <a:bodyPr anchorCtr="0" anchor="ctr" bIns="91425" lIns="91425" spcFirstLastPara="1" rIns="91425" wrap="square" tIns="91425">
+          <a:bodyPr spcFirstLastPara="1" wrap="square" lIns="91425" tIns="91425" rIns="91425" bIns="91425" anchor="ctr" anchorCtr="0">
             <a:noAutofit/>
           </a:bodyPr>
           <a:lstStyle/>
           <a:p>
-            <a:pPr indent="0" lvl="0" marL="0" rtl="0" algn="l">
+            <a:pPr marL="0" lvl="0" indent="0" algn="l" rtl="0">
               <a:spcBef>
                 <a:spcPts val="0"/>
               </a:spcBef>
@@ -767,9 +783,6 @@
               </a:spcAft>
               <a:buNone/>
             </a:pPr>
-            <a:r>
-              <a:t/>
-            </a:r>
             <a:endParaRPr/>
           </a:p>
         </p:txBody>
@@ -777,20 +790,26 @@
       <p:sp>
         <p:nvSpPr>
           <p:cNvPr id="104" name="Google Shape;104;g305b2e72063_0_231:notes"/>
-          <p:cNvSpPr/>
+          <p:cNvSpPr>
+            <a:spLocks noGrp="1" noRot="1" noChangeAspect="1"/>
+          </p:cNvSpPr>
           <p:nvPr>
-            <p:ph idx="2" type="sldImg"/>
+            <p:ph type="sldImg" idx="2"/>
           </p:nvPr>
         </p:nvSpPr>
         <p:spPr>
           <a:xfrm>
-            <a:off x="1143000" y="685800"/>
-            <a:ext cx="4572000" cy="3429000"/>
+            <a:off x="381000" y="685800"/>
+            <a:ext cx="6096000" cy="3429000"/>
           </a:xfrm>
           <a:custGeom>
-            <a:rect b="b" l="l" r="r" t="t"/>
+            <a:avLst/>
+            <a:gdLst/>
+            <a:ahLst/>
+            <a:cxnLst/>
+            <a:rect l="l" t="t" r="r" b="b"/>
             <a:pathLst>
-              <a:path extrusionOk="0" h="120000" w="120000">
+              <a:path w="120000" h="120000" extrusionOk="0">
                 <a:moveTo>
                   <a:pt x="0" y="0"/>
                 </a:moveTo>
@@ -808,14 +827,14 @@
             </a:pathLst>
           </a:custGeom>
           <a:noFill/>
-          <a:ln cap="flat" cmpd="sng" w="9525">
+          <a:ln w="9525" cap="flat" cmpd="sng">
             <a:solidFill>
               <a:srgbClr val="000000"/>
             </a:solidFill>
             <a:prstDash val="solid"/>
             <a:round/>
-            <a:headEnd len="sm" w="sm" type="none"/>
-            <a:tailEnd len="sm" w="sm" type="none"/>
+            <a:headEnd type="none" w="sm" len="sm"/>
+            <a:tailEnd type="none" w="sm" len="sm"/>
           </a:ln>
         </p:spPr>
       </p:sp>
@@ -828,110 +847,11 @@
 </file>
 
 <file path=ppt/notesSlides/notesSlide2.xml><?xml version="1.0" encoding="utf-8"?>
-<p:notes xmlns:a="http://schemas.openxmlformats.org/drawingml/2006/main" xmlns:r="http://schemas.openxmlformats.org/officeDocument/2006/relationships" xmlns:mc="http://schemas.openxmlformats.org/markup-compatibility/2006" xmlns:mv="urn:schemas-microsoft-com:mac:vml" xmlns:p="http://schemas.openxmlformats.org/presentationml/2006/main" xmlns:c="http://schemas.openxmlformats.org/drawingml/2006/chart" xmlns:dgm="http://schemas.openxmlformats.org/drawingml/2006/diagram" xmlns:o="urn:schemas-microsoft-com:office:office" xmlns:v="urn:schemas-microsoft-com:vml" xmlns:pvml="urn:schemas-microsoft-com:office:powerpoint" xmlns:com="http://schemas.openxmlformats.org/drawingml/2006/compatibility" xmlns:p14="http://schemas.microsoft.com/office/powerpoint/2010/main" xmlns:p15="http://schemas.microsoft.com/office/powerpoint/2012/main" xmlns:ahyp="http://schemas.microsoft.com/office/drawing/2018/hyperlinkcolor" showMasterPhAnim="0" showMasterSp="0">
+<p:notes xmlns:a="http://schemas.openxmlformats.org/drawingml/2006/main" xmlns:r="http://schemas.openxmlformats.org/officeDocument/2006/relationships" xmlns:p="http://schemas.openxmlformats.org/presentationml/2006/main" showMasterSp="0" showMasterPhAnim="0">
   <p:cSld>
     <p:spTree>
       <p:nvGrpSpPr>
-        <p:cNvPr id="109" name="Shape 109"/>
-        <p:cNvGrpSpPr/>
-        <p:nvPr/>
-      </p:nvGrpSpPr>
-      <p:grpSpPr>
-        <a:xfrm>
-          <a:off x="0" y="0"/>
-          <a:ext cx="0" cy="0"/>
-          <a:chOff x="0" y="0"/>
-          <a:chExt cx="0" cy="0"/>
-        </a:xfrm>
-      </p:grpSpPr>
-      <p:sp>
-        <p:nvSpPr>
-          <p:cNvPr id="110" name="Google Shape;110;g61bdf1f55e_0_0:notes"/>
-          <p:cNvSpPr/>
-          <p:nvPr>
-            <p:ph idx="2" type="sldImg"/>
-          </p:nvPr>
-        </p:nvSpPr>
-        <p:spPr>
-          <a:xfrm>
-            <a:off x="381300" y="685800"/>
-            <a:ext cx="6096000" cy="3429000"/>
-          </a:xfrm>
-          <a:custGeom>
-            <a:rect b="b" l="l" r="r" t="t"/>
-            <a:pathLst>
-              <a:path extrusionOk="0" h="120000" w="120000">
-                <a:moveTo>
-                  <a:pt x="0" y="0"/>
-                </a:moveTo>
-                <a:lnTo>
-                  <a:pt x="120000" y="0"/>
-                </a:lnTo>
-                <a:lnTo>
-                  <a:pt x="120000" y="120000"/>
-                </a:lnTo>
-                <a:lnTo>
-                  <a:pt x="0" y="120000"/>
-                </a:lnTo>
-                <a:close/>
-              </a:path>
-            </a:pathLst>
-          </a:custGeom>
-        </p:spPr>
-      </p:sp>
-      <p:sp>
-        <p:nvSpPr>
-          <p:cNvPr id="111" name="Google Shape;111;g61bdf1f55e_0_0:notes"/>
-          <p:cNvSpPr txBox="1"/>
-          <p:nvPr>
-            <p:ph idx="1" type="body"/>
-          </p:nvPr>
-        </p:nvSpPr>
-        <p:spPr>
-          <a:xfrm>
-            <a:off x="685800" y="4343400"/>
-            <a:ext cx="5486400" cy="4114800"/>
-          </a:xfrm>
-          <a:prstGeom prst="rect">
-            <a:avLst/>
-          </a:prstGeom>
-        </p:spPr>
-        <p:txBody>
-          <a:bodyPr anchorCtr="0" anchor="t" bIns="91425" lIns="91425" spcFirstLastPara="1" rIns="91425" wrap="square" tIns="91425">
-            <a:noAutofit/>
-          </a:bodyPr>
-          <a:lstStyle/>
-          <a:p>
-            <a:pPr indent="0" lvl="0" marL="0" rtl="0" algn="l">
-              <a:spcBef>
-                <a:spcPts val="0"/>
-              </a:spcBef>
-              <a:spcAft>
-                <a:spcPts val="0"/>
-              </a:spcAft>
-              <a:buNone/>
-            </a:pPr>
-            <a:r>
-              <a:t/>
-            </a:r>
-            <a:endParaRPr/>
-          </a:p>
-        </p:txBody>
-      </p:sp>
-    </p:spTree>
-  </p:cSld>
-  <p:clrMapOvr>
-    <a:masterClrMapping/>
-  </p:clrMapOvr>
-</p:notes>
-</file>
-
-<file path=ppt/notesSlides/notesSlide3.xml><?xml version="1.0" encoding="utf-8"?>
-<p:notes xmlns:a="http://schemas.openxmlformats.org/drawingml/2006/main" xmlns:r="http://schemas.openxmlformats.org/officeDocument/2006/relationships" xmlns:mc="http://schemas.openxmlformats.org/markup-compatibility/2006" xmlns:mv="urn:schemas-microsoft-com:mac:vml" xmlns:p="http://schemas.openxmlformats.org/presentationml/2006/main" xmlns:c="http://schemas.openxmlformats.org/drawingml/2006/chart" xmlns:dgm="http://schemas.openxmlformats.org/drawingml/2006/diagram" xmlns:o="urn:schemas-microsoft-com:office:office" xmlns:v="urn:schemas-microsoft-com:vml" xmlns:pvml="urn:schemas-microsoft-com:office:powerpoint" xmlns:com="http://schemas.openxmlformats.org/drawingml/2006/compatibility" xmlns:p14="http://schemas.microsoft.com/office/powerpoint/2010/main" xmlns:p15="http://schemas.microsoft.com/office/powerpoint/2012/main" xmlns:ahyp="http://schemas.microsoft.com/office/drawing/2018/hyperlinkcolor" showMasterPhAnim="0" showMasterSp="0">
-  <p:cSld>
-    <p:spTree>
-      <p:nvGrpSpPr>
-        <p:cNvPr id="119" name="Shape 119"/>
+        <p:cNvPr id="1" name="Shape 119"/>
         <p:cNvGrpSpPr/>
         <p:nvPr/>
       </p:nvGrpSpPr>
@@ -946,9 +866,11 @@
       <p:sp>
         <p:nvSpPr>
           <p:cNvPr id="120" name="Google Shape;120;g313dd687b2d_0_6:notes"/>
-          <p:cNvSpPr/>
+          <p:cNvSpPr>
+            <a:spLocks noGrp="1" noRot="1" noChangeAspect="1"/>
+          </p:cNvSpPr>
           <p:nvPr>
-            <p:ph idx="2" type="sldImg"/>
+            <p:ph type="sldImg" idx="2"/>
           </p:nvPr>
         </p:nvSpPr>
         <p:spPr>
@@ -957,9 +879,13 @@
             <a:ext cx="6096000" cy="3429000"/>
           </a:xfrm>
           <a:custGeom>
-            <a:rect b="b" l="l" r="r" t="t"/>
+            <a:avLst/>
+            <a:gdLst/>
+            <a:ahLst/>
+            <a:cxnLst/>
+            <a:rect l="l" t="t" r="r" b="b"/>
             <a:pathLst>
-              <a:path extrusionOk="0" h="120000" w="120000">
+              <a:path w="120000" h="120000" extrusionOk="0">
                 <a:moveTo>
                   <a:pt x="0" y="0"/>
                 </a:moveTo>
@@ -981,9 +907,11 @@
       <p:sp>
         <p:nvSpPr>
           <p:cNvPr id="121" name="Google Shape;121;g313dd687b2d_0_6:notes"/>
-          <p:cNvSpPr txBox="1"/>
+          <p:cNvSpPr txBox="1">
+            <a:spLocks noGrp="1"/>
+          </p:cNvSpPr>
           <p:nvPr>
-            <p:ph idx="1" type="body"/>
+            <p:ph type="body" idx="1"/>
           </p:nvPr>
         </p:nvSpPr>
         <p:spPr>
@@ -996,12 +924,12 @@
           </a:prstGeom>
         </p:spPr>
         <p:txBody>
-          <a:bodyPr anchorCtr="0" anchor="t" bIns="91425" lIns="91425" spcFirstLastPara="1" rIns="91425" wrap="square" tIns="91425">
+          <a:bodyPr spcFirstLastPara="1" wrap="square" lIns="91425" tIns="91425" rIns="91425" bIns="91425" anchor="t" anchorCtr="0">
             <a:noAutofit/>
           </a:bodyPr>
           <a:lstStyle/>
           <a:p>
-            <a:pPr indent="0" lvl="0" marL="0" rtl="0" algn="l">
+            <a:pPr marL="0" lvl="0" indent="0" algn="l" rtl="0">
               <a:spcBef>
                 <a:spcPts val="0"/>
               </a:spcBef>
@@ -1010,9 +938,6 @@
               </a:spcAft>
               <a:buNone/>
             </a:pPr>
-            <a:r>
-              <a:t/>
-            </a:r>
             <a:endParaRPr/>
           </a:p>
         </p:txBody>
@@ -1025,12 +950,12 @@
 </p:notes>
 </file>
 
-<file path=ppt/notesSlides/notesSlide4.xml><?xml version="1.0" encoding="utf-8"?>
-<p:notes xmlns:a="http://schemas.openxmlformats.org/drawingml/2006/main" xmlns:r="http://schemas.openxmlformats.org/officeDocument/2006/relationships" xmlns:mc="http://schemas.openxmlformats.org/markup-compatibility/2006" xmlns:mv="urn:schemas-microsoft-com:mac:vml" xmlns:p="http://schemas.openxmlformats.org/presentationml/2006/main" xmlns:c="http://schemas.openxmlformats.org/drawingml/2006/chart" xmlns:dgm="http://schemas.openxmlformats.org/drawingml/2006/diagram" xmlns:o="urn:schemas-microsoft-com:office:office" xmlns:v="urn:schemas-microsoft-com:vml" xmlns:pvml="urn:schemas-microsoft-com:office:powerpoint" xmlns:com="http://schemas.openxmlformats.org/drawingml/2006/compatibility" xmlns:p14="http://schemas.microsoft.com/office/powerpoint/2010/main" xmlns:p15="http://schemas.microsoft.com/office/powerpoint/2012/main" xmlns:ahyp="http://schemas.microsoft.com/office/drawing/2018/hyperlinkcolor" showMasterPhAnim="0" showMasterSp="0">
+<file path=ppt/notesSlides/notesSlide3.xml><?xml version="1.0" encoding="utf-8"?>
+<p:notes xmlns:a="http://schemas.openxmlformats.org/drawingml/2006/main" xmlns:r="http://schemas.openxmlformats.org/officeDocument/2006/relationships" xmlns:p="http://schemas.openxmlformats.org/presentationml/2006/main" showMasterSp="0" showMasterPhAnim="0">
   <p:cSld>
     <p:spTree>
       <p:nvGrpSpPr>
-        <p:cNvPr id="125" name="Shape 125"/>
+        <p:cNvPr id="1" name="Shape 125"/>
         <p:cNvGrpSpPr/>
         <p:nvPr/>
       </p:nvGrpSpPr>
@@ -1045,20 +970,26 @@
       <p:sp>
         <p:nvSpPr>
           <p:cNvPr id="126" name="Google Shape;126;g313dd687b2d_0_15:notes"/>
-          <p:cNvSpPr/>
+          <p:cNvSpPr>
+            <a:spLocks noGrp="1" noRot="1" noChangeAspect="1"/>
+          </p:cNvSpPr>
           <p:nvPr>
-            <p:ph idx="2" type="sldImg"/>
+            <p:ph type="sldImg" idx="2"/>
           </p:nvPr>
         </p:nvSpPr>
         <p:spPr>
           <a:xfrm>
-            <a:off x="381300" y="685800"/>
+            <a:off x="381000" y="685800"/>
             <a:ext cx="6096000" cy="3429000"/>
           </a:xfrm>
           <a:custGeom>
-            <a:rect b="b" l="l" r="r" t="t"/>
+            <a:avLst/>
+            <a:gdLst/>
+            <a:ahLst/>
+            <a:cxnLst/>
+            <a:rect l="l" t="t" r="r" b="b"/>
             <a:pathLst>
-              <a:path extrusionOk="0" h="120000" w="120000">
+              <a:path w="120000" h="120000" extrusionOk="0">
                 <a:moveTo>
                   <a:pt x="0" y="0"/>
                 </a:moveTo>
@@ -1080,9 +1011,11 @@
       <p:sp>
         <p:nvSpPr>
           <p:cNvPr id="127" name="Google Shape;127;g313dd687b2d_0_15:notes"/>
-          <p:cNvSpPr txBox="1"/>
+          <p:cNvSpPr txBox="1">
+            <a:spLocks noGrp="1"/>
+          </p:cNvSpPr>
           <p:nvPr>
-            <p:ph idx="1" type="body"/>
+            <p:ph type="body" idx="1"/>
           </p:nvPr>
         </p:nvSpPr>
         <p:spPr>
@@ -1095,12 +1028,12 @@
           </a:prstGeom>
         </p:spPr>
         <p:txBody>
-          <a:bodyPr anchorCtr="0" anchor="t" bIns="91425" lIns="91425" spcFirstLastPara="1" rIns="91425" wrap="square" tIns="91425">
+          <a:bodyPr spcFirstLastPara="1" wrap="square" lIns="91425" tIns="91425" rIns="91425" bIns="91425" anchor="t" anchorCtr="0">
             <a:noAutofit/>
           </a:bodyPr>
           <a:lstStyle/>
           <a:p>
-            <a:pPr indent="0" lvl="0" marL="0" rtl="0" algn="l">
+            <a:pPr marL="0" lvl="0" indent="0" algn="l" rtl="0">
               <a:spcBef>
                 <a:spcPts val="0"/>
               </a:spcBef>
@@ -1109,9 +1042,6 @@
               </a:spcAft>
               <a:buNone/>
             </a:pPr>
-            <a:r>
-              <a:t/>
-            </a:r>
             <a:endParaRPr/>
           </a:p>
         </p:txBody>
@@ -1124,12 +1054,12 @@
 </p:notes>
 </file>
 
-<file path=ppt/notesSlides/notesSlide5.xml><?xml version="1.0" encoding="utf-8"?>
-<p:notes xmlns:a="http://schemas.openxmlformats.org/drawingml/2006/main" xmlns:r="http://schemas.openxmlformats.org/officeDocument/2006/relationships" xmlns:mc="http://schemas.openxmlformats.org/markup-compatibility/2006" xmlns:mv="urn:schemas-microsoft-com:mac:vml" xmlns:p="http://schemas.openxmlformats.org/presentationml/2006/main" xmlns:c="http://schemas.openxmlformats.org/drawingml/2006/chart" xmlns:dgm="http://schemas.openxmlformats.org/drawingml/2006/diagram" xmlns:o="urn:schemas-microsoft-com:office:office" xmlns:v="urn:schemas-microsoft-com:vml" xmlns:pvml="urn:schemas-microsoft-com:office:powerpoint" xmlns:com="http://schemas.openxmlformats.org/drawingml/2006/compatibility" xmlns:p14="http://schemas.microsoft.com/office/powerpoint/2010/main" xmlns:p15="http://schemas.microsoft.com/office/powerpoint/2012/main" xmlns:ahyp="http://schemas.microsoft.com/office/drawing/2018/hyperlinkcolor" showMasterPhAnim="0" showMasterSp="0">
+<file path=ppt/notesSlides/notesSlide4.xml><?xml version="1.0" encoding="utf-8"?>
+<p:notes xmlns:a="http://schemas.openxmlformats.org/drawingml/2006/main" xmlns:r="http://schemas.openxmlformats.org/officeDocument/2006/relationships" xmlns:p="http://schemas.openxmlformats.org/presentationml/2006/main" showMasterSp="0" showMasterPhAnim="0">
   <p:cSld>
     <p:spTree>
       <p:nvGrpSpPr>
-        <p:cNvPr id="132" name="Shape 132"/>
+        <p:cNvPr id="1" name="Shape 132"/>
         <p:cNvGrpSpPr/>
         <p:nvPr/>
       </p:nvGrpSpPr>
@@ -1144,20 +1074,26 @@
       <p:sp>
         <p:nvSpPr>
           <p:cNvPr id="133" name="Google Shape;133;g313dd687b2d_0_20:notes"/>
-          <p:cNvSpPr/>
+          <p:cNvSpPr>
+            <a:spLocks noGrp="1" noRot="1" noChangeAspect="1"/>
+          </p:cNvSpPr>
           <p:nvPr>
-            <p:ph idx="2" type="sldImg"/>
+            <p:ph type="sldImg" idx="2"/>
           </p:nvPr>
         </p:nvSpPr>
         <p:spPr>
           <a:xfrm>
-            <a:off x="381300" y="685800"/>
+            <a:off x="381000" y="685800"/>
             <a:ext cx="6096000" cy="3429000"/>
           </a:xfrm>
           <a:custGeom>
-            <a:rect b="b" l="l" r="r" t="t"/>
+            <a:avLst/>
+            <a:gdLst/>
+            <a:ahLst/>
+            <a:cxnLst/>
+            <a:rect l="l" t="t" r="r" b="b"/>
             <a:pathLst>
-              <a:path extrusionOk="0" h="120000" w="120000">
+              <a:path w="120000" h="120000" extrusionOk="0">
                 <a:moveTo>
                   <a:pt x="0" y="0"/>
                 </a:moveTo>
@@ -1179,9 +1115,11 @@
       <p:sp>
         <p:nvSpPr>
           <p:cNvPr id="134" name="Google Shape;134;g313dd687b2d_0_20:notes"/>
-          <p:cNvSpPr txBox="1"/>
+          <p:cNvSpPr txBox="1">
+            <a:spLocks noGrp="1"/>
+          </p:cNvSpPr>
           <p:nvPr>
-            <p:ph idx="1" type="body"/>
+            <p:ph type="body" idx="1"/>
           </p:nvPr>
         </p:nvSpPr>
         <p:spPr>
@@ -1194,12 +1132,12 @@
           </a:prstGeom>
         </p:spPr>
         <p:txBody>
-          <a:bodyPr anchorCtr="0" anchor="t" bIns="91425" lIns="91425" spcFirstLastPara="1" rIns="91425" wrap="square" tIns="91425">
+          <a:bodyPr spcFirstLastPara="1" wrap="square" lIns="91425" tIns="91425" rIns="91425" bIns="91425" anchor="t" anchorCtr="0">
             <a:noAutofit/>
           </a:bodyPr>
           <a:lstStyle/>
           <a:p>
-            <a:pPr indent="0" lvl="0" marL="0" rtl="0" algn="l">
+            <a:pPr marL="0" lvl="0" indent="0" algn="l" rtl="0">
               <a:spcBef>
                 <a:spcPts val="0"/>
               </a:spcBef>
@@ -1208,9 +1146,6 @@
               </a:spcAft>
               <a:buNone/>
             </a:pPr>
-            <a:r>
-              <a:t/>
-            </a:r>
             <a:endParaRPr/>
           </a:p>
         </p:txBody>
@@ -1223,12 +1158,12 @@
 </p:notes>
 </file>
 
-<file path=ppt/notesSlides/notesSlide6.xml><?xml version="1.0" encoding="utf-8"?>
-<p:notes xmlns:a="http://schemas.openxmlformats.org/drawingml/2006/main" xmlns:r="http://schemas.openxmlformats.org/officeDocument/2006/relationships" xmlns:mc="http://schemas.openxmlformats.org/markup-compatibility/2006" xmlns:mv="urn:schemas-microsoft-com:mac:vml" xmlns:p="http://schemas.openxmlformats.org/presentationml/2006/main" xmlns:c="http://schemas.openxmlformats.org/drawingml/2006/chart" xmlns:dgm="http://schemas.openxmlformats.org/drawingml/2006/diagram" xmlns:o="urn:schemas-microsoft-com:office:office" xmlns:v="urn:schemas-microsoft-com:vml" xmlns:pvml="urn:schemas-microsoft-com:office:powerpoint" xmlns:com="http://schemas.openxmlformats.org/drawingml/2006/compatibility" xmlns:p14="http://schemas.microsoft.com/office/powerpoint/2010/main" xmlns:p15="http://schemas.microsoft.com/office/powerpoint/2012/main" xmlns:ahyp="http://schemas.microsoft.com/office/drawing/2018/hyperlinkcolor" showMasterPhAnim="0" showMasterSp="0">
+<file path=ppt/notesSlides/notesSlide5.xml><?xml version="1.0" encoding="utf-8"?>
+<p:notes xmlns:a="http://schemas.openxmlformats.org/drawingml/2006/main" xmlns:r="http://schemas.openxmlformats.org/officeDocument/2006/relationships" xmlns:p="http://schemas.openxmlformats.org/presentationml/2006/main" showMasterSp="0" showMasterPhAnim="0">
   <p:cSld>
     <p:spTree>
       <p:nvGrpSpPr>
-        <p:cNvPr id="139" name="Shape 139"/>
+        <p:cNvPr id="1" name="Shape 139"/>
         <p:cNvGrpSpPr/>
         <p:nvPr/>
       </p:nvGrpSpPr>
@@ -1243,20 +1178,26 @@
       <p:sp>
         <p:nvSpPr>
           <p:cNvPr id="140" name="Google Shape;140;g313dd687b2d_0_25:notes"/>
-          <p:cNvSpPr/>
+          <p:cNvSpPr>
+            <a:spLocks noGrp="1" noRot="1" noChangeAspect="1"/>
+          </p:cNvSpPr>
           <p:nvPr>
-            <p:ph idx="2" type="sldImg"/>
+            <p:ph type="sldImg" idx="2"/>
           </p:nvPr>
         </p:nvSpPr>
         <p:spPr>
           <a:xfrm>
-            <a:off x="381300" y="685800"/>
+            <a:off x="381000" y="685800"/>
             <a:ext cx="6096000" cy="3429000"/>
           </a:xfrm>
           <a:custGeom>
-            <a:rect b="b" l="l" r="r" t="t"/>
+            <a:avLst/>
+            <a:gdLst/>
+            <a:ahLst/>
+            <a:cxnLst/>
+            <a:rect l="l" t="t" r="r" b="b"/>
             <a:pathLst>
-              <a:path extrusionOk="0" h="120000" w="120000">
+              <a:path w="120000" h="120000" extrusionOk="0">
                 <a:moveTo>
                   <a:pt x="0" y="0"/>
                 </a:moveTo>
@@ -1278,9 +1219,11 @@
       <p:sp>
         <p:nvSpPr>
           <p:cNvPr id="141" name="Google Shape;141;g313dd687b2d_0_25:notes"/>
-          <p:cNvSpPr txBox="1"/>
+          <p:cNvSpPr txBox="1">
+            <a:spLocks noGrp="1"/>
+          </p:cNvSpPr>
           <p:nvPr>
-            <p:ph idx="1" type="body"/>
+            <p:ph type="body" idx="1"/>
           </p:nvPr>
         </p:nvSpPr>
         <p:spPr>
@@ -1293,12 +1236,12 @@
           </a:prstGeom>
         </p:spPr>
         <p:txBody>
-          <a:bodyPr anchorCtr="0" anchor="t" bIns="91425" lIns="91425" spcFirstLastPara="1" rIns="91425" wrap="square" tIns="91425">
+          <a:bodyPr spcFirstLastPara="1" wrap="square" lIns="91425" tIns="91425" rIns="91425" bIns="91425" anchor="t" anchorCtr="0">
             <a:noAutofit/>
           </a:bodyPr>
           <a:lstStyle/>
           <a:p>
-            <a:pPr indent="0" lvl="0" marL="0" rtl="0" algn="l">
+            <a:pPr marL="0" lvl="0" indent="0" algn="l" rtl="0">
               <a:spcBef>
                 <a:spcPts val="0"/>
               </a:spcBef>
@@ -1307,9 +1250,6 @@
               </a:spcAft>
               <a:buNone/>
             </a:pPr>
-            <a:r>
-              <a:t/>
-            </a:r>
             <a:endParaRPr/>
           </a:p>
         </p:txBody>
@@ -1323,18 +1263,19 @@
 </file>
 
 <file path=ppt/slideLayouts/slideLayout1.xml><?xml version="1.0" encoding="utf-8"?>
-<p:sldLayout xmlns:a="http://schemas.openxmlformats.org/drawingml/2006/main" xmlns:r="http://schemas.openxmlformats.org/officeDocument/2006/relationships" xmlns:mc="http://schemas.openxmlformats.org/markup-compatibility/2006" xmlns:mv="urn:schemas-microsoft-com:mac:vml" xmlns:p="http://schemas.openxmlformats.org/presentationml/2006/main" xmlns:c="http://schemas.openxmlformats.org/drawingml/2006/chart" xmlns:dgm="http://schemas.openxmlformats.org/drawingml/2006/diagram" xmlns:o="urn:schemas-microsoft-com:office:office" xmlns:v="urn:schemas-microsoft-com:vml" xmlns:pvml="urn:schemas-microsoft-com:office:powerpoint" xmlns:com="http://schemas.openxmlformats.org/drawingml/2006/compatibility" xmlns:p14="http://schemas.microsoft.com/office/powerpoint/2010/main" xmlns:p15="http://schemas.microsoft.com/office/powerpoint/2012/main" xmlns:ahyp="http://schemas.microsoft.com/office/drawing/2018/hyperlinkcolor" matchingName="1.a Lesson Title ">
+<p:sldLayout xmlns:a="http://schemas.openxmlformats.org/drawingml/2006/main" xmlns:r="http://schemas.openxmlformats.org/officeDocument/2006/relationships" xmlns:p="http://schemas.openxmlformats.org/presentationml/2006/main" matchingName="1.a Lesson Title ">
   <p:cSld name="TITLE_1">
     <p:bg>
       <p:bgPr>
         <a:solidFill>
           <a:schemeClr val="dk2"/>
         </a:solidFill>
+        <a:effectLst/>
       </p:bgPr>
     </p:bg>
     <p:spTree>
       <p:nvGrpSpPr>
-        <p:cNvPr id="9" name="Shape 9"/>
+        <p:cNvPr id="1" name="Shape 9"/>
         <p:cNvGrpSpPr/>
         <p:nvPr/>
       </p:nvGrpSpPr>
@@ -1356,7 +1297,7 @@
           <a:blip r:embed="rId2">
             <a:alphaModFix/>
           </a:blip>
-          <a:srcRect b="-3409" l="0" r="0" t="3419"/>
+          <a:srcRect t="3419" b="-3409"/>
           <a:stretch/>
         </p:blipFill>
         <p:spPr>
@@ -1404,7 +1345,9 @@
       <p:sp>
         <p:nvSpPr>
           <p:cNvPr id="12" name="Google Shape;12;p2"/>
-          <p:cNvSpPr txBox="1"/>
+          <p:cNvSpPr txBox="1">
+            <a:spLocks noGrp="1"/>
+          </p:cNvSpPr>
           <p:nvPr>
             <p:ph type="ctrTitle"/>
           </p:nvPr>
@@ -1419,7 +1362,7 @@
           </a:prstGeom>
         </p:spPr>
         <p:txBody>
-          <a:bodyPr anchorCtr="0" anchor="ctr" bIns="0" lIns="0" spcFirstLastPara="1" rIns="0" wrap="square" tIns="0">
+          <a:bodyPr spcFirstLastPara="1" wrap="square" lIns="0" tIns="0" rIns="0" bIns="0" anchor="ctr" anchorCtr="0">
             <a:noAutofit/>
           </a:bodyPr>
           <a:lstStyle>
@@ -1631,7 +1574,9 @@
               </a:defRPr>
             </a:lvl9pPr>
           </a:lstStyle>
-          <a:p/>
+          <a:p>
+            <a:endParaRPr/>
+          </a:p>
         </p:txBody>
       </p:sp>
       <p:sp>
@@ -1654,12 +1599,12 @@
           </a:ln>
         </p:spPr>
         <p:txBody>
-          <a:bodyPr anchorCtr="0" anchor="t" bIns="0" lIns="0" spcFirstLastPara="1" rIns="0" wrap="square" tIns="0">
+          <a:bodyPr spcFirstLastPara="1" wrap="square" lIns="0" tIns="0" rIns="0" bIns="0" anchor="t" anchorCtr="0">
             <a:noAutofit/>
           </a:bodyPr>
           <a:lstStyle/>
           <a:p>
-            <a:pPr indent="0" lvl="0" marL="0" rtl="0" algn="l">
+            <a:pPr marL="0" lvl="0" indent="0" algn="l" rtl="0">
               <a:spcBef>
                 <a:spcPts val="0"/>
               </a:spcBef>
@@ -1668,9 +1613,6 @@
               </a:spcAft>
               <a:buNone/>
             </a:pPr>
-            <a:r>
-              <a:t/>
-            </a:r>
             <a:endParaRPr sz="3600">
               <a:solidFill>
                 <a:srgbClr val="FFFFFF"/>
@@ -1686,9 +1628,11 @@
       <p:sp>
         <p:nvSpPr>
           <p:cNvPr id="14" name="Google Shape;14;p2"/>
-          <p:cNvSpPr txBox="1"/>
+          <p:cNvSpPr txBox="1">
+            <a:spLocks noGrp="1"/>
+          </p:cNvSpPr>
           <p:nvPr>
-            <p:ph idx="1" type="subTitle"/>
+            <p:ph type="subTitle" idx="1"/>
           </p:nvPr>
         </p:nvSpPr>
         <p:spPr>
@@ -1701,7 +1645,7 @@
           </a:prstGeom>
         </p:spPr>
         <p:txBody>
-          <a:bodyPr anchorCtr="0" anchor="t" bIns="0" lIns="0" spcFirstLastPara="1" rIns="0" wrap="square" tIns="0">
+          <a:bodyPr spcFirstLastPara="1" wrap="square" lIns="0" tIns="0" rIns="0" bIns="0" anchor="t" anchorCtr="0">
             <a:noAutofit/>
           </a:bodyPr>
           <a:lstStyle>
@@ -1812,7 +1756,9 @@
               <a:defRPr/>
             </a:lvl9pPr>
           </a:lstStyle>
-          <a:p/>
+          <a:p>
+            <a:endParaRPr/>
+          </a:p>
         </p:txBody>
       </p:sp>
       <p:grpSp>
@@ -1839,7 +1785,7 @@
             <a:blip r:embed="rId2">
               <a:alphaModFix/>
             </a:blip>
-            <a:srcRect b="-3409" l="0" r="0" t="3419"/>
+            <a:srcRect t="3419" b="-3409"/>
             <a:stretch/>
           </p:blipFill>
           <p:spPr>
@@ -1873,23 +1819,23 @@
             <a:solidFill>
               <a:srgbClr val="171A53"/>
             </a:solidFill>
-            <a:ln cap="flat" cmpd="sng" w="9525">
+            <a:ln w="9525" cap="flat" cmpd="sng">
               <a:solidFill>
                 <a:srgbClr val="171A53"/>
               </a:solidFill>
               <a:prstDash val="solid"/>
               <a:round/>
-              <a:headEnd len="sm" w="sm" type="none"/>
-              <a:tailEnd len="sm" w="sm" type="none"/>
+              <a:headEnd type="none" w="sm" len="sm"/>
+              <a:tailEnd type="none" w="sm" len="sm"/>
             </a:ln>
           </p:spPr>
           <p:txBody>
-            <a:bodyPr anchorCtr="0" anchor="ctr" bIns="182850" lIns="182850" spcFirstLastPara="1" rIns="182850" wrap="square" tIns="182850">
+            <a:bodyPr spcFirstLastPara="1" wrap="square" lIns="182850" tIns="182850" rIns="182850" bIns="182850" anchor="ctr" anchorCtr="0">
               <a:noAutofit/>
             </a:bodyPr>
             <a:lstStyle/>
             <a:p>
-              <a:pPr indent="0" lvl="0" marL="0" rtl="0" algn="ctr">
+              <a:pPr marL="0" lvl="0" indent="0" algn="ctr" rtl="0">
                 <a:spcBef>
                   <a:spcPts val="0"/>
                 </a:spcBef>
@@ -1898,9 +1844,6 @@
                 </a:spcAft>
                 <a:buNone/>
               </a:pPr>
-              <a:r>
-                <a:t/>
-              </a:r>
               <a:endParaRPr sz="2800">
                 <a:solidFill>
                   <a:srgbClr val="171A53"/>
@@ -1962,12 +1905,12 @@
           </a:ln>
         </p:spPr>
         <p:txBody>
-          <a:bodyPr anchorCtr="0" anchor="t" bIns="0" lIns="0" spcFirstLastPara="1" rIns="0" wrap="square" tIns="0">
+          <a:bodyPr spcFirstLastPara="1" wrap="square" lIns="0" tIns="0" rIns="0" bIns="0" anchor="t" anchorCtr="0">
             <a:noAutofit/>
           </a:bodyPr>
           <a:lstStyle/>
           <a:p>
-            <a:pPr indent="0" lvl="0" marL="0" rtl="0" algn="l">
+            <a:pPr marL="0" lvl="0" indent="0" algn="l" rtl="0">
               <a:spcBef>
                 <a:spcPts val="0"/>
               </a:spcBef>
@@ -2009,11 +1952,11 @@
 </file>
 
 <file path=ppt/slideLayouts/slideLayout10.xml><?xml version="1.0" encoding="utf-8"?>
-<p:sldLayout xmlns:a="http://schemas.openxmlformats.org/drawingml/2006/main" xmlns:r="http://schemas.openxmlformats.org/officeDocument/2006/relationships" xmlns:mc="http://schemas.openxmlformats.org/markup-compatibility/2006" xmlns:mv="urn:schemas-microsoft-com:mac:vml" xmlns:p="http://schemas.openxmlformats.org/presentationml/2006/main" xmlns:c="http://schemas.openxmlformats.org/drawingml/2006/chart" xmlns:dgm="http://schemas.openxmlformats.org/drawingml/2006/diagram" xmlns:o="urn:schemas-microsoft-com:office:office" xmlns:v="urn:schemas-microsoft-com:vml" xmlns:pvml="urn:schemas-microsoft-com:office:powerpoint" xmlns:com="http://schemas.openxmlformats.org/drawingml/2006/compatibility" xmlns:p14="http://schemas.microsoft.com/office/powerpoint/2010/main" xmlns:p15="http://schemas.microsoft.com/office/powerpoint/2012/main" xmlns:ahyp="http://schemas.microsoft.com/office/drawing/2018/hyperlinkcolor" matchingName="3. Dual Code">
+<p:sldLayout xmlns:a="http://schemas.openxmlformats.org/drawingml/2006/main" xmlns:r="http://schemas.openxmlformats.org/officeDocument/2006/relationships" xmlns:p="http://schemas.openxmlformats.org/presentationml/2006/main" matchingName="3. Dual Code">
   <p:cSld name="TITLE_AND_BODY_1_1_1_1_2">
     <p:spTree>
       <p:nvGrpSpPr>
-        <p:cNvPr id="90" name="Shape 90"/>
+        <p:cNvPr id="1" name="Shape 90"/>
         <p:cNvGrpSpPr/>
         <p:nvPr/>
       </p:nvGrpSpPr>
@@ -2075,12 +2018,12 @@
           </a:ln>
         </p:spPr>
         <p:txBody>
-          <a:bodyPr anchorCtr="0" anchor="ctr" bIns="91425" lIns="91425" spcFirstLastPara="1" rIns="91425" wrap="square" tIns="91425">
+          <a:bodyPr spcFirstLastPara="1" wrap="square" lIns="91425" tIns="91425" rIns="91425" bIns="91425" anchor="ctr" anchorCtr="0">
             <a:noAutofit/>
           </a:bodyPr>
           <a:lstStyle/>
           <a:p>
-            <a:pPr indent="0" lvl="0" marL="0" rtl="0" algn="ctr">
+            <a:pPr marL="0" lvl="0" indent="0" algn="ctr" rtl="0">
               <a:spcBef>
                 <a:spcPts val="0"/>
               </a:spcBef>
@@ -2089,9 +2032,6 @@
               </a:spcAft>
               <a:buNone/>
             </a:pPr>
-            <a:r>
-              <a:t/>
-            </a:r>
             <a:endParaRPr>
               <a:latin typeface="Open Sans"/>
               <a:ea typeface="Open Sans"/>
@@ -2150,7 +2090,7 @@
             <a:noFill/>
           </a:ln>
           <a:effectLst>
-            <a:outerShdw blurRad="714375" rotWithShape="0" algn="bl" dir="5400000" dist="238125">
+            <a:outerShdw blurRad="714375" dist="238125" dir="5400000" algn="bl" rotWithShape="0">
               <a:srgbClr val="000000">
                 <a:alpha val="25000"/>
               </a:srgbClr>
@@ -2158,12 +2098,12 @@
           </a:effectLst>
         </p:spPr>
         <p:txBody>
-          <a:bodyPr anchorCtr="0" anchor="ctr" bIns="91450" lIns="91450" spcFirstLastPara="1" rIns="91450" wrap="square" tIns="91450">
+          <a:bodyPr spcFirstLastPara="1" wrap="square" lIns="91450" tIns="91450" rIns="91450" bIns="91450" anchor="ctr" anchorCtr="0">
             <a:noAutofit/>
           </a:bodyPr>
           <a:lstStyle/>
           <a:p>
-            <a:pPr indent="0" lvl="0" marL="0" rtl="0" algn="l">
+            <a:pPr marL="0" lvl="0" indent="0" algn="l" rtl="0">
               <a:spcBef>
                 <a:spcPts val="0"/>
               </a:spcBef>
@@ -2172,9 +2112,6 @@
               </a:spcAft>
               <a:buNone/>
             </a:pPr>
-            <a:r>
-              <a:t/>
-            </a:r>
             <a:endParaRPr/>
           </a:p>
         </p:txBody>
@@ -2199,12 +2136,12 @@
           </a:ln>
         </p:spPr>
         <p:txBody>
-          <a:bodyPr anchorCtr="0" anchor="t" bIns="0" lIns="0" spcFirstLastPara="1" rIns="0" wrap="square" tIns="0">
+          <a:bodyPr spcFirstLastPara="1" wrap="square" lIns="0" tIns="0" rIns="0" bIns="0" anchor="t" anchorCtr="0">
             <a:noAutofit/>
           </a:bodyPr>
           <a:lstStyle/>
           <a:p>
-            <a:pPr indent="0" lvl="0" marL="0" rtl="0" algn="l">
+            <a:pPr marL="0" lvl="0" indent="0" algn="l" rtl="0">
               <a:lnSpc>
                 <a:spcPct val="115000"/>
               </a:lnSpc>
@@ -2243,9 +2180,11 @@
       <p:sp>
         <p:nvSpPr>
           <p:cNvPr id="96" name="Google Shape;96;p11"/>
-          <p:cNvSpPr txBox="1"/>
+          <p:cNvSpPr txBox="1">
+            <a:spLocks noGrp="1"/>
+          </p:cNvSpPr>
           <p:nvPr>
-            <p:ph idx="1" type="body"/>
+            <p:ph type="body" idx="1"/>
           </p:nvPr>
         </p:nvSpPr>
         <p:spPr>
@@ -2258,11 +2197,11 @@
           </a:prstGeom>
         </p:spPr>
         <p:txBody>
-          <a:bodyPr anchorCtr="0" anchor="t" bIns="0" lIns="0" spcFirstLastPara="1" rIns="0" wrap="square" tIns="0">
+          <a:bodyPr spcFirstLastPara="1" wrap="square" lIns="0" tIns="0" rIns="0" bIns="0" anchor="t" anchorCtr="0">
             <a:noAutofit/>
           </a:bodyPr>
           <a:lstStyle>
-            <a:lvl1pPr indent="-419100" lvl="0" marL="457200" rtl="0">
+            <a:lvl1pPr marL="457200" lvl="0" indent="-419100" rtl="0">
               <a:spcBef>
                 <a:spcPts val="0"/>
               </a:spcBef>
@@ -2285,7 +2224,7 @@
                 <a:sym typeface="Roboto Mono Light"/>
               </a:defRPr>
             </a:lvl1pPr>
-            <a:lvl2pPr indent="-419100" lvl="1" marL="914400" rtl="0">
+            <a:lvl2pPr marL="914400" lvl="1" indent="-419100" rtl="0">
               <a:spcBef>
                 <a:spcPts val="2000"/>
               </a:spcBef>
@@ -2308,7 +2247,7 @@
                 <a:sym typeface="Roboto Mono Light"/>
               </a:defRPr>
             </a:lvl2pPr>
-            <a:lvl3pPr indent="-381000" lvl="2" marL="1371600" rtl="0">
+            <a:lvl3pPr marL="1371600" lvl="2" indent="-381000" rtl="0">
               <a:spcBef>
                 <a:spcPts val="2000"/>
               </a:spcBef>
@@ -2331,7 +2270,7 @@
                 <a:sym typeface="Roboto Mono Light"/>
               </a:defRPr>
             </a:lvl3pPr>
-            <a:lvl4pPr indent="-381000" lvl="3" marL="1828800" rtl="0">
+            <a:lvl4pPr marL="1828800" lvl="3" indent="-381000" rtl="0">
               <a:spcBef>
                 <a:spcPts val="2000"/>
               </a:spcBef>
@@ -2354,7 +2293,7 @@
                 <a:sym typeface="Roboto Mono Light"/>
               </a:defRPr>
             </a:lvl4pPr>
-            <a:lvl5pPr indent="-381000" lvl="4" marL="2286000" rtl="0">
+            <a:lvl5pPr marL="2286000" lvl="4" indent="-381000" rtl="0">
               <a:spcBef>
                 <a:spcPts val="2000"/>
               </a:spcBef>
@@ -2377,7 +2316,7 @@
                 <a:sym typeface="Roboto Mono Light"/>
               </a:defRPr>
             </a:lvl5pPr>
-            <a:lvl6pPr indent="-381000" lvl="5" marL="2743200" rtl="0">
+            <a:lvl6pPr marL="2743200" lvl="5" indent="-381000" rtl="0">
               <a:spcBef>
                 <a:spcPts val="2000"/>
               </a:spcBef>
@@ -2400,7 +2339,7 @@
                 <a:sym typeface="Roboto Mono Light"/>
               </a:defRPr>
             </a:lvl6pPr>
-            <a:lvl7pPr indent="-381000" lvl="6" marL="3200400" rtl="0">
+            <a:lvl7pPr marL="3200400" lvl="6" indent="-381000" rtl="0">
               <a:spcBef>
                 <a:spcPts val="2000"/>
               </a:spcBef>
@@ -2423,7 +2362,7 @@
                 <a:sym typeface="Roboto Mono Light"/>
               </a:defRPr>
             </a:lvl7pPr>
-            <a:lvl8pPr indent="-381000" lvl="7" marL="3657600" rtl="0">
+            <a:lvl8pPr marL="3657600" lvl="7" indent="-381000" rtl="0">
               <a:spcBef>
                 <a:spcPts val="2000"/>
               </a:spcBef>
@@ -2446,7 +2385,7 @@
                 <a:sym typeface="Roboto Mono Light"/>
               </a:defRPr>
             </a:lvl8pPr>
-            <a:lvl9pPr indent="-381000" lvl="8" marL="4114800" rtl="0">
+            <a:lvl9pPr marL="4114800" lvl="8" indent="-381000" rtl="0">
               <a:spcBef>
                 <a:spcPts val="2000"/>
               </a:spcBef>
@@ -2470,15 +2409,19 @@
               </a:defRPr>
             </a:lvl9pPr>
           </a:lstStyle>
-          <a:p/>
+          <a:p>
+            <a:endParaRPr/>
+          </a:p>
         </p:txBody>
       </p:sp>
       <p:sp>
         <p:nvSpPr>
           <p:cNvPr id="97" name="Google Shape;97;p11"/>
-          <p:cNvSpPr txBox="1"/>
+          <p:cNvSpPr txBox="1">
+            <a:spLocks noGrp="1"/>
+          </p:cNvSpPr>
           <p:nvPr>
-            <p:ph idx="2" type="body"/>
+            <p:ph type="body" idx="2"/>
           </p:nvPr>
         </p:nvSpPr>
         <p:spPr>
@@ -2491,11 +2434,11 @@
           </a:prstGeom>
         </p:spPr>
         <p:txBody>
-          <a:bodyPr anchorCtr="0" anchor="t" bIns="0" lIns="0" spcFirstLastPara="1" rIns="0" wrap="square" tIns="0">
+          <a:bodyPr spcFirstLastPara="1" wrap="square" lIns="0" tIns="0" rIns="0" bIns="0" anchor="t" anchorCtr="0">
             <a:noAutofit/>
           </a:bodyPr>
           <a:lstStyle>
-            <a:lvl1pPr indent="-419100" lvl="0" marL="457200" rtl="0">
+            <a:lvl1pPr marL="457200" lvl="0" indent="-419100" rtl="0">
               <a:spcBef>
                 <a:spcPts val="0"/>
               </a:spcBef>
@@ -2518,7 +2461,7 @@
                 <a:sym typeface="Roboto Mono Light"/>
               </a:defRPr>
             </a:lvl1pPr>
-            <a:lvl2pPr indent="-419100" lvl="1" marL="914400" rtl="0">
+            <a:lvl2pPr marL="914400" lvl="1" indent="-419100" rtl="0">
               <a:spcBef>
                 <a:spcPts val="2000"/>
               </a:spcBef>
@@ -2541,7 +2484,7 @@
                 <a:sym typeface="Roboto Mono Light"/>
               </a:defRPr>
             </a:lvl2pPr>
-            <a:lvl3pPr indent="-381000" lvl="2" marL="1371600" rtl="0">
+            <a:lvl3pPr marL="1371600" lvl="2" indent="-381000" rtl="0">
               <a:spcBef>
                 <a:spcPts val="2000"/>
               </a:spcBef>
@@ -2564,7 +2507,7 @@
                 <a:sym typeface="Roboto Mono Light"/>
               </a:defRPr>
             </a:lvl3pPr>
-            <a:lvl4pPr indent="-381000" lvl="3" marL="1828800" rtl="0">
+            <a:lvl4pPr marL="1828800" lvl="3" indent="-381000" rtl="0">
               <a:spcBef>
                 <a:spcPts val="2000"/>
               </a:spcBef>
@@ -2587,7 +2530,7 @@
                 <a:sym typeface="Roboto Mono Light"/>
               </a:defRPr>
             </a:lvl4pPr>
-            <a:lvl5pPr indent="-381000" lvl="4" marL="2286000" rtl="0">
+            <a:lvl5pPr marL="2286000" lvl="4" indent="-381000" rtl="0">
               <a:spcBef>
                 <a:spcPts val="2000"/>
               </a:spcBef>
@@ -2610,7 +2553,7 @@
                 <a:sym typeface="Roboto Mono Light"/>
               </a:defRPr>
             </a:lvl5pPr>
-            <a:lvl6pPr indent="-381000" lvl="5" marL="2743200" rtl="0">
+            <a:lvl6pPr marL="2743200" lvl="5" indent="-381000" rtl="0">
               <a:spcBef>
                 <a:spcPts val="2000"/>
               </a:spcBef>
@@ -2633,7 +2576,7 @@
                 <a:sym typeface="Roboto Mono Light"/>
               </a:defRPr>
             </a:lvl6pPr>
-            <a:lvl7pPr indent="-381000" lvl="6" marL="3200400" rtl="0">
+            <a:lvl7pPr marL="3200400" lvl="6" indent="-381000" rtl="0">
               <a:spcBef>
                 <a:spcPts val="2000"/>
               </a:spcBef>
@@ -2656,7 +2599,7 @@
                 <a:sym typeface="Roboto Mono Light"/>
               </a:defRPr>
             </a:lvl7pPr>
-            <a:lvl8pPr indent="-381000" lvl="7" marL="3657600" rtl="0">
+            <a:lvl8pPr marL="3657600" lvl="7" indent="-381000" rtl="0">
               <a:spcBef>
                 <a:spcPts val="2000"/>
               </a:spcBef>
@@ -2679,7 +2622,7 @@
                 <a:sym typeface="Roboto Mono Light"/>
               </a:defRPr>
             </a:lvl8pPr>
-            <a:lvl9pPr indent="-381000" lvl="8" marL="4114800" rtl="0">
+            <a:lvl9pPr marL="4114800" lvl="8" indent="-381000" rtl="0">
               <a:spcBef>
                 <a:spcPts val="2000"/>
               </a:spcBef>
@@ -2703,7 +2646,9 @@
               </a:defRPr>
             </a:lvl9pPr>
           </a:lstStyle>
-          <a:p/>
+          <a:p>
+            <a:endParaRPr/>
+          </a:p>
         </p:txBody>
       </p:sp>
     </p:spTree>
@@ -2713,7 +2658,7 @@
   </p:clrMapOvr>
   <p:extLst>
     <p:ext uri="{DCECCB84-F9BA-43D5-87BE-67443E8EF086}">
-      <p15:sldGuideLst>
+      <p15:sldGuideLst xmlns:p15="http://schemas.microsoft.com/office/powerpoint/2012/main">
         <p15:guide id="1" pos="432">
           <p15:clr>
             <a:schemeClr val="accent1"/>
@@ -2771,11 +2716,11 @@
 </file>
 
 <file path=ppt/slideLayouts/slideLayout11.xml><?xml version="1.0" encoding="utf-8"?>
-<p:sldLayout xmlns:a="http://schemas.openxmlformats.org/drawingml/2006/main" xmlns:r="http://schemas.openxmlformats.org/officeDocument/2006/relationships" xmlns:mc="http://schemas.openxmlformats.org/markup-compatibility/2006" xmlns:mv="urn:schemas-microsoft-com:mac:vml" xmlns:p="http://schemas.openxmlformats.org/presentationml/2006/main" xmlns:c="http://schemas.openxmlformats.org/drawingml/2006/chart" xmlns:dgm="http://schemas.openxmlformats.org/drawingml/2006/diagram" xmlns:o="urn:schemas-microsoft-com:office:office" xmlns:v="urn:schemas-microsoft-com:vml" xmlns:pvml="urn:schemas-microsoft-com:office:powerpoint" xmlns:com="http://schemas.openxmlformats.org/drawingml/2006/compatibility" xmlns:p14="http://schemas.microsoft.com/office/powerpoint/2010/main" xmlns:p15="http://schemas.microsoft.com/office/powerpoint/2012/main" xmlns:ahyp="http://schemas.microsoft.com/office/drawing/2018/hyperlinkcolor" matchingName="4. Quote Full Card">
+<p:sldLayout xmlns:a="http://schemas.openxmlformats.org/drawingml/2006/main" xmlns:r="http://schemas.openxmlformats.org/officeDocument/2006/relationships" xmlns:p="http://schemas.openxmlformats.org/presentationml/2006/main" matchingName="4. Quote Full Card">
   <p:cSld name="CUSTOM_14">
     <p:spTree>
       <p:nvGrpSpPr>
-        <p:cNvPr id="98" name="Shape 98"/>
+        <p:cNvPr id="1" name="Shape 98"/>
         <p:cNvGrpSpPr/>
         <p:nvPr/>
       </p:nvGrpSpPr>
@@ -2828,8 +2773,8 @@
           </a:xfrm>
           <a:prstGeom prst="round2DiagRect">
             <a:avLst>
-              <a:gd fmla="val 20143" name="adj1"/>
-              <a:gd fmla="val 0" name="adj2"/>
+              <a:gd name="adj1" fmla="val 20143"/>
+              <a:gd name="adj2" fmla="val 0"/>
             </a:avLst>
           </a:prstGeom>
           <a:solidFill>
@@ -2840,12 +2785,12 @@
           </a:ln>
         </p:spPr>
         <p:txBody>
-          <a:bodyPr anchorCtr="0" anchor="ctr" bIns="91450" lIns="91450" spcFirstLastPara="1" rIns="91450" wrap="square" tIns="91450">
+          <a:bodyPr spcFirstLastPara="1" wrap="square" lIns="91450" tIns="91450" rIns="91450" bIns="91450" anchor="ctr" anchorCtr="0">
             <a:noAutofit/>
           </a:bodyPr>
           <a:lstStyle/>
           <a:p>
-            <a:pPr indent="0" lvl="0" marL="0" rtl="0" algn="l">
+            <a:pPr marL="0" lvl="0" indent="0" algn="l" rtl="0">
               <a:spcBef>
                 <a:spcPts val="0"/>
               </a:spcBef>
@@ -2854,9 +2799,6 @@
               </a:spcAft>
               <a:buNone/>
             </a:pPr>
-            <a:r>
-              <a:t/>
-            </a:r>
             <a:endParaRPr/>
           </a:p>
         </p:txBody>
@@ -2864,9 +2806,11 @@
       <p:sp>
         <p:nvSpPr>
           <p:cNvPr id="101" name="Google Shape;101;p12"/>
-          <p:cNvSpPr txBox="1"/>
+          <p:cNvSpPr txBox="1">
+            <a:spLocks noGrp="1"/>
+          </p:cNvSpPr>
           <p:nvPr>
-            <p:ph idx="1" type="body"/>
+            <p:ph type="body" idx="1"/>
           </p:nvPr>
         </p:nvSpPr>
         <p:spPr>
@@ -2879,11 +2823,11 @@
           </a:prstGeom>
         </p:spPr>
         <p:txBody>
-          <a:bodyPr anchorCtr="0" anchor="ctr" bIns="0" lIns="0" spcFirstLastPara="1" rIns="0" wrap="square" tIns="0">
+          <a:bodyPr spcFirstLastPara="1" wrap="square" lIns="0" tIns="0" rIns="0" bIns="0" anchor="ctr" anchorCtr="0">
             <a:noAutofit/>
           </a:bodyPr>
           <a:lstStyle>
-            <a:lvl1pPr indent="-533400" lvl="0" marL="457200" rtl="0" algn="ctr">
+            <a:lvl1pPr marL="457200" lvl="0" indent="-533400" algn="ctr" rtl="0">
               <a:spcBef>
                 <a:spcPts val="0"/>
               </a:spcBef>
@@ -2900,7 +2844,7 @@
                 <a:sym typeface="Open Sans Light"/>
               </a:defRPr>
             </a:lvl1pPr>
-            <a:lvl2pPr indent="-533400" lvl="1" marL="914400" rtl="0" algn="ctr">
+            <a:lvl2pPr marL="914400" lvl="1" indent="-533400" algn="ctr" rtl="0">
               <a:spcBef>
                 <a:spcPts val="0"/>
               </a:spcBef>
@@ -2917,7 +2861,7 @@
                 <a:sym typeface="Open Sans Light"/>
               </a:defRPr>
             </a:lvl2pPr>
-            <a:lvl3pPr indent="-533400" lvl="2" marL="1371600" rtl="0" algn="ctr">
+            <a:lvl3pPr marL="1371600" lvl="2" indent="-533400" algn="ctr" rtl="0">
               <a:spcBef>
                 <a:spcPts val="0"/>
               </a:spcBef>
@@ -2934,7 +2878,7 @@
                 <a:sym typeface="Open Sans Light"/>
               </a:defRPr>
             </a:lvl3pPr>
-            <a:lvl4pPr indent="-533400" lvl="3" marL="1828800" rtl="0" algn="ctr">
+            <a:lvl4pPr marL="1828800" lvl="3" indent="-533400" algn="ctr" rtl="0">
               <a:spcBef>
                 <a:spcPts val="0"/>
               </a:spcBef>
@@ -2951,7 +2895,7 @@
                 <a:sym typeface="Open Sans Light"/>
               </a:defRPr>
             </a:lvl4pPr>
-            <a:lvl5pPr indent="-533400" lvl="4" marL="2286000" rtl="0" algn="ctr">
+            <a:lvl5pPr marL="2286000" lvl="4" indent="-533400" algn="ctr" rtl="0">
               <a:spcBef>
                 <a:spcPts val="0"/>
               </a:spcBef>
@@ -2968,7 +2912,7 @@
                 <a:sym typeface="Open Sans Light"/>
               </a:defRPr>
             </a:lvl5pPr>
-            <a:lvl6pPr indent="-533400" lvl="5" marL="2743200" rtl="0" algn="ctr">
+            <a:lvl6pPr marL="2743200" lvl="5" indent="-533400" algn="ctr" rtl="0">
               <a:spcBef>
                 <a:spcPts val="0"/>
               </a:spcBef>
@@ -2985,7 +2929,7 @@
                 <a:sym typeface="Open Sans Light"/>
               </a:defRPr>
             </a:lvl6pPr>
-            <a:lvl7pPr indent="-533400" lvl="6" marL="3200400" rtl="0" algn="ctr">
+            <a:lvl7pPr marL="3200400" lvl="6" indent="-533400" algn="ctr" rtl="0">
               <a:spcBef>
                 <a:spcPts val="0"/>
               </a:spcBef>
@@ -3002,7 +2946,7 @@
                 <a:sym typeface="Open Sans Light"/>
               </a:defRPr>
             </a:lvl7pPr>
-            <a:lvl8pPr indent="-533400" lvl="7" marL="3657600" rtl="0" algn="ctr">
+            <a:lvl8pPr marL="3657600" lvl="7" indent="-533400" algn="ctr" rtl="0">
               <a:spcBef>
                 <a:spcPts val="0"/>
               </a:spcBef>
@@ -3019,7 +2963,7 @@
                 <a:sym typeface="Open Sans Light"/>
               </a:defRPr>
             </a:lvl8pPr>
-            <a:lvl9pPr indent="-533400" lvl="8" marL="4114800" rtl="0" algn="ctr">
+            <a:lvl9pPr marL="4114800" lvl="8" indent="-533400" algn="ctr" rtl="0">
               <a:spcBef>
                 <a:spcPts val="0"/>
               </a:spcBef>
@@ -3037,7 +2981,9 @@
               </a:defRPr>
             </a:lvl9pPr>
           </a:lstStyle>
-          <a:p/>
+          <a:p>
+            <a:endParaRPr/>
+          </a:p>
         </p:txBody>
       </p:sp>
     </p:spTree>
@@ -3049,7 +2995,7 @@
 </file>
 
 <file path=ppt/slideLayouts/slideLayout2.xml><?xml version="1.0" encoding="utf-8"?>
-<p:sldLayout xmlns:a="http://schemas.openxmlformats.org/drawingml/2006/main" xmlns:r="http://schemas.openxmlformats.org/officeDocument/2006/relationships" xmlns:mc="http://schemas.openxmlformats.org/markup-compatibility/2006" xmlns:mv="urn:schemas-microsoft-com:mac:vml" xmlns:p="http://schemas.openxmlformats.org/presentationml/2006/main" xmlns:c="http://schemas.openxmlformats.org/drawingml/2006/chart" xmlns:dgm="http://schemas.openxmlformats.org/drawingml/2006/diagram" xmlns:o="urn:schemas-microsoft-com:office:office" xmlns:v="urn:schemas-microsoft-com:vml" xmlns:pvml="urn:schemas-microsoft-com:office:powerpoint" xmlns:com="http://schemas.openxmlformats.org/drawingml/2006/compatibility" xmlns:p14="http://schemas.microsoft.com/office/powerpoint/2010/main" xmlns:p15="http://schemas.microsoft.com/office/powerpoint/2012/main" xmlns:ahyp="http://schemas.microsoft.com/office/drawing/2018/hyperlinkcolor" matchingName="1.b Lesson Title (Designer or Producer Only)">
+<p:sldLayout xmlns:a="http://schemas.openxmlformats.org/drawingml/2006/main" xmlns:r="http://schemas.openxmlformats.org/officeDocument/2006/relationships" xmlns:p="http://schemas.openxmlformats.org/presentationml/2006/main" matchingName="1.b Lesson Title (Designer or Producer Only)">
   <p:cSld name="SECTION_HEADER_1">
     <p:bg>
       <p:bgPr>
@@ -3061,11 +3007,12 @@
             <a:fillRect/>
           </a:stretch>
         </a:blipFill>
+        <a:effectLst/>
       </p:bgPr>
     </p:bg>
     <p:spTree>
       <p:nvGrpSpPr>
-        <p:cNvPr id="20" name="Shape 20"/>
+        <p:cNvPr id="1" name="Shape 20"/>
         <p:cNvGrpSpPr/>
         <p:nvPr/>
       </p:nvGrpSpPr>
@@ -3108,7 +3055,9 @@
       <p:sp>
         <p:nvSpPr>
           <p:cNvPr id="22" name="Google Shape;22;p3"/>
-          <p:cNvSpPr txBox="1"/>
+          <p:cNvSpPr txBox="1">
+            <a:spLocks noGrp="1"/>
+          </p:cNvSpPr>
           <p:nvPr>
             <p:ph type="title"/>
           </p:nvPr>
@@ -3123,7 +3072,7 @@
           </a:prstGeom>
         </p:spPr>
         <p:txBody>
-          <a:bodyPr anchorCtr="0" anchor="ctr" bIns="0" lIns="0" spcFirstLastPara="1" rIns="0" wrap="square" tIns="0">
+          <a:bodyPr spcFirstLastPara="1" wrap="square" lIns="0" tIns="0" rIns="0" bIns="0" anchor="ctr" anchorCtr="0">
             <a:noAutofit/>
           </a:bodyPr>
           <a:lstStyle>
@@ -3335,7 +3284,9 @@
               </a:defRPr>
             </a:lvl9pPr>
           </a:lstStyle>
-          <a:p/>
+          <a:p>
+            <a:endParaRPr/>
+          </a:p>
         </p:txBody>
       </p:sp>
       <p:sp>
@@ -3360,12 +3311,12 @@
           </a:ln>
         </p:spPr>
         <p:txBody>
-          <a:bodyPr anchorCtr="0" anchor="ctr" bIns="91425" lIns="91425" spcFirstLastPara="1" rIns="91425" wrap="square" tIns="91425">
+          <a:bodyPr spcFirstLastPara="1" wrap="square" lIns="91425" tIns="91425" rIns="91425" bIns="91425" anchor="ctr" anchorCtr="0">
             <a:noAutofit/>
           </a:bodyPr>
           <a:lstStyle/>
           <a:p>
-            <a:pPr indent="0" lvl="0" marL="0" rtl="0" algn="ctr">
+            <a:pPr marL="0" lvl="0" indent="0" algn="ctr" rtl="0">
               <a:spcBef>
                 <a:spcPts val="0"/>
               </a:spcBef>
@@ -3374,9 +3325,6 @@
               </a:spcAft>
               <a:buNone/>
             </a:pPr>
-            <a:r>
-              <a:t/>
-            </a:r>
             <a:endParaRPr>
               <a:latin typeface="Open Sans"/>
               <a:ea typeface="Open Sans"/>
@@ -3423,11 +3371,11 @@
 </file>
 
 <file path=ppt/slideLayouts/slideLayout3.xml><?xml version="1.0" encoding="utf-8"?>
-<p:sldLayout xmlns:a="http://schemas.openxmlformats.org/drawingml/2006/main" xmlns:r="http://schemas.openxmlformats.org/officeDocument/2006/relationships" xmlns:mc="http://schemas.openxmlformats.org/markup-compatibility/2006" xmlns:mv="urn:schemas-microsoft-com:mac:vml" xmlns:p="http://schemas.openxmlformats.org/presentationml/2006/main" xmlns:c="http://schemas.openxmlformats.org/drawingml/2006/chart" xmlns:dgm="http://schemas.openxmlformats.org/drawingml/2006/diagram" xmlns:o="urn:schemas-microsoft-com:office:office" xmlns:v="urn:schemas-microsoft-com:vml" xmlns:pvml="urn:schemas-microsoft-com:office:powerpoint" xmlns:com="http://schemas.openxmlformats.org/drawingml/2006/compatibility" xmlns:p14="http://schemas.microsoft.com/office/powerpoint/2010/main" xmlns:p15="http://schemas.microsoft.com/office/powerpoint/2012/main" xmlns:ahyp="http://schemas.microsoft.com/office/drawing/2018/hyperlinkcolor" matchingName="2.a Full Bullet">
+<p:sldLayout xmlns:a="http://schemas.openxmlformats.org/drawingml/2006/main" xmlns:r="http://schemas.openxmlformats.org/officeDocument/2006/relationships" xmlns:p="http://schemas.openxmlformats.org/presentationml/2006/main" matchingName="2.a Full Bullet">
   <p:cSld name="TITLE_AND_BODY_1_1">
     <p:spTree>
       <p:nvGrpSpPr>
-        <p:cNvPr id="25" name="Shape 25"/>
+        <p:cNvPr id="1" name="Shape 25"/>
         <p:cNvGrpSpPr/>
         <p:nvPr/>
       </p:nvGrpSpPr>
@@ -3460,7 +3408,7 @@
             <a:noFill/>
           </a:ln>
           <a:effectLst>
-            <a:outerShdw blurRad="714375" rotWithShape="0" algn="bl" dir="5400000" dist="238125">
+            <a:outerShdw blurRad="714375" dist="238125" dir="5400000" algn="bl" rotWithShape="0">
               <a:srgbClr val="000000">
                 <a:alpha val="25000"/>
               </a:srgbClr>
@@ -3468,12 +3416,12 @@
           </a:effectLst>
         </p:spPr>
         <p:txBody>
-          <a:bodyPr anchorCtr="0" anchor="ctr" bIns="91450" lIns="91450" spcFirstLastPara="1" rIns="91450" wrap="square" tIns="91450">
+          <a:bodyPr spcFirstLastPara="1" wrap="square" lIns="91450" tIns="91450" rIns="91450" bIns="91450" anchor="ctr" anchorCtr="0">
             <a:noAutofit/>
           </a:bodyPr>
           <a:lstStyle/>
           <a:p>
-            <a:pPr indent="0" lvl="0" marL="0" rtl="0" algn="l">
+            <a:pPr marL="0" lvl="0" indent="0" algn="l" rtl="0">
               <a:spcBef>
                 <a:spcPts val="0"/>
               </a:spcBef>
@@ -3482,9 +3430,6 @@
               </a:spcAft>
               <a:buNone/>
             </a:pPr>
-            <a:r>
-              <a:t/>
-            </a:r>
             <a:endParaRPr/>
           </a:p>
         </p:txBody>
@@ -3520,7 +3465,9 @@
       <p:sp>
         <p:nvSpPr>
           <p:cNvPr id="28" name="Google Shape;28;p4"/>
-          <p:cNvSpPr txBox="1"/>
+          <p:cNvSpPr txBox="1">
+            <a:spLocks noGrp="1"/>
+          </p:cNvSpPr>
           <p:nvPr>
             <p:ph type="title"/>
           </p:nvPr>
@@ -3535,7 +3482,7 @@
           </a:prstGeom>
         </p:spPr>
         <p:txBody>
-          <a:bodyPr anchorCtr="0" anchor="ctr" bIns="0" lIns="0" spcFirstLastPara="1" rIns="0" wrap="square" tIns="0">
+          <a:bodyPr spcFirstLastPara="1" wrap="square" lIns="0" tIns="0" rIns="0" bIns="0" anchor="ctr" anchorCtr="0">
             <a:noAutofit/>
           </a:bodyPr>
           <a:lstStyle>
@@ -3645,15 +3592,19 @@
               <a:defRPr/>
             </a:lvl9pPr>
           </a:lstStyle>
-          <a:p/>
+          <a:p>
+            <a:endParaRPr/>
+          </a:p>
         </p:txBody>
       </p:sp>
       <p:sp>
         <p:nvSpPr>
           <p:cNvPr id="29" name="Google Shape;29;p4"/>
-          <p:cNvSpPr txBox="1"/>
+          <p:cNvSpPr txBox="1">
+            <a:spLocks noGrp="1"/>
+          </p:cNvSpPr>
           <p:nvPr>
-            <p:ph idx="1" type="body"/>
+            <p:ph type="body" idx="1"/>
           </p:nvPr>
         </p:nvSpPr>
         <p:spPr>
@@ -3666,11 +3617,11 @@
           </a:prstGeom>
         </p:spPr>
         <p:txBody>
-          <a:bodyPr anchorCtr="0" anchor="t" bIns="0" lIns="0" spcFirstLastPara="1" rIns="0" wrap="square" tIns="0">
+          <a:bodyPr spcFirstLastPara="1" wrap="square" lIns="0" tIns="0" rIns="0" bIns="0" anchor="t" anchorCtr="0">
             <a:noAutofit/>
           </a:bodyPr>
           <a:lstStyle>
-            <a:lvl1pPr indent="-457200" lvl="0" marL="457200" rtl="0">
+            <a:lvl1pPr marL="457200" lvl="0" indent="-457200" rtl="0">
               <a:spcBef>
                 <a:spcPts val="0"/>
               </a:spcBef>
@@ -3688,7 +3639,7 @@
                 </a:solidFill>
               </a:defRPr>
             </a:lvl1pPr>
-            <a:lvl2pPr indent="-419100" lvl="1" marL="914400" rtl="0">
+            <a:lvl2pPr marL="914400" lvl="1" indent="-419100" rtl="0">
               <a:spcBef>
                 <a:spcPts val="2000"/>
               </a:spcBef>
@@ -3706,7 +3657,7 @@
                 </a:solidFill>
               </a:defRPr>
             </a:lvl2pPr>
-            <a:lvl3pPr indent="-381000" lvl="2" marL="1371600" rtl="0">
+            <a:lvl3pPr marL="1371600" lvl="2" indent="-381000" rtl="0">
               <a:spcBef>
                 <a:spcPts val="2000"/>
               </a:spcBef>
@@ -3724,7 +3675,7 @@
                 </a:solidFill>
               </a:defRPr>
             </a:lvl3pPr>
-            <a:lvl4pPr indent="-381000" lvl="3" marL="1828800" rtl="0">
+            <a:lvl4pPr marL="1828800" lvl="3" indent="-381000" rtl="0">
               <a:spcBef>
                 <a:spcPts val="2000"/>
               </a:spcBef>
@@ -3742,7 +3693,7 @@
                 </a:solidFill>
               </a:defRPr>
             </a:lvl4pPr>
-            <a:lvl5pPr indent="-381000" lvl="4" marL="2286000" rtl="0">
+            <a:lvl5pPr marL="2286000" lvl="4" indent="-381000" rtl="0">
               <a:spcBef>
                 <a:spcPts val="2000"/>
               </a:spcBef>
@@ -3760,7 +3711,7 @@
                 </a:solidFill>
               </a:defRPr>
             </a:lvl5pPr>
-            <a:lvl6pPr indent="-381000" lvl="5" marL="2743200" rtl="0">
+            <a:lvl6pPr marL="2743200" lvl="5" indent="-381000" rtl="0">
               <a:spcBef>
                 <a:spcPts val="2000"/>
               </a:spcBef>
@@ -3778,7 +3729,7 @@
                 </a:solidFill>
               </a:defRPr>
             </a:lvl6pPr>
-            <a:lvl7pPr indent="-381000" lvl="6" marL="3200400" rtl="0">
+            <a:lvl7pPr marL="3200400" lvl="6" indent="-381000" rtl="0">
               <a:spcBef>
                 <a:spcPts val="2000"/>
               </a:spcBef>
@@ -3796,7 +3747,7 @@
                 </a:solidFill>
               </a:defRPr>
             </a:lvl7pPr>
-            <a:lvl8pPr indent="-381000" lvl="7" marL="3657600" rtl="0">
+            <a:lvl8pPr marL="3657600" lvl="7" indent="-381000" rtl="0">
               <a:spcBef>
                 <a:spcPts val="2000"/>
               </a:spcBef>
@@ -3814,7 +3765,7 @@
                 </a:solidFill>
               </a:defRPr>
             </a:lvl8pPr>
-            <a:lvl9pPr indent="-381000" lvl="8" marL="4114800" rtl="0">
+            <a:lvl9pPr marL="4114800" lvl="8" indent="-381000" rtl="0">
               <a:spcBef>
                 <a:spcPts val="2000"/>
               </a:spcBef>
@@ -3833,7 +3784,9 @@
               </a:defRPr>
             </a:lvl9pPr>
           </a:lstStyle>
-          <a:p/>
+          <a:p>
+            <a:endParaRPr/>
+          </a:p>
         </p:txBody>
       </p:sp>
       <p:sp>
@@ -3858,12 +3811,12 @@
           </a:ln>
         </p:spPr>
         <p:txBody>
-          <a:bodyPr anchorCtr="0" anchor="ctr" bIns="91425" lIns="91425" spcFirstLastPara="1" rIns="91425" wrap="square" tIns="91425">
+          <a:bodyPr spcFirstLastPara="1" wrap="square" lIns="91425" tIns="91425" rIns="91425" bIns="91425" anchor="ctr" anchorCtr="0">
             <a:noAutofit/>
           </a:bodyPr>
           <a:lstStyle/>
           <a:p>
-            <a:pPr indent="0" lvl="0" marL="0" rtl="0" algn="ctr">
+            <a:pPr marL="0" lvl="0" indent="0" algn="ctr" rtl="0">
               <a:spcBef>
                 <a:spcPts val="0"/>
               </a:spcBef>
@@ -3872,9 +3825,6 @@
               </a:spcAft>
               <a:buNone/>
             </a:pPr>
-            <a:r>
-              <a:t/>
-            </a:r>
             <a:endParaRPr>
               <a:latin typeface="Open Sans"/>
               <a:ea typeface="Open Sans"/>
@@ -3919,7 +3869,7 @@
   </p:clrMapOvr>
   <p:extLst>
     <p:ext uri="{DCECCB84-F9BA-43D5-87BE-67443E8EF086}">
-      <p15:sldGuideLst>
+      <p15:sldGuideLst xmlns:p15="http://schemas.microsoft.com/office/powerpoint/2012/main">
         <p15:guide id="1" pos="432">
           <p15:clr>
             <a:schemeClr val="accent1"/>
@@ -3972,18 +3922,19 @@
 </file>
 
 <file path=ppt/slideLayouts/slideLayout4.xml><?xml version="1.0" encoding="utf-8"?>
-<p:sldLayout xmlns:a="http://schemas.openxmlformats.org/drawingml/2006/main" xmlns:r="http://schemas.openxmlformats.org/officeDocument/2006/relationships" xmlns:mc="http://schemas.openxmlformats.org/markup-compatibility/2006" xmlns:mv="urn:schemas-microsoft-com:mac:vml" xmlns:p="http://schemas.openxmlformats.org/presentationml/2006/main" xmlns:c="http://schemas.openxmlformats.org/drawingml/2006/chart" xmlns:dgm="http://schemas.openxmlformats.org/drawingml/2006/diagram" xmlns:o="urn:schemas-microsoft-com:office:office" xmlns:v="urn:schemas-microsoft-com:vml" xmlns:pvml="urn:schemas-microsoft-com:office:powerpoint" xmlns:com="http://schemas.openxmlformats.org/drawingml/2006/compatibility" xmlns:p14="http://schemas.microsoft.com/office/powerpoint/2010/main" xmlns:p15="http://schemas.microsoft.com/office/powerpoint/2012/main" xmlns:ahyp="http://schemas.microsoft.com/office/drawing/2018/hyperlinkcolor" matchingName="2.g Full Graphic">
+<p:sldLayout xmlns:a="http://schemas.openxmlformats.org/drawingml/2006/main" xmlns:r="http://schemas.openxmlformats.org/officeDocument/2006/relationships" xmlns:p="http://schemas.openxmlformats.org/presentationml/2006/main" matchingName="2.g Full Graphic">
   <p:cSld name="TITLE_ONLY_1_1_1">
     <p:bg>
       <p:bgPr>
         <a:solidFill>
           <a:schemeClr val="lt1"/>
         </a:solidFill>
+        <a:effectLst/>
       </p:bgPr>
     </p:bg>
     <p:spTree>
       <p:nvGrpSpPr>
-        <p:cNvPr id="32" name="Shape 32"/>
+        <p:cNvPr id="1" name="Shape 32"/>
         <p:cNvGrpSpPr/>
         <p:nvPr/>
       </p:nvGrpSpPr>
@@ -4017,12 +3968,12 @@
           </a:ln>
         </p:spPr>
         <p:txBody>
-          <a:bodyPr anchorCtr="0" anchor="ctr" bIns="182850" lIns="182850" spcFirstLastPara="1" rIns="182850" wrap="square" tIns="182850">
+          <a:bodyPr spcFirstLastPara="1" wrap="square" lIns="182850" tIns="182850" rIns="182850" bIns="182850" anchor="ctr" anchorCtr="0">
             <a:noAutofit/>
           </a:bodyPr>
           <a:lstStyle/>
           <a:p>
-            <a:pPr indent="0" lvl="0" marL="0" rtl="0" algn="l">
+            <a:pPr marL="0" lvl="0" indent="0" algn="l" rtl="0">
               <a:spcBef>
                 <a:spcPts val="0"/>
               </a:spcBef>
@@ -4031,9 +3982,6 @@
               </a:spcAft>
               <a:buNone/>
             </a:pPr>
-            <a:r>
-              <a:t/>
-            </a:r>
             <a:endParaRPr/>
           </a:p>
         </p:txBody>
@@ -4041,7 +3989,9 @@
       <p:sp>
         <p:nvSpPr>
           <p:cNvPr id="34" name="Google Shape;34;p5"/>
-          <p:cNvSpPr txBox="1"/>
+          <p:cNvSpPr txBox="1">
+            <a:spLocks noGrp="1"/>
+          </p:cNvSpPr>
           <p:nvPr>
             <p:ph type="title"/>
           </p:nvPr>
@@ -4056,7 +4006,7 @@
           </a:prstGeom>
         </p:spPr>
         <p:txBody>
-          <a:bodyPr anchorCtr="0" anchor="ctr" bIns="0" lIns="0" spcFirstLastPara="1" rIns="0" wrap="square" tIns="0">
+          <a:bodyPr spcFirstLastPara="1" wrap="square" lIns="0" tIns="0" rIns="0" bIns="0" anchor="ctr" anchorCtr="0">
             <a:noAutofit/>
           </a:bodyPr>
           <a:lstStyle>
@@ -4228,7 +4178,9 @@
               </a:defRPr>
             </a:lvl9pPr>
           </a:lstStyle>
-          <a:p/>
+          <a:p>
+            <a:endParaRPr/>
+          </a:p>
         </p:txBody>
       </p:sp>
       <p:pic>
@@ -4266,7 +4218,7 @@
   </p:clrMapOvr>
   <p:extLst>
     <p:ext uri="{DCECCB84-F9BA-43D5-87BE-67443E8EF086}">
-      <p15:sldGuideLst>
+      <p15:sldGuideLst xmlns:p15="http://schemas.microsoft.com/office/powerpoint/2012/main">
         <p15:guide id="1" pos="432">
           <p15:clr>
             <a:schemeClr val="accent1"/>
@@ -4304,11 +4256,11 @@
 </file>
 
 <file path=ppt/slideLayouts/slideLayout5.xml><?xml version="1.0" encoding="utf-8"?>
-<p:sldLayout xmlns:a="http://schemas.openxmlformats.org/drawingml/2006/main" xmlns:r="http://schemas.openxmlformats.org/officeDocument/2006/relationships" xmlns:mc="http://schemas.openxmlformats.org/markup-compatibility/2006" xmlns:mv="urn:schemas-microsoft-com:mac:vml" xmlns:p="http://schemas.openxmlformats.org/presentationml/2006/main" xmlns:c="http://schemas.openxmlformats.org/drawingml/2006/chart" xmlns:dgm="http://schemas.openxmlformats.org/drawingml/2006/diagram" xmlns:o="urn:schemas-microsoft-com:office:office" xmlns:v="urn:schemas-microsoft-com:vml" xmlns:pvml="urn:schemas-microsoft-com:office:powerpoint" xmlns:com="http://schemas.openxmlformats.org/drawingml/2006/compatibility" xmlns:p14="http://schemas.microsoft.com/office/powerpoint/2010/main" xmlns:p15="http://schemas.microsoft.com/office/powerpoint/2012/main" xmlns:ahyp="http://schemas.microsoft.com/office/drawing/2018/hyperlinkcolor" matchingName="2.b Third Card">
+<p:sldLayout xmlns:a="http://schemas.openxmlformats.org/drawingml/2006/main" xmlns:r="http://schemas.openxmlformats.org/officeDocument/2006/relationships" xmlns:p="http://schemas.openxmlformats.org/presentationml/2006/main" matchingName="2.b Third Card">
   <p:cSld name="TITLE_AND_BODY_1_1_1_3">
     <p:spTree>
       <p:nvGrpSpPr>
-        <p:cNvPr id="36" name="Shape 36"/>
+        <p:cNvPr id="1" name="Shape 36"/>
         <p:cNvGrpSpPr/>
         <p:nvPr/>
       </p:nvGrpSpPr>
@@ -4370,12 +4322,12 @@
           </a:ln>
         </p:spPr>
         <p:txBody>
-          <a:bodyPr anchorCtr="0" anchor="ctr" bIns="91425" lIns="91425" spcFirstLastPara="1" rIns="91425" wrap="square" tIns="91425">
+          <a:bodyPr spcFirstLastPara="1" wrap="square" lIns="91425" tIns="91425" rIns="91425" bIns="91425" anchor="ctr" anchorCtr="0">
             <a:noAutofit/>
           </a:bodyPr>
           <a:lstStyle/>
           <a:p>
-            <a:pPr indent="0" lvl="0" marL="0" rtl="0" algn="ctr">
+            <a:pPr marL="0" lvl="0" indent="0" algn="ctr" rtl="0">
               <a:spcBef>
                 <a:spcPts val="0"/>
               </a:spcBef>
@@ -4384,9 +4336,6 @@
               </a:spcAft>
               <a:buNone/>
             </a:pPr>
-            <a:r>
-              <a:t/>
-            </a:r>
             <a:endParaRPr>
               <a:latin typeface="Open Sans"/>
               <a:ea typeface="Open Sans"/>
@@ -4445,7 +4394,7 @@
             <a:noFill/>
           </a:ln>
           <a:effectLst>
-            <a:outerShdw blurRad="714375" rotWithShape="0" algn="bl" dir="5400000" dist="238125">
+            <a:outerShdw blurRad="714375" dist="238125" dir="5400000" algn="bl" rotWithShape="0">
               <a:srgbClr val="000000">
                 <a:alpha val="25000"/>
               </a:srgbClr>
@@ -4453,12 +4402,12 @@
           </a:effectLst>
         </p:spPr>
         <p:txBody>
-          <a:bodyPr anchorCtr="0" anchor="ctr" bIns="91450" lIns="91450" spcFirstLastPara="1" rIns="91450" wrap="square" tIns="91450">
+          <a:bodyPr spcFirstLastPara="1" wrap="square" lIns="91450" tIns="91450" rIns="91450" bIns="91450" anchor="ctr" anchorCtr="0">
             <a:noAutofit/>
           </a:bodyPr>
           <a:lstStyle/>
           <a:p>
-            <a:pPr indent="0" lvl="0" marL="0" rtl="0" algn="l">
+            <a:pPr marL="0" lvl="0" indent="0" algn="l" rtl="0">
               <a:spcBef>
                 <a:spcPts val="0"/>
               </a:spcBef>
@@ -4467,9 +4416,6 @@
               </a:spcAft>
               <a:buNone/>
             </a:pPr>
-            <a:r>
-              <a:t/>
-            </a:r>
             <a:endParaRPr/>
           </a:p>
         </p:txBody>
@@ -4487,7 +4433,7 @@
           </a:xfrm>
           <a:prstGeom prst="round1Rect">
             <a:avLst>
-              <a:gd fmla="val 28421" name="adj"/>
+              <a:gd name="adj" fmla="val 28421"/>
             </a:avLst>
           </a:prstGeom>
           <a:solidFill>
@@ -4498,12 +4444,12 @@
           </a:ln>
         </p:spPr>
         <p:txBody>
-          <a:bodyPr anchorCtr="0" anchor="ctr" bIns="91450" lIns="91450" spcFirstLastPara="1" rIns="91450" wrap="square" tIns="91450">
+          <a:bodyPr spcFirstLastPara="1" wrap="square" lIns="91450" tIns="91450" rIns="91450" bIns="91450" anchor="ctr" anchorCtr="0">
             <a:noAutofit/>
           </a:bodyPr>
           <a:lstStyle/>
           <a:p>
-            <a:pPr indent="0" lvl="0" marL="0" rtl="0" algn="l">
+            <a:pPr marL="0" lvl="0" indent="0" algn="l" rtl="0">
               <a:spcBef>
                 <a:spcPts val="0"/>
               </a:spcBef>
@@ -4512,9 +4458,6 @@
               </a:spcAft>
               <a:buNone/>
             </a:pPr>
-            <a:r>
-              <a:t/>
-            </a:r>
             <a:endParaRPr/>
           </a:p>
         </p:txBody>
@@ -4539,12 +4482,12 @@
           </a:ln>
         </p:spPr>
         <p:txBody>
-          <a:bodyPr anchorCtr="0" anchor="t" bIns="0" lIns="0" spcFirstLastPara="1" rIns="0" wrap="square" tIns="0">
+          <a:bodyPr spcFirstLastPara="1" wrap="square" lIns="0" tIns="0" rIns="0" bIns="0" anchor="t" anchorCtr="0">
             <a:noAutofit/>
           </a:bodyPr>
           <a:lstStyle/>
           <a:p>
-            <a:pPr indent="0" lvl="0" marL="0" rtl="0" algn="l">
+            <a:pPr marL="0" lvl="0" indent="0" algn="l" rtl="0">
               <a:lnSpc>
                 <a:spcPct val="115000"/>
               </a:lnSpc>
@@ -4556,10 +4499,7 @@
               </a:spcAft>
               <a:buNone/>
             </a:pPr>
-            <a:r>
-              <a:t/>
-            </a:r>
-            <a:endParaRPr b="1" sz="2600">
+            <a:endParaRPr sz="2600" b="1">
               <a:solidFill>
                 <a:srgbClr val="0B0B0B"/>
               </a:solidFill>
@@ -4574,9 +4514,11 @@
       <p:sp>
         <p:nvSpPr>
           <p:cNvPr id="43" name="Google Shape;43;p6"/>
-          <p:cNvSpPr txBox="1"/>
+          <p:cNvSpPr txBox="1">
+            <a:spLocks noGrp="1"/>
+          </p:cNvSpPr>
           <p:nvPr>
-            <p:ph idx="1" type="body"/>
+            <p:ph type="body" idx="1"/>
           </p:nvPr>
         </p:nvSpPr>
         <p:spPr>
@@ -4589,11 +4531,11 @@
           </a:prstGeom>
         </p:spPr>
         <p:txBody>
-          <a:bodyPr anchorCtr="0" anchor="t" bIns="0" lIns="0" spcFirstLastPara="1" rIns="0" wrap="square" tIns="0">
+          <a:bodyPr spcFirstLastPara="1" wrap="square" lIns="0" tIns="0" rIns="0" bIns="0" anchor="t" anchorCtr="0">
             <a:noAutofit/>
           </a:bodyPr>
           <a:lstStyle>
-            <a:lvl1pPr indent="-457200" lvl="0" marL="457200" rtl="0">
+            <a:lvl1pPr marL="457200" lvl="0" indent="-457200" rtl="0">
               <a:spcBef>
                 <a:spcPts val="0"/>
               </a:spcBef>
@@ -4611,7 +4553,7 @@
                 </a:solidFill>
               </a:defRPr>
             </a:lvl1pPr>
-            <a:lvl2pPr indent="-419100" lvl="1" marL="914400" rtl="0">
+            <a:lvl2pPr marL="914400" lvl="1" indent="-419100" rtl="0">
               <a:spcBef>
                 <a:spcPts val="2000"/>
               </a:spcBef>
@@ -4629,7 +4571,7 @@
                 </a:solidFill>
               </a:defRPr>
             </a:lvl2pPr>
-            <a:lvl3pPr indent="-381000" lvl="2" marL="1371600" rtl="0">
+            <a:lvl3pPr marL="1371600" lvl="2" indent="-381000" rtl="0">
               <a:spcBef>
                 <a:spcPts val="2000"/>
               </a:spcBef>
@@ -4647,7 +4589,7 @@
                 </a:solidFill>
               </a:defRPr>
             </a:lvl3pPr>
-            <a:lvl4pPr indent="-381000" lvl="3" marL="1828800" rtl="0">
+            <a:lvl4pPr marL="1828800" lvl="3" indent="-381000" rtl="0">
               <a:spcBef>
                 <a:spcPts val="2000"/>
               </a:spcBef>
@@ -4665,7 +4607,7 @@
                 </a:solidFill>
               </a:defRPr>
             </a:lvl4pPr>
-            <a:lvl5pPr indent="-381000" lvl="4" marL="2286000" rtl="0">
+            <a:lvl5pPr marL="2286000" lvl="4" indent="-381000" rtl="0">
               <a:spcBef>
                 <a:spcPts val="2000"/>
               </a:spcBef>
@@ -4683,7 +4625,7 @@
                 </a:solidFill>
               </a:defRPr>
             </a:lvl5pPr>
-            <a:lvl6pPr indent="-381000" lvl="5" marL="2743200" rtl="0">
+            <a:lvl6pPr marL="2743200" lvl="5" indent="-381000" rtl="0">
               <a:spcBef>
                 <a:spcPts val="2000"/>
               </a:spcBef>
@@ -4701,7 +4643,7 @@
                 </a:solidFill>
               </a:defRPr>
             </a:lvl6pPr>
-            <a:lvl7pPr indent="-381000" lvl="6" marL="3200400" rtl="0">
+            <a:lvl7pPr marL="3200400" lvl="6" indent="-381000" rtl="0">
               <a:spcBef>
                 <a:spcPts val="2000"/>
               </a:spcBef>
@@ -4719,7 +4661,7 @@
                 </a:solidFill>
               </a:defRPr>
             </a:lvl7pPr>
-            <a:lvl8pPr indent="-381000" lvl="7" marL="3657600" rtl="0">
+            <a:lvl8pPr marL="3657600" lvl="7" indent="-381000" rtl="0">
               <a:spcBef>
                 <a:spcPts val="2000"/>
               </a:spcBef>
@@ -4737,7 +4679,7 @@
                 </a:solidFill>
               </a:defRPr>
             </a:lvl8pPr>
-            <a:lvl9pPr indent="-381000" lvl="8" marL="4114800" rtl="0">
+            <a:lvl9pPr marL="4114800" lvl="8" indent="-381000" rtl="0">
               <a:spcBef>
                 <a:spcPts val="2000"/>
               </a:spcBef>
@@ -4756,15 +4698,19 @@
               </a:defRPr>
             </a:lvl9pPr>
           </a:lstStyle>
-          <a:p/>
+          <a:p>
+            <a:endParaRPr/>
+          </a:p>
         </p:txBody>
       </p:sp>
       <p:sp>
         <p:nvSpPr>
           <p:cNvPr id="44" name="Google Shape;44;p6"/>
-          <p:cNvSpPr txBox="1"/>
+          <p:cNvSpPr txBox="1">
+            <a:spLocks noGrp="1"/>
+          </p:cNvSpPr>
           <p:nvPr>
-            <p:ph idx="2" type="subTitle"/>
+            <p:ph type="subTitle" idx="2"/>
           </p:nvPr>
         </p:nvSpPr>
         <p:spPr>
@@ -4777,7 +4723,7 @@
           </a:prstGeom>
         </p:spPr>
         <p:txBody>
-          <a:bodyPr anchorCtr="0" anchor="t" bIns="0" lIns="0" spcFirstLastPara="1" rIns="0" wrap="square" tIns="0">
+          <a:bodyPr spcFirstLastPara="1" wrap="square" lIns="0" tIns="0" rIns="0" bIns="0" anchor="t" anchorCtr="0">
             <a:noAutofit/>
           </a:bodyPr>
           <a:lstStyle>
@@ -4801,7 +4747,7 @@
               </a:spcAft>
               <a:buSzPts val="3600"/>
               <a:buNone/>
-              <a:defRPr b="1" sz="3600"/>
+              <a:defRPr sz="3600" b="1"/>
             </a:lvl2pPr>
             <a:lvl3pPr lvl="2" rtl="0">
               <a:spcBef>
@@ -4812,7 +4758,7 @@
               </a:spcAft>
               <a:buSzPts val="3600"/>
               <a:buNone/>
-              <a:defRPr b="1" sz="3600"/>
+              <a:defRPr sz="3600" b="1"/>
             </a:lvl3pPr>
             <a:lvl4pPr lvl="3" rtl="0">
               <a:spcBef>
@@ -4823,7 +4769,7 @@
               </a:spcAft>
               <a:buSzPts val="3600"/>
               <a:buNone/>
-              <a:defRPr b="1" sz="3600"/>
+              <a:defRPr sz="3600" b="1"/>
             </a:lvl4pPr>
             <a:lvl5pPr lvl="4" rtl="0">
               <a:spcBef>
@@ -4834,7 +4780,7 @@
               </a:spcAft>
               <a:buSzPts val="3600"/>
               <a:buNone/>
-              <a:defRPr b="1" sz="3600"/>
+              <a:defRPr sz="3600" b="1"/>
             </a:lvl5pPr>
             <a:lvl6pPr lvl="5" rtl="0">
               <a:spcBef>
@@ -4845,7 +4791,7 @@
               </a:spcAft>
               <a:buSzPts val="3600"/>
               <a:buNone/>
-              <a:defRPr b="1" sz="3600"/>
+              <a:defRPr sz="3600" b="1"/>
             </a:lvl6pPr>
             <a:lvl7pPr lvl="6" rtl="0">
               <a:spcBef>
@@ -4856,7 +4802,7 @@
               </a:spcAft>
               <a:buSzPts val="3600"/>
               <a:buNone/>
-              <a:defRPr b="1" sz="3600"/>
+              <a:defRPr sz="3600" b="1"/>
             </a:lvl7pPr>
             <a:lvl8pPr lvl="7" rtl="0">
               <a:spcBef>
@@ -4867,7 +4813,7 @@
               </a:spcAft>
               <a:buSzPts val="3600"/>
               <a:buNone/>
-              <a:defRPr b="1" sz="3600"/>
+              <a:defRPr sz="3600" b="1"/>
             </a:lvl8pPr>
             <a:lvl9pPr lvl="8" rtl="0">
               <a:spcBef>
@@ -4878,16 +4824,20 @@
               </a:spcAft>
               <a:buSzPts val="3600"/>
               <a:buNone/>
-              <a:defRPr b="1" sz="3600"/>
+              <a:defRPr sz="3600" b="1"/>
             </a:lvl9pPr>
           </a:lstStyle>
-          <a:p/>
+          <a:p>
+            <a:endParaRPr/>
+          </a:p>
         </p:txBody>
       </p:sp>
       <p:sp>
         <p:nvSpPr>
           <p:cNvPr id="45" name="Google Shape;45;p6"/>
-          <p:cNvSpPr txBox="1"/>
+          <p:cNvSpPr txBox="1">
+            <a:spLocks noGrp="1"/>
+          </p:cNvSpPr>
           <p:nvPr>
             <p:ph type="title"/>
           </p:nvPr>
@@ -4902,7 +4852,7 @@
           </a:prstGeom>
         </p:spPr>
         <p:txBody>
-          <a:bodyPr anchorCtr="0" anchor="ctr" bIns="0" lIns="0" spcFirstLastPara="1" rIns="0" wrap="square" tIns="0">
+          <a:bodyPr spcFirstLastPara="1" wrap="square" lIns="0" tIns="0" rIns="0" bIns="0" anchor="ctr" anchorCtr="0">
             <a:noAutofit/>
           </a:bodyPr>
           <a:lstStyle>
@@ -5012,15 +4962,19 @@
               <a:defRPr/>
             </a:lvl9pPr>
           </a:lstStyle>
-          <a:p/>
+          <a:p>
+            <a:endParaRPr/>
+          </a:p>
         </p:txBody>
       </p:sp>
       <p:sp>
         <p:nvSpPr>
           <p:cNvPr id="46" name="Google Shape;46;p6"/>
-          <p:cNvSpPr txBox="1"/>
+          <p:cNvSpPr txBox="1">
+            <a:spLocks noGrp="1"/>
+          </p:cNvSpPr>
           <p:nvPr>
-            <p:ph idx="3" type="body"/>
+            <p:ph type="body" idx="3"/>
           </p:nvPr>
         </p:nvSpPr>
         <p:spPr>
@@ -5033,11 +4987,11 @@
           </a:prstGeom>
         </p:spPr>
         <p:txBody>
-          <a:bodyPr anchorCtr="0" anchor="t" bIns="0" lIns="0" spcFirstLastPara="1" rIns="0" wrap="square" tIns="0">
+          <a:bodyPr spcFirstLastPara="1" wrap="square" lIns="0" tIns="0" rIns="0" bIns="0" anchor="t" anchorCtr="0">
             <a:noAutofit/>
           </a:bodyPr>
           <a:lstStyle>
-            <a:lvl1pPr indent="-457200" lvl="0" marL="457200" rtl="0">
+            <a:lvl1pPr marL="457200" lvl="0" indent="-457200" rtl="0">
               <a:spcBef>
                 <a:spcPts val="0"/>
               </a:spcBef>
@@ -5055,7 +5009,7 @@
                 </a:solidFill>
               </a:defRPr>
             </a:lvl1pPr>
-            <a:lvl2pPr indent="-419100" lvl="1" marL="914400" rtl="0">
+            <a:lvl2pPr marL="914400" lvl="1" indent="-419100" rtl="0">
               <a:spcBef>
                 <a:spcPts val="2000"/>
               </a:spcBef>
@@ -5073,7 +5027,7 @@
                 </a:solidFill>
               </a:defRPr>
             </a:lvl2pPr>
-            <a:lvl3pPr indent="-381000" lvl="2" marL="1371600" rtl="0">
+            <a:lvl3pPr marL="1371600" lvl="2" indent="-381000" rtl="0">
               <a:spcBef>
                 <a:spcPts val="2000"/>
               </a:spcBef>
@@ -5091,7 +5045,7 @@
                 </a:solidFill>
               </a:defRPr>
             </a:lvl3pPr>
-            <a:lvl4pPr indent="-381000" lvl="3" marL="1828800" rtl="0">
+            <a:lvl4pPr marL="1828800" lvl="3" indent="-381000" rtl="0">
               <a:spcBef>
                 <a:spcPts val="2000"/>
               </a:spcBef>
@@ -5109,7 +5063,7 @@
                 </a:solidFill>
               </a:defRPr>
             </a:lvl4pPr>
-            <a:lvl5pPr indent="-381000" lvl="4" marL="2286000" rtl="0">
+            <a:lvl5pPr marL="2286000" lvl="4" indent="-381000" rtl="0">
               <a:spcBef>
                 <a:spcPts val="2000"/>
               </a:spcBef>
@@ -5127,7 +5081,7 @@
                 </a:solidFill>
               </a:defRPr>
             </a:lvl5pPr>
-            <a:lvl6pPr indent="-381000" lvl="5" marL="2743200" rtl="0">
+            <a:lvl6pPr marL="2743200" lvl="5" indent="-381000" rtl="0">
               <a:spcBef>
                 <a:spcPts val="2000"/>
               </a:spcBef>
@@ -5145,7 +5099,7 @@
                 </a:solidFill>
               </a:defRPr>
             </a:lvl6pPr>
-            <a:lvl7pPr indent="-381000" lvl="6" marL="3200400" rtl="0">
+            <a:lvl7pPr marL="3200400" lvl="6" indent="-381000" rtl="0">
               <a:spcBef>
                 <a:spcPts val="2000"/>
               </a:spcBef>
@@ -5163,7 +5117,7 @@
                 </a:solidFill>
               </a:defRPr>
             </a:lvl7pPr>
-            <a:lvl8pPr indent="-381000" lvl="7" marL="3657600" rtl="0">
+            <a:lvl8pPr marL="3657600" lvl="7" indent="-381000" rtl="0">
               <a:spcBef>
                 <a:spcPts val="2000"/>
               </a:spcBef>
@@ -5181,7 +5135,7 @@
                 </a:solidFill>
               </a:defRPr>
             </a:lvl8pPr>
-            <a:lvl9pPr indent="-381000" lvl="8" marL="4114800" rtl="0">
+            <a:lvl9pPr marL="4114800" lvl="8" indent="-381000" rtl="0">
               <a:spcBef>
                 <a:spcPts val="2000"/>
               </a:spcBef>
@@ -5200,7 +5154,9 @@
               </a:defRPr>
             </a:lvl9pPr>
           </a:lstStyle>
-          <a:p/>
+          <a:p>
+            <a:endParaRPr/>
+          </a:p>
         </p:txBody>
       </p:sp>
     </p:spTree>
@@ -5210,7 +5166,7 @@
   </p:clrMapOvr>
   <p:extLst>
     <p:ext uri="{DCECCB84-F9BA-43D5-87BE-67443E8EF086}">
-      <p15:sldGuideLst>
+      <p15:sldGuideLst xmlns:p15="http://schemas.microsoft.com/office/powerpoint/2012/main">
         <p15:guide id="1" pos="432">
           <p15:clr>
             <a:schemeClr val="accent1"/>
@@ -5278,11 +5234,11 @@
 </file>
 
 <file path=ppt/slideLayouts/slideLayout6.xml><?xml version="1.0" encoding="utf-8"?>
-<p:sldLayout xmlns:a="http://schemas.openxmlformats.org/drawingml/2006/main" xmlns:r="http://schemas.openxmlformats.org/officeDocument/2006/relationships" xmlns:mc="http://schemas.openxmlformats.org/markup-compatibility/2006" xmlns:mv="urn:schemas-microsoft-com:mac:vml" xmlns:p="http://schemas.openxmlformats.org/presentationml/2006/main" xmlns:c="http://schemas.openxmlformats.org/drawingml/2006/chart" xmlns:dgm="http://schemas.openxmlformats.org/drawingml/2006/diagram" xmlns:o="urn:schemas-microsoft-com:office:office" xmlns:v="urn:schemas-microsoft-com:vml" xmlns:pvml="urn:schemas-microsoft-com:office:powerpoint" xmlns:com="http://schemas.openxmlformats.org/drawingml/2006/compatibility" xmlns:p14="http://schemas.microsoft.com/office/powerpoint/2010/main" xmlns:p15="http://schemas.microsoft.com/office/powerpoint/2012/main" xmlns:ahyp="http://schemas.microsoft.com/office/drawing/2018/hyperlinkcolor" matchingName="2.c Half Card">
+<p:sldLayout xmlns:a="http://schemas.openxmlformats.org/drawingml/2006/main" xmlns:r="http://schemas.openxmlformats.org/officeDocument/2006/relationships" xmlns:p="http://schemas.openxmlformats.org/presentationml/2006/main" matchingName="2.c Half Card">
   <p:cSld name="TITLE_AND_BODY_1_1_1_2">
     <p:spTree>
       <p:nvGrpSpPr>
-        <p:cNvPr id="47" name="Shape 47"/>
+        <p:cNvPr id="1" name="Shape 47"/>
         <p:cNvGrpSpPr/>
         <p:nvPr/>
       </p:nvGrpSpPr>
@@ -5344,12 +5300,12 @@
           </a:ln>
         </p:spPr>
         <p:txBody>
-          <a:bodyPr anchorCtr="0" anchor="ctr" bIns="91425" lIns="91425" spcFirstLastPara="1" rIns="91425" wrap="square" tIns="91425">
+          <a:bodyPr spcFirstLastPara="1" wrap="square" lIns="91425" tIns="91425" rIns="91425" bIns="91425" anchor="ctr" anchorCtr="0">
             <a:noAutofit/>
           </a:bodyPr>
           <a:lstStyle/>
           <a:p>
-            <a:pPr indent="0" lvl="0" marL="0" rtl="0" algn="ctr">
+            <a:pPr marL="0" lvl="0" indent="0" algn="ctr" rtl="0">
               <a:spcBef>
                 <a:spcPts val="0"/>
               </a:spcBef>
@@ -5358,9 +5314,6 @@
               </a:spcAft>
               <a:buNone/>
             </a:pPr>
-            <a:r>
-              <a:t/>
-            </a:r>
             <a:endParaRPr>
               <a:latin typeface="Open Sans"/>
               <a:ea typeface="Open Sans"/>
@@ -5419,7 +5372,7 @@
             <a:noFill/>
           </a:ln>
           <a:effectLst>
-            <a:outerShdw blurRad="714375" rotWithShape="0" algn="bl" dir="5400000" dist="238125">
+            <a:outerShdw blurRad="714375" dist="238125" dir="5400000" algn="bl" rotWithShape="0">
               <a:srgbClr val="000000">
                 <a:alpha val="25000"/>
               </a:srgbClr>
@@ -5427,12 +5380,12 @@
           </a:effectLst>
         </p:spPr>
         <p:txBody>
-          <a:bodyPr anchorCtr="0" anchor="ctr" bIns="91450" lIns="91450" spcFirstLastPara="1" rIns="91450" wrap="square" tIns="91450">
+          <a:bodyPr spcFirstLastPara="1" wrap="square" lIns="91450" tIns="91450" rIns="91450" bIns="91450" anchor="ctr" anchorCtr="0">
             <a:noAutofit/>
           </a:bodyPr>
           <a:lstStyle/>
           <a:p>
-            <a:pPr indent="0" lvl="0" marL="0" rtl="0" algn="l">
+            <a:pPr marL="0" lvl="0" indent="0" algn="l" rtl="0">
               <a:spcBef>
                 <a:spcPts val="0"/>
               </a:spcBef>
@@ -5441,9 +5394,6 @@
               </a:spcAft>
               <a:buNone/>
             </a:pPr>
-            <a:r>
-              <a:t/>
-            </a:r>
             <a:endParaRPr/>
           </a:p>
         </p:txBody>
@@ -5461,7 +5411,7 @@
           </a:xfrm>
           <a:prstGeom prst="round1Rect">
             <a:avLst>
-              <a:gd fmla="val 22136" name="adj"/>
+              <a:gd name="adj" fmla="val 22136"/>
             </a:avLst>
           </a:prstGeom>
           <a:solidFill>
@@ -5472,12 +5422,12 @@
           </a:ln>
         </p:spPr>
         <p:txBody>
-          <a:bodyPr anchorCtr="0" anchor="ctr" bIns="91450" lIns="91450" spcFirstLastPara="1" rIns="91450" wrap="square" tIns="91450">
+          <a:bodyPr spcFirstLastPara="1" wrap="square" lIns="91450" tIns="91450" rIns="91450" bIns="91450" anchor="ctr" anchorCtr="0">
             <a:noAutofit/>
           </a:bodyPr>
           <a:lstStyle/>
           <a:p>
-            <a:pPr indent="0" lvl="0" marL="0" rtl="0" algn="l">
+            <a:pPr marL="0" lvl="0" indent="0" algn="l" rtl="0">
               <a:spcBef>
                 <a:spcPts val="0"/>
               </a:spcBef>
@@ -5486,9 +5436,6 @@
               </a:spcAft>
               <a:buNone/>
             </a:pPr>
-            <a:r>
-              <a:t/>
-            </a:r>
             <a:endParaRPr/>
           </a:p>
         </p:txBody>
@@ -5496,9 +5443,11 @@
       <p:sp>
         <p:nvSpPr>
           <p:cNvPr id="53" name="Google Shape;53;p7"/>
-          <p:cNvSpPr txBox="1"/>
+          <p:cNvSpPr txBox="1">
+            <a:spLocks noGrp="1"/>
+          </p:cNvSpPr>
           <p:nvPr>
-            <p:ph idx="1" type="body"/>
+            <p:ph type="body" idx="1"/>
           </p:nvPr>
         </p:nvSpPr>
         <p:spPr>
@@ -5511,11 +5460,11 @@
           </a:prstGeom>
         </p:spPr>
         <p:txBody>
-          <a:bodyPr anchorCtr="0" anchor="t" bIns="0" lIns="0" spcFirstLastPara="1" rIns="0" wrap="square" tIns="0">
+          <a:bodyPr spcFirstLastPara="1" wrap="square" lIns="0" tIns="0" rIns="0" bIns="0" anchor="t" anchorCtr="0">
             <a:noAutofit/>
           </a:bodyPr>
           <a:lstStyle>
-            <a:lvl1pPr indent="-457200" lvl="0" marL="457200" rtl="0">
+            <a:lvl1pPr marL="457200" lvl="0" indent="-457200" rtl="0">
               <a:spcBef>
                 <a:spcPts val="0"/>
               </a:spcBef>
@@ -5533,7 +5482,7 @@
                 </a:solidFill>
               </a:defRPr>
             </a:lvl1pPr>
-            <a:lvl2pPr indent="-419100" lvl="1" marL="914400" rtl="0">
+            <a:lvl2pPr marL="914400" lvl="1" indent="-419100" rtl="0">
               <a:spcBef>
                 <a:spcPts val="2000"/>
               </a:spcBef>
@@ -5551,7 +5500,7 @@
                 </a:solidFill>
               </a:defRPr>
             </a:lvl2pPr>
-            <a:lvl3pPr indent="-381000" lvl="2" marL="1371600" rtl="0">
+            <a:lvl3pPr marL="1371600" lvl="2" indent="-381000" rtl="0">
               <a:spcBef>
                 <a:spcPts val="2000"/>
               </a:spcBef>
@@ -5569,7 +5518,7 @@
                 </a:solidFill>
               </a:defRPr>
             </a:lvl3pPr>
-            <a:lvl4pPr indent="-381000" lvl="3" marL="1828800" rtl="0">
+            <a:lvl4pPr marL="1828800" lvl="3" indent="-381000" rtl="0">
               <a:spcBef>
                 <a:spcPts val="2000"/>
               </a:spcBef>
@@ -5587,7 +5536,7 @@
                 </a:solidFill>
               </a:defRPr>
             </a:lvl4pPr>
-            <a:lvl5pPr indent="-381000" lvl="4" marL="2286000" rtl="0">
+            <a:lvl5pPr marL="2286000" lvl="4" indent="-381000" rtl="0">
               <a:spcBef>
                 <a:spcPts val="2000"/>
               </a:spcBef>
@@ -5605,7 +5554,7 @@
                 </a:solidFill>
               </a:defRPr>
             </a:lvl5pPr>
-            <a:lvl6pPr indent="-381000" lvl="5" marL="2743200" rtl="0">
+            <a:lvl6pPr marL="2743200" lvl="5" indent="-381000" rtl="0">
               <a:spcBef>
                 <a:spcPts val="2000"/>
               </a:spcBef>
@@ -5623,7 +5572,7 @@
                 </a:solidFill>
               </a:defRPr>
             </a:lvl6pPr>
-            <a:lvl7pPr indent="-381000" lvl="6" marL="3200400" rtl="0">
+            <a:lvl7pPr marL="3200400" lvl="6" indent="-381000" rtl="0">
               <a:spcBef>
                 <a:spcPts val="2000"/>
               </a:spcBef>
@@ -5641,7 +5590,7 @@
                 </a:solidFill>
               </a:defRPr>
             </a:lvl7pPr>
-            <a:lvl8pPr indent="-381000" lvl="7" marL="3657600" rtl="0">
+            <a:lvl8pPr marL="3657600" lvl="7" indent="-381000" rtl="0">
               <a:spcBef>
                 <a:spcPts val="2000"/>
               </a:spcBef>
@@ -5659,7 +5608,7 @@
                 </a:solidFill>
               </a:defRPr>
             </a:lvl8pPr>
-            <a:lvl9pPr indent="-381000" lvl="8" marL="4114800" rtl="0">
+            <a:lvl9pPr marL="4114800" lvl="8" indent="-381000" rtl="0">
               <a:spcBef>
                 <a:spcPts val="2000"/>
               </a:spcBef>
@@ -5678,15 +5627,19 @@
               </a:defRPr>
             </a:lvl9pPr>
           </a:lstStyle>
-          <a:p/>
+          <a:p>
+            <a:endParaRPr/>
+          </a:p>
         </p:txBody>
       </p:sp>
       <p:sp>
         <p:nvSpPr>
           <p:cNvPr id="54" name="Google Shape;54;p7"/>
-          <p:cNvSpPr txBox="1"/>
+          <p:cNvSpPr txBox="1">
+            <a:spLocks noGrp="1"/>
+          </p:cNvSpPr>
           <p:nvPr>
-            <p:ph idx="2" type="subTitle"/>
+            <p:ph type="subTitle" idx="2"/>
           </p:nvPr>
         </p:nvSpPr>
         <p:spPr>
@@ -5699,7 +5652,7 @@
           </a:prstGeom>
         </p:spPr>
         <p:txBody>
-          <a:bodyPr anchorCtr="0" anchor="t" bIns="0" lIns="0" spcFirstLastPara="1" rIns="0" wrap="square" tIns="0">
+          <a:bodyPr spcFirstLastPara="1" wrap="square" lIns="0" tIns="0" rIns="0" bIns="0" anchor="t" anchorCtr="0">
             <a:noAutofit/>
           </a:bodyPr>
           <a:lstStyle>
@@ -5723,7 +5676,7 @@
               </a:spcAft>
               <a:buSzPts val="3600"/>
               <a:buNone/>
-              <a:defRPr b="1" sz="3600"/>
+              <a:defRPr sz="3600" b="1"/>
             </a:lvl2pPr>
             <a:lvl3pPr lvl="2" rtl="0">
               <a:spcBef>
@@ -5734,7 +5687,7 @@
               </a:spcAft>
               <a:buSzPts val="3600"/>
               <a:buNone/>
-              <a:defRPr b="1" sz="3600"/>
+              <a:defRPr sz="3600" b="1"/>
             </a:lvl3pPr>
             <a:lvl4pPr lvl="3" rtl="0">
               <a:spcBef>
@@ -5745,7 +5698,7 @@
               </a:spcAft>
               <a:buSzPts val="3600"/>
               <a:buNone/>
-              <a:defRPr b="1" sz="3600"/>
+              <a:defRPr sz="3600" b="1"/>
             </a:lvl4pPr>
             <a:lvl5pPr lvl="4" rtl="0">
               <a:spcBef>
@@ -5756,7 +5709,7 @@
               </a:spcAft>
               <a:buSzPts val="3600"/>
               <a:buNone/>
-              <a:defRPr b="1" sz="3600"/>
+              <a:defRPr sz="3600" b="1"/>
             </a:lvl5pPr>
             <a:lvl6pPr lvl="5" rtl="0">
               <a:spcBef>
@@ -5767,7 +5720,7 @@
               </a:spcAft>
               <a:buSzPts val="3600"/>
               <a:buNone/>
-              <a:defRPr b="1" sz="3600"/>
+              <a:defRPr sz="3600" b="1"/>
             </a:lvl6pPr>
             <a:lvl7pPr lvl="6" rtl="0">
               <a:spcBef>
@@ -5778,7 +5731,7 @@
               </a:spcAft>
               <a:buSzPts val="3600"/>
               <a:buNone/>
-              <a:defRPr b="1" sz="3600"/>
+              <a:defRPr sz="3600" b="1"/>
             </a:lvl7pPr>
             <a:lvl8pPr lvl="7" rtl="0">
               <a:spcBef>
@@ -5789,7 +5742,7 @@
               </a:spcAft>
               <a:buSzPts val="3600"/>
               <a:buNone/>
-              <a:defRPr b="1" sz="3600"/>
+              <a:defRPr sz="3600" b="1"/>
             </a:lvl8pPr>
             <a:lvl9pPr lvl="8" rtl="0">
               <a:spcBef>
@@ -5800,16 +5753,20 @@
               </a:spcAft>
               <a:buSzPts val="3600"/>
               <a:buNone/>
-              <a:defRPr b="1" sz="3600"/>
+              <a:defRPr sz="3600" b="1"/>
             </a:lvl9pPr>
           </a:lstStyle>
-          <a:p/>
+          <a:p>
+            <a:endParaRPr/>
+          </a:p>
         </p:txBody>
       </p:sp>
       <p:sp>
         <p:nvSpPr>
           <p:cNvPr id="55" name="Google Shape;55;p7"/>
-          <p:cNvSpPr txBox="1"/>
+          <p:cNvSpPr txBox="1">
+            <a:spLocks noGrp="1"/>
+          </p:cNvSpPr>
           <p:nvPr>
             <p:ph type="title"/>
           </p:nvPr>
@@ -5824,7 +5781,7 @@
           </a:prstGeom>
         </p:spPr>
         <p:txBody>
-          <a:bodyPr anchorCtr="0" anchor="ctr" bIns="0" lIns="0" spcFirstLastPara="1" rIns="0" wrap="square" tIns="0">
+          <a:bodyPr spcFirstLastPara="1" wrap="square" lIns="0" tIns="0" rIns="0" bIns="0" anchor="ctr" anchorCtr="0">
             <a:noAutofit/>
           </a:bodyPr>
           <a:lstStyle>
@@ -5934,15 +5891,19 @@
               <a:defRPr/>
             </a:lvl9pPr>
           </a:lstStyle>
-          <a:p/>
+          <a:p>
+            <a:endParaRPr/>
+          </a:p>
         </p:txBody>
       </p:sp>
       <p:sp>
         <p:nvSpPr>
           <p:cNvPr id="56" name="Google Shape;56;p7"/>
-          <p:cNvSpPr txBox="1"/>
+          <p:cNvSpPr txBox="1">
+            <a:spLocks noGrp="1"/>
+          </p:cNvSpPr>
           <p:nvPr>
-            <p:ph idx="3" type="body"/>
+            <p:ph type="body" idx="3"/>
           </p:nvPr>
         </p:nvSpPr>
         <p:spPr>
@@ -5955,11 +5916,11 @@
           </a:prstGeom>
         </p:spPr>
         <p:txBody>
-          <a:bodyPr anchorCtr="0" anchor="t" bIns="0" lIns="0" spcFirstLastPara="1" rIns="0" wrap="square" tIns="0">
+          <a:bodyPr spcFirstLastPara="1" wrap="square" lIns="0" tIns="0" rIns="0" bIns="0" anchor="t" anchorCtr="0">
             <a:noAutofit/>
           </a:bodyPr>
           <a:lstStyle>
-            <a:lvl1pPr indent="-457200" lvl="0" marL="457200" rtl="0">
+            <a:lvl1pPr marL="457200" lvl="0" indent="-457200" rtl="0">
               <a:spcBef>
                 <a:spcPts val="0"/>
               </a:spcBef>
@@ -5977,7 +5938,7 @@
                 </a:solidFill>
               </a:defRPr>
             </a:lvl1pPr>
-            <a:lvl2pPr indent="-419100" lvl="1" marL="914400" rtl="0">
+            <a:lvl2pPr marL="914400" lvl="1" indent="-419100" rtl="0">
               <a:spcBef>
                 <a:spcPts val="2000"/>
               </a:spcBef>
@@ -5995,7 +5956,7 @@
                 </a:solidFill>
               </a:defRPr>
             </a:lvl2pPr>
-            <a:lvl3pPr indent="-381000" lvl="2" marL="1371600" rtl="0">
+            <a:lvl3pPr marL="1371600" lvl="2" indent="-381000" rtl="0">
               <a:spcBef>
                 <a:spcPts val="2000"/>
               </a:spcBef>
@@ -6013,7 +5974,7 @@
                 </a:solidFill>
               </a:defRPr>
             </a:lvl3pPr>
-            <a:lvl4pPr indent="-381000" lvl="3" marL="1828800" rtl="0">
+            <a:lvl4pPr marL="1828800" lvl="3" indent="-381000" rtl="0">
               <a:spcBef>
                 <a:spcPts val="2000"/>
               </a:spcBef>
@@ -6031,7 +5992,7 @@
                 </a:solidFill>
               </a:defRPr>
             </a:lvl4pPr>
-            <a:lvl5pPr indent="-381000" lvl="4" marL="2286000" rtl="0">
+            <a:lvl5pPr marL="2286000" lvl="4" indent="-381000" rtl="0">
               <a:spcBef>
                 <a:spcPts val="2000"/>
               </a:spcBef>
@@ -6049,7 +6010,7 @@
                 </a:solidFill>
               </a:defRPr>
             </a:lvl5pPr>
-            <a:lvl6pPr indent="-381000" lvl="5" marL="2743200" rtl="0">
+            <a:lvl6pPr marL="2743200" lvl="5" indent="-381000" rtl="0">
               <a:spcBef>
                 <a:spcPts val="2000"/>
               </a:spcBef>
@@ -6067,7 +6028,7 @@
                 </a:solidFill>
               </a:defRPr>
             </a:lvl6pPr>
-            <a:lvl7pPr indent="-381000" lvl="6" marL="3200400" rtl="0">
+            <a:lvl7pPr marL="3200400" lvl="6" indent="-381000" rtl="0">
               <a:spcBef>
                 <a:spcPts val="2000"/>
               </a:spcBef>
@@ -6085,7 +6046,7 @@
                 </a:solidFill>
               </a:defRPr>
             </a:lvl7pPr>
-            <a:lvl8pPr indent="-381000" lvl="7" marL="3657600" rtl="0">
+            <a:lvl8pPr marL="3657600" lvl="7" indent="-381000" rtl="0">
               <a:spcBef>
                 <a:spcPts val="2000"/>
               </a:spcBef>
@@ -6103,7 +6064,7 @@
                 </a:solidFill>
               </a:defRPr>
             </a:lvl8pPr>
-            <a:lvl9pPr indent="-381000" lvl="8" marL="4114800" rtl="0">
+            <a:lvl9pPr marL="4114800" lvl="8" indent="-381000" rtl="0">
               <a:spcBef>
                 <a:spcPts val="2000"/>
               </a:spcBef>
@@ -6122,7 +6083,9 @@
               </a:defRPr>
             </a:lvl9pPr>
           </a:lstStyle>
-          <a:p/>
+          <a:p>
+            <a:endParaRPr/>
+          </a:p>
         </p:txBody>
       </p:sp>
     </p:spTree>
@@ -6132,7 +6095,7 @@
   </p:clrMapOvr>
   <p:extLst>
     <p:ext uri="{DCECCB84-F9BA-43D5-87BE-67443E8EF086}">
-      <p15:sldGuideLst>
+      <p15:sldGuideLst xmlns:p15="http://schemas.microsoft.com/office/powerpoint/2012/main">
         <p15:guide id="1" pos="432">
           <p15:clr>
             <a:schemeClr val="accent1"/>
@@ -6195,11 +6158,11 @@
 </file>
 
 <file path=ppt/slideLayouts/slideLayout7.xml><?xml version="1.0" encoding="utf-8"?>
-<p:sldLayout xmlns:a="http://schemas.openxmlformats.org/drawingml/2006/main" xmlns:r="http://schemas.openxmlformats.org/officeDocument/2006/relationships" xmlns:mc="http://schemas.openxmlformats.org/markup-compatibility/2006" xmlns:mv="urn:schemas-microsoft-com:mac:vml" xmlns:p="http://schemas.openxmlformats.org/presentationml/2006/main" xmlns:c="http://schemas.openxmlformats.org/drawingml/2006/chart" xmlns:dgm="http://schemas.openxmlformats.org/drawingml/2006/diagram" xmlns:o="urn:schemas-microsoft-com:office:office" xmlns:v="urn:schemas-microsoft-com:vml" xmlns:pvml="urn:schemas-microsoft-com:office:powerpoint" xmlns:com="http://schemas.openxmlformats.org/drawingml/2006/compatibility" xmlns:p14="http://schemas.microsoft.com/office/powerpoint/2010/main" xmlns:p15="http://schemas.microsoft.com/office/powerpoint/2012/main" xmlns:ahyp="http://schemas.microsoft.com/office/drawing/2018/hyperlinkcolor" matchingName="2.e Dual Card">
+<p:sldLayout xmlns:a="http://schemas.openxmlformats.org/drawingml/2006/main" xmlns:r="http://schemas.openxmlformats.org/officeDocument/2006/relationships" xmlns:p="http://schemas.openxmlformats.org/presentationml/2006/main" matchingName="2.e Dual Card">
   <p:cSld name="CUSTOM_11">
     <p:spTree>
       <p:nvGrpSpPr>
-        <p:cNvPr id="57" name="Shape 57"/>
+        <p:cNvPr id="1" name="Shape 57"/>
         <p:cNvGrpSpPr/>
         <p:nvPr/>
       </p:nvGrpSpPr>
@@ -6261,12 +6224,12 @@
           </a:ln>
         </p:spPr>
         <p:txBody>
-          <a:bodyPr anchorCtr="0" anchor="ctr" bIns="91425" lIns="91425" spcFirstLastPara="1" rIns="91425" wrap="square" tIns="91425">
+          <a:bodyPr spcFirstLastPara="1" wrap="square" lIns="91425" tIns="91425" rIns="91425" bIns="91425" anchor="ctr" anchorCtr="0">
             <a:noAutofit/>
           </a:bodyPr>
           <a:lstStyle/>
           <a:p>
-            <a:pPr indent="0" lvl="0" marL="0" rtl="0" algn="ctr">
+            <a:pPr marL="0" lvl="0" indent="0" algn="ctr" rtl="0">
               <a:spcBef>
                 <a:spcPts val="0"/>
               </a:spcBef>
@@ -6275,9 +6238,6 @@
               </a:spcAft>
               <a:buNone/>
             </a:pPr>
-            <a:r>
-              <a:t/>
-            </a:r>
             <a:endParaRPr>
               <a:latin typeface="Open Sans"/>
               <a:ea typeface="Open Sans"/>
@@ -6336,7 +6296,7 @@
             <a:noFill/>
           </a:ln>
           <a:effectLst>
-            <a:outerShdw blurRad="714375" rotWithShape="0" algn="bl" dir="5400000" dist="238125">
+            <a:outerShdw blurRad="714375" dist="238125" dir="5400000" algn="bl" rotWithShape="0">
               <a:srgbClr val="000000">
                 <a:alpha val="25000"/>
               </a:srgbClr>
@@ -6344,12 +6304,12 @@
           </a:effectLst>
         </p:spPr>
         <p:txBody>
-          <a:bodyPr anchorCtr="0" anchor="ctr" bIns="91450" lIns="91450" spcFirstLastPara="1" rIns="91450" wrap="square" tIns="91450">
+          <a:bodyPr spcFirstLastPara="1" wrap="square" lIns="91450" tIns="91450" rIns="91450" bIns="91450" anchor="ctr" anchorCtr="0">
             <a:noAutofit/>
           </a:bodyPr>
           <a:lstStyle/>
           <a:p>
-            <a:pPr indent="0" lvl="0" marL="0" rtl="0" algn="l">
+            <a:pPr marL="0" lvl="0" indent="0" algn="l" rtl="0">
               <a:spcBef>
                 <a:spcPts val="0"/>
               </a:spcBef>
@@ -6358,9 +6318,6 @@
               </a:spcAft>
               <a:buNone/>
             </a:pPr>
-            <a:r>
-              <a:t/>
-            </a:r>
             <a:endParaRPr/>
           </a:p>
         </p:txBody>
@@ -6378,7 +6335,7 @@
           </a:xfrm>
           <a:prstGeom prst="round1Rect">
             <a:avLst>
-              <a:gd fmla="val 22136" name="adj"/>
+              <a:gd name="adj" fmla="val 22136"/>
             </a:avLst>
           </a:prstGeom>
           <a:solidFill>
@@ -6389,12 +6346,12 @@
           </a:ln>
         </p:spPr>
         <p:txBody>
-          <a:bodyPr anchorCtr="0" anchor="ctr" bIns="91450" lIns="91450" spcFirstLastPara="1" rIns="91450" wrap="square" tIns="91450">
+          <a:bodyPr spcFirstLastPara="1" wrap="square" lIns="91450" tIns="91450" rIns="91450" bIns="91450" anchor="ctr" anchorCtr="0">
             <a:noAutofit/>
           </a:bodyPr>
           <a:lstStyle/>
           <a:p>
-            <a:pPr indent="0" lvl="0" marL="0" rtl="0" algn="l">
+            <a:pPr marL="0" lvl="0" indent="0" algn="l" rtl="0">
               <a:spcBef>
                 <a:spcPts val="0"/>
               </a:spcBef>
@@ -6403,9 +6360,6 @@
               </a:spcAft>
               <a:buNone/>
             </a:pPr>
-            <a:r>
-              <a:t/>
-            </a:r>
             <a:endParaRPr/>
           </a:p>
         </p:txBody>
@@ -6417,13 +6371,13 @@
           <p:nvPr/>
         </p:nvSpPr>
         <p:spPr>
-          <a:xfrm flipH="1" rot="-5400000">
+          <a:xfrm rot="-5400000" flipH="1">
             <a:off x="846450" y="495600"/>
             <a:ext cx="7786200" cy="8137800"/>
           </a:xfrm>
           <a:prstGeom prst="round1Rect">
             <a:avLst>
-              <a:gd fmla="val 22136" name="adj"/>
+              <a:gd name="adj" fmla="val 22136"/>
             </a:avLst>
           </a:prstGeom>
           <a:solidFill>
@@ -6434,12 +6388,12 @@
           </a:ln>
         </p:spPr>
         <p:txBody>
-          <a:bodyPr anchorCtr="0" anchor="ctr" bIns="91450" lIns="91450" spcFirstLastPara="1" rIns="91450" wrap="square" tIns="91450">
+          <a:bodyPr spcFirstLastPara="1" wrap="square" lIns="91450" tIns="91450" rIns="91450" bIns="91450" anchor="ctr" anchorCtr="0">
             <a:noAutofit/>
           </a:bodyPr>
           <a:lstStyle/>
           <a:p>
-            <a:pPr indent="0" lvl="0" marL="0" rtl="0" algn="l">
+            <a:pPr marL="0" lvl="0" indent="0" algn="l" rtl="0">
               <a:spcBef>
                 <a:spcPts val="0"/>
               </a:spcBef>
@@ -6448,9 +6402,6 @@
               </a:spcAft>
               <a:buNone/>
             </a:pPr>
-            <a:r>
-              <a:t/>
-            </a:r>
             <a:endParaRPr/>
           </a:p>
         </p:txBody>
@@ -6458,9 +6409,11 @@
       <p:sp>
         <p:nvSpPr>
           <p:cNvPr id="64" name="Google Shape;64;p8"/>
-          <p:cNvSpPr txBox="1"/>
+          <p:cNvSpPr txBox="1">
+            <a:spLocks noGrp="1"/>
+          </p:cNvSpPr>
           <p:nvPr>
-            <p:ph idx="1" type="body"/>
+            <p:ph type="body" idx="1"/>
           </p:nvPr>
         </p:nvSpPr>
         <p:spPr>
@@ -6473,11 +6426,11 @@
           </a:prstGeom>
         </p:spPr>
         <p:txBody>
-          <a:bodyPr anchorCtr="0" anchor="t" bIns="0" lIns="0" spcFirstLastPara="1" rIns="0" wrap="square" tIns="0">
+          <a:bodyPr spcFirstLastPara="1" wrap="square" lIns="0" tIns="0" rIns="0" bIns="0" anchor="t" anchorCtr="0">
             <a:noAutofit/>
           </a:bodyPr>
           <a:lstStyle>
-            <a:lvl1pPr indent="-457200" lvl="0" marL="457200" rtl="0">
+            <a:lvl1pPr marL="457200" lvl="0" indent="-457200" rtl="0">
               <a:spcBef>
                 <a:spcPts val="0"/>
               </a:spcBef>
@@ -6495,7 +6448,7 @@
                 </a:solidFill>
               </a:defRPr>
             </a:lvl1pPr>
-            <a:lvl2pPr indent="-419100" lvl="1" marL="914400" rtl="0">
+            <a:lvl2pPr marL="914400" lvl="1" indent="-419100" rtl="0">
               <a:spcBef>
                 <a:spcPts val="2000"/>
               </a:spcBef>
@@ -6513,7 +6466,7 @@
                 </a:solidFill>
               </a:defRPr>
             </a:lvl2pPr>
-            <a:lvl3pPr indent="-381000" lvl="2" marL="1371600" rtl="0">
+            <a:lvl3pPr marL="1371600" lvl="2" indent="-381000" rtl="0">
               <a:spcBef>
                 <a:spcPts val="2000"/>
               </a:spcBef>
@@ -6531,7 +6484,7 @@
                 </a:solidFill>
               </a:defRPr>
             </a:lvl3pPr>
-            <a:lvl4pPr indent="-381000" lvl="3" marL="1828800" rtl="0">
+            <a:lvl4pPr marL="1828800" lvl="3" indent="-381000" rtl="0">
               <a:spcBef>
                 <a:spcPts val="2000"/>
               </a:spcBef>
@@ -6549,7 +6502,7 @@
                 </a:solidFill>
               </a:defRPr>
             </a:lvl4pPr>
-            <a:lvl5pPr indent="-381000" lvl="4" marL="2286000" rtl="0">
+            <a:lvl5pPr marL="2286000" lvl="4" indent="-381000" rtl="0">
               <a:spcBef>
                 <a:spcPts val="2000"/>
               </a:spcBef>
@@ -6567,7 +6520,7 @@
                 </a:solidFill>
               </a:defRPr>
             </a:lvl5pPr>
-            <a:lvl6pPr indent="-381000" lvl="5" marL="2743200" rtl="0">
+            <a:lvl6pPr marL="2743200" lvl="5" indent="-381000" rtl="0">
               <a:spcBef>
                 <a:spcPts val="2000"/>
               </a:spcBef>
@@ -6585,7 +6538,7 @@
                 </a:solidFill>
               </a:defRPr>
             </a:lvl6pPr>
-            <a:lvl7pPr indent="-381000" lvl="6" marL="3200400" rtl="0">
+            <a:lvl7pPr marL="3200400" lvl="6" indent="-381000" rtl="0">
               <a:spcBef>
                 <a:spcPts val="2000"/>
               </a:spcBef>
@@ -6603,7 +6556,7 @@
                 </a:solidFill>
               </a:defRPr>
             </a:lvl7pPr>
-            <a:lvl8pPr indent="-381000" lvl="7" marL="3657600" rtl="0">
+            <a:lvl8pPr marL="3657600" lvl="7" indent="-381000" rtl="0">
               <a:spcBef>
                 <a:spcPts val="2000"/>
               </a:spcBef>
@@ -6621,7 +6574,7 @@
                 </a:solidFill>
               </a:defRPr>
             </a:lvl8pPr>
-            <a:lvl9pPr indent="-381000" lvl="8" marL="4114800" rtl="0">
+            <a:lvl9pPr marL="4114800" lvl="8" indent="-381000" rtl="0">
               <a:spcBef>
                 <a:spcPts val="2000"/>
               </a:spcBef>
@@ -6640,15 +6593,19 @@
               </a:defRPr>
             </a:lvl9pPr>
           </a:lstStyle>
-          <a:p/>
+          <a:p>
+            <a:endParaRPr/>
+          </a:p>
         </p:txBody>
       </p:sp>
       <p:sp>
         <p:nvSpPr>
           <p:cNvPr id="65" name="Google Shape;65;p8"/>
-          <p:cNvSpPr txBox="1"/>
+          <p:cNvSpPr txBox="1">
+            <a:spLocks noGrp="1"/>
+          </p:cNvSpPr>
           <p:nvPr>
-            <p:ph idx="2" type="subTitle"/>
+            <p:ph type="subTitle" idx="2"/>
           </p:nvPr>
         </p:nvSpPr>
         <p:spPr>
@@ -6661,7 +6618,7 @@
           </a:prstGeom>
         </p:spPr>
         <p:txBody>
-          <a:bodyPr anchorCtr="0" anchor="t" bIns="0" lIns="0" spcFirstLastPara="1" rIns="0" wrap="square" tIns="0">
+          <a:bodyPr spcFirstLastPara="1" wrap="square" lIns="0" tIns="0" rIns="0" bIns="0" anchor="t" anchorCtr="0">
             <a:noAutofit/>
           </a:bodyPr>
           <a:lstStyle>
@@ -6685,7 +6642,7 @@
               </a:spcAft>
               <a:buSzPts val="3600"/>
               <a:buNone/>
-              <a:defRPr b="1" sz="3600"/>
+              <a:defRPr sz="3600" b="1"/>
             </a:lvl2pPr>
             <a:lvl3pPr lvl="2" rtl="0">
               <a:spcBef>
@@ -6696,7 +6653,7 @@
               </a:spcAft>
               <a:buSzPts val="3600"/>
               <a:buNone/>
-              <a:defRPr b="1" sz="3600"/>
+              <a:defRPr sz="3600" b="1"/>
             </a:lvl3pPr>
             <a:lvl4pPr lvl="3" rtl="0">
               <a:spcBef>
@@ -6707,7 +6664,7 @@
               </a:spcAft>
               <a:buSzPts val="3600"/>
               <a:buNone/>
-              <a:defRPr b="1" sz="3600"/>
+              <a:defRPr sz="3600" b="1"/>
             </a:lvl4pPr>
             <a:lvl5pPr lvl="4" rtl="0">
               <a:spcBef>
@@ -6718,7 +6675,7 @@
               </a:spcAft>
               <a:buSzPts val="3600"/>
               <a:buNone/>
-              <a:defRPr b="1" sz="3600"/>
+              <a:defRPr sz="3600" b="1"/>
             </a:lvl5pPr>
             <a:lvl6pPr lvl="5" rtl="0">
               <a:spcBef>
@@ -6729,7 +6686,7 @@
               </a:spcAft>
               <a:buSzPts val="3600"/>
               <a:buNone/>
-              <a:defRPr b="1" sz="3600"/>
+              <a:defRPr sz="3600" b="1"/>
             </a:lvl6pPr>
             <a:lvl7pPr lvl="6" rtl="0">
               <a:spcBef>
@@ -6740,7 +6697,7 @@
               </a:spcAft>
               <a:buSzPts val="3600"/>
               <a:buNone/>
-              <a:defRPr b="1" sz="3600"/>
+              <a:defRPr sz="3600" b="1"/>
             </a:lvl7pPr>
             <a:lvl8pPr lvl="7" rtl="0">
               <a:spcBef>
@@ -6751,7 +6708,7 @@
               </a:spcAft>
               <a:buSzPts val="3600"/>
               <a:buNone/>
-              <a:defRPr b="1" sz="3600"/>
+              <a:defRPr sz="3600" b="1"/>
             </a:lvl8pPr>
             <a:lvl9pPr lvl="8" rtl="0">
               <a:spcBef>
@@ -6762,18 +6719,22 @@
               </a:spcAft>
               <a:buSzPts val="3600"/>
               <a:buNone/>
-              <a:defRPr b="1" sz="3600"/>
+              <a:defRPr sz="3600" b="1"/>
             </a:lvl9pPr>
           </a:lstStyle>
-          <a:p/>
+          <a:p>
+            <a:endParaRPr/>
+          </a:p>
         </p:txBody>
       </p:sp>
       <p:sp>
         <p:nvSpPr>
           <p:cNvPr id="66" name="Google Shape;66;p8"/>
-          <p:cNvSpPr txBox="1"/>
+          <p:cNvSpPr txBox="1">
+            <a:spLocks noGrp="1"/>
+          </p:cNvSpPr>
           <p:nvPr>
-            <p:ph idx="3" type="body"/>
+            <p:ph type="body" idx="3"/>
           </p:nvPr>
         </p:nvSpPr>
         <p:spPr>
@@ -6786,11 +6747,11 @@
           </a:prstGeom>
         </p:spPr>
         <p:txBody>
-          <a:bodyPr anchorCtr="0" anchor="t" bIns="0" lIns="0" spcFirstLastPara="1" rIns="0" wrap="square" tIns="0">
+          <a:bodyPr spcFirstLastPara="1" wrap="square" lIns="0" tIns="0" rIns="0" bIns="0" anchor="t" anchorCtr="0">
             <a:noAutofit/>
           </a:bodyPr>
           <a:lstStyle>
-            <a:lvl1pPr indent="-457200" lvl="0" marL="457200" rtl="0">
+            <a:lvl1pPr marL="457200" lvl="0" indent="-457200" rtl="0">
               <a:spcBef>
                 <a:spcPts val="0"/>
               </a:spcBef>
@@ -6808,7 +6769,7 @@
                 </a:solidFill>
               </a:defRPr>
             </a:lvl1pPr>
-            <a:lvl2pPr indent="-419100" lvl="1" marL="914400" rtl="0">
+            <a:lvl2pPr marL="914400" lvl="1" indent="-419100" rtl="0">
               <a:spcBef>
                 <a:spcPts val="2000"/>
               </a:spcBef>
@@ -6826,7 +6787,7 @@
                 </a:solidFill>
               </a:defRPr>
             </a:lvl2pPr>
-            <a:lvl3pPr indent="-381000" lvl="2" marL="1371600" rtl="0">
+            <a:lvl3pPr marL="1371600" lvl="2" indent="-381000" rtl="0">
               <a:spcBef>
                 <a:spcPts val="2000"/>
               </a:spcBef>
@@ -6844,7 +6805,7 @@
                 </a:solidFill>
               </a:defRPr>
             </a:lvl3pPr>
-            <a:lvl4pPr indent="-381000" lvl="3" marL="1828800" rtl="0">
+            <a:lvl4pPr marL="1828800" lvl="3" indent="-381000" rtl="0">
               <a:spcBef>
                 <a:spcPts val="2000"/>
               </a:spcBef>
@@ -6862,7 +6823,7 @@
                 </a:solidFill>
               </a:defRPr>
             </a:lvl4pPr>
-            <a:lvl5pPr indent="-381000" lvl="4" marL="2286000" rtl="0">
+            <a:lvl5pPr marL="2286000" lvl="4" indent="-381000" rtl="0">
               <a:spcBef>
                 <a:spcPts val="2000"/>
               </a:spcBef>
@@ -6880,7 +6841,7 @@
                 </a:solidFill>
               </a:defRPr>
             </a:lvl5pPr>
-            <a:lvl6pPr indent="-381000" lvl="5" marL="2743200" rtl="0">
+            <a:lvl6pPr marL="2743200" lvl="5" indent="-381000" rtl="0">
               <a:spcBef>
                 <a:spcPts val="2000"/>
               </a:spcBef>
@@ -6898,7 +6859,7 @@
                 </a:solidFill>
               </a:defRPr>
             </a:lvl6pPr>
-            <a:lvl7pPr indent="-381000" lvl="6" marL="3200400" rtl="0">
+            <a:lvl7pPr marL="3200400" lvl="6" indent="-381000" rtl="0">
               <a:spcBef>
                 <a:spcPts val="2000"/>
               </a:spcBef>
@@ -6916,7 +6877,7 @@
                 </a:solidFill>
               </a:defRPr>
             </a:lvl7pPr>
-            <a:lvl8pPr indent="-381000" lvl="7" marL="3657600" rtl="0">
+            <a:lvl8pPr marL="3657600" lvl="7" indent="-381000" rtl="0">
               <a:spcBef>
                 <a:spcPts val="2000"/>
               </a:spcBef>
@@ -6934,7 +6895,7 @@
                 </a:solidFill>
               </a:defRPr>
             </a:lvl8pPr>
-            <a:lvl9pPr indent="-381000" lvl="8" marL="4114800" rtl="0">
+            <a:lvl9pPr marL="4114800" lvl="8" indent="-381000" rtl="0">
               <a:spcBef>
                 <a:spcPts val="2000"/>
               </a:spcBef>
@@ -6953,15 +6914,19 @@
               </a:defRPr>
             </a:lvl9pPr>
           </a:lstStyle>
-          <a:p/>
+          <a:p>
+            <a:endParaRPr/>
+          </a:p>
         </p:txBody>
       </p:sp>
       <p:sp>
         <p:nvSpPr>
           <p:cNvPr id="67" name="Google Shape;67;p8"/>
-          <p:cNvSpPr txBox="1"/>
+          <p:cNvSpPr txBox="1">
+            <a:spLocks noGrp="1"/>
+          </p:cNvSpPr>
           <p:nvPr>
-            <p:ph idx="4" type="subTitle"/>
+            <p:ph type="subTitle" idx="4"/>
           </p:nvPr>
         </p:nvSpPr>
         <p:spPr>
@@ -6974,7 +6939,7 @@
           </a:prstGeom>
         </p:spPr>
         <p:txBody>
-          <a:bodyPr anchorCtr="0" anchor="t" bIns="0" lIns="0" spcFirstLastPara="1" rIns="0" wrap="square" tIns="0">
+          <a:bodyPr spcFirstLastPara="1" wrap="square" lIns="0" tIns="0" rIns="0" bIns="0" anchor="t" anchorCtr="0">
             <a:noAutofit/>
           </a:bodyPr>
           <a:lstStyle>
@@ -6998,7 +6963,7 @@
               </a:spcAft>
               <a:buSzPts val="3600"/>
               <a:buNone/>
-              <a:defRPr b="1" sz="3600"/>
+              <a:defRPr sz="3600" b="1"/>
             </a:lvl2pPr>
             <a:lvl3pPr lvl="2" rtl="0">
               <a:spcBef>
@@ -7009,7 +6974,7 @@
               </a:spcAft>
               <a:buSzPts val="3600"/>
               <a:buNone/>
-              <a:defRPr b="1" sz="3600"/>
+              <a:defRPr sz="3600" b="1"/>
             </a:lvl3pPr>
             <a:lvl4pPr lvl="3" rtl="0">
               <a:spcBef>
@@ -7020,7 +6985,7 @@
               </a:spcAft>
               <a:buSzPts val="3600"/>
               <a:buNone/>
-              <a:defRPr b="1" sz="3600"/>
+              <a:defRPr sz="3600" b="1"/>
             </a:lvl4pPr>
             <a:lvl5pPr lvl="4" rtl="0">
               <a:spcBef>
@@ -7031,7 +6996,7 @@
               </a:spcAft>
               <a:buSzPts val="3600"/>
               <a:buNone/>
-              <a:defRPr b="1" sz="3600"/>
+              <a:defRPr sz="3600" b="1"/>
             </a:lvl5pPr>
             <a:lvl6pPr lvl="5" rtl="0">
               <a:spcBef>
@@ -7042,7 +7007,7 @@
               </a:spcAft>
               <a:buSzPts val="3600"/>
               <a:buNone/>
-              <a:defRPr b="1" sz="3600"/>
+              <a:defRPr sz="3600" b="1"/>
             </a:lvl6pPr>
             <a:lvl7pPr lvl="6" rtl="0">
               <a:spcBef>
@@ -7053,7 +7018,7 @@
               </a:spcAft>
               <a:buSzPts val="3600"/>
               <a:buNone/>
-              <a:defRPr b="1" sz="3600"/>
+              <a:defRPr sz="3600" b="1"/>
             </a:lvl7pPr>
             <a:lvl8pPr lvl="7" rtl="0">
               <a:spcBef>
@@ -7064,7 +7029,7 @@
               </a:spcAft>
               <a:buSzPts val="3600"/>
               <a:buNone/>
-              <a:defRPr b="1" sz="3600"/>
+              <a:defRPr sz="3600" b="1"/>
             </a:lvl8pPr>
             <a:lvl9pPr lvl="8" rtl="0">
               <a:spcBef>
@@ -7075,10 +7040,12 @@
               </a:spcAft>
               <a:buSzPts val="3600"/>
               <a:buNone/>
-              <a:defRPr b="1" sz="3600"/>
+              <a:defRPr sz="3600" b="1"/>
             </a:lvl9pPr>
           </a:lstStyle>
-          <a:p/>
+          <a:p>
+            <a:endParaRPr/>
+          </a:p>
         </p:txBody>
       </p:sp>
     </p:spTree>
@@ -7088,7 +7055,7 @@
   </p:clrMapOvr>
   <p:extLst>
     <p:ext uri="{DCECCB84-F9BA-43D5-87BE-67443E8EF086}">
-      <p15:sldGuideLst>
+      <p15:sldGuideLst xmlns:p15="http://schemas.microsoft.com/office/powerpoint/2012/main">
         <p15:guide id="1" orient="horz" pos="2880">
           <p15:clr>
             <a:srgbClr val="FF0000"/>
@@ -7166,11 +7133,11 @@
 </file>
 
 <file path=ppt/slideLayouts/slideLayout8.xml><?xml version="1.0" encoding="utf-8"?>
-<p:sldLayout xmlns:a="http://schemas.openxmlformats.org/drawingml/2006/main" xmlns:r="http://schemas.openxmlformats.org/officeDocument/2006/relationships" xmlns:mc="http://schemas.openxmlformats.org/markup-compatibility/2006" xmlns:mv="urn:schemas-microsoft-com:mac:vml" xmlns:p="http://schemas.openxmlformats.org/presentationml/2006/main" xmlns:c="http://schemas.openxmlformats.org/drawingml/2006/chart" xmlns:dgm="http://schemas.openxmlformats.org/drawingml/2006/diagram" xmlns:o="urn:schemas-microsoft-com:office:office" xmlns:v="urn:schemas-microsoft-com:vml" xmlns:pvml="urn:schemas-microsoft-com:office:powerpoint" xmlns:com="http://schemas.openxmlformats.org/drawingml/2006/compatibility" xmlns:p14="http://schemas.microsoft.com/office/powerpoint/2010/main" xmlns:p15="http://schemas.microsoft.com/office/powerpoint/2012/main" xmlns:ahyp="http://schemas.microsoft.com/office/drawing/2018/hyperlinkcolor" matchingName="2.f Triple Card ">
+<p:sldLayout xmlns:a="http://schemas.openxmlformats.org/drawingml/2006/main" xmlns:r="http://schemas.openxmlformats.org/officeDocument/2006/relationships" xmlns:p="http://schemas.openxmlformats.org/presentationml/2006/main" matchingName="2.f Triple Card ">
   <p:cSld name="CUSTOM_11_1">
     <p:spTree>
       <p:nvGrpSpPr>
-        <p:cNvPr id="68" name="Shape 68"/>
+        <p:cNvPr id="1" name="Shape 68"/>
         <p:cNvGrpSpPr/>
         <p:nvPr/>
       </p:nvGrpSpPr>
@@ -7232,12 +7199,12 @@
           </a:ln>
         </p:spPr>
         <p:txBody>
-          <a:bodyPr anchorCtr="0" anchor="ctr" bIns="91425" lIns="91425" spcFirstLastPara="1" rIns="91425" wrap="square" tIns="91425">
+          <a:bodyPr spcFirstLastPara="1" wrap="square" lIns="91425" tIns="91425" rIns="91425" bIns="91425" anchor="ctr" anchorCtr="0">
             <a:noAutofit/>
           </a:bodyPr>
           <a:lstStyle/>
           <a:p>
-            <a:pPr indent="0" lvl="0" marL="0" rtl="0" algn="ctr">
+            <a:pPr marL="0" lvl="0" indent="0" algn="ctr" rtl="0">
               <a:spcBef>
                 <a:spcPts val="0"/>
               </a:spcBef>
@@ -7246,9 +7213,6 @@
               </a:spcAft>
               <a:buNone/>
             </a:pPr>
-            <a:r>
-              <a:t/>
-            </a:r>
             <a:endParaRPr>
               <a:latin typeface="Open Sans"/>
               <a:ea typeface="Open Sans"/>
@@ -7307,7 +7271,7 @@
             <a:noFill/>
           </a:ln>
           <a:effectLst>
-            <a:outerShdw blurRad="714375" rotWithShape="0" algn="bl" dir="5400000" dist="238125">
+            <a:outerShdw blurRad="714375" dist="238125" dir="5400000" algn="bl" rotWithShape="0">
               <a:srgbClr val="000000">
                 <a:alpha val="25000"/>
               </a:srgbClr>
@@ -7315,12 +7279,12 @@
           </a:effectLst>
         </p:spPr>
         <p:txBody>
-          <a:bodyPr anchorCtr="0" anchor="ctr" bIns="91450" lIns="91450" spcFirstLastPara="1" rIns="91450" wrap="square" tIns="91450">
+          <a:bodyPr spcFirstLastPara="1" wrap="square" lIns="91450" tIns="91450" rIns="91450" bIns="91450" anchor="ctr" anchorCtr="0">
             <a:noAutofit/>
           </a:bodyPr>
           <a:lstStyle/>
           <a:p>
-            <a:pPr indent="0" lvl="0" marL="0" rtl="0" algn="l">
+            <a:pPr marL="0" lvl="0" indent="0" algn="l" rtl="0">
               <a:spcBef>
                 <a:spcPts val="0"/>
               </a:spcBef>
@@ -7329,9 +7293,6 @@
               </a:spcAft>
               <a:buNone/>
             </a:pPr>
-            <a:r>
-              <a:t/>
-            </a:r>
             <a:endParaRPr/>
           </a:p>
         </p:txBody>
@@ -7349,7 +7310,7 @@
           </a:xfrm>
           <a:prstGeom prst="round1Rect">
             <a:avLst>
-              <a:gd fmla="val 22136" name="adj"/>
+              <a:gd name="adj" fmla="val 22136"/>
             </a:avLst>
           </a:prstGeom>
           <a:solidFill>
@@ -7360,12 +7321,12 @@
           </a:ln>
         </p:spPr>
         <p:txBody>
-          <a:bodyPr anchorCtr="0" anchor="ctr" bIns="91450" lIns="91450" spcFirstLastPara="1" rIns="91450" wrap="square" tIns="91450">
+          <a:bodyPr spcFirstLastPara="1" wrap="square" lIns="91450" tIns="91450" rIns="91450" bIns="91450" anchor="ctr" anchorCtr="0">
             <a:noAutofit/>
           </a:bodyPr>
           <a:lstStyle/>
           <a:p>
-            <a:pPr indent="0" lvl="0" marL="0" rtl="0" algn="l">
+            <a:pPr marL="0" lvl="0" indent="0" algn="l" rtl="0">
               <a:spcBef>
                 <a:spcPts val="0"/>
               </a:spcBef>
@@ -7374,9 +7335,6 @@
               </a:spcAft>
               <a:buNone/>
             </a:pPr>
-            <a:r>
-              <a:t/>
-            </a:r>
             <a:endParaRPr/>
           </a:p>
         </p:txBody>
@@ -7394,7 +7352,7 @@
           </a:xfrm>
           <a:prstGeom prst="round1Rect">
             <a:avLst>
-              <a:gd fmla="val 22136" name="adj"/>
+              <a:gd name="adj" fmla="val 22136"/>
             </a:avLst>
           </a:prstGeom>
           <a:solidFill>
@@ -7405,12 +7363,12 @@
           </a:ln>
         </p:spPr>
         <p:txBody>
-          <a:bodyPr anchorCtr="0" anchor="ctr" bIns="91450" lIns="91450" spcFirstLastPara="1" rIns="91450" wrap="square" tIns="91450">
+          <a:bodyPr spcFirstLastPara="1" wrap="square" lIns="91450" tIns="91450" rIns="91450" bIns="91450" anchor="ctr" anchorCtr="0">
             <a:noAutofit/>
           </a:bodyPr>
           <a:lstStyle/>
           <a:p>
-            <a:pPr indent="0" lvl="0" marL="0" rtl="0" algn="l">
+            <a:pPr marL="0" lvl="0" indent="0" algn="l" rtl="0">
               <a:spcBef>
                 <a:spcPts val="0"/>
               </a:spcBef>
@@ -7419,9 +7377,6 @@
               </a:spcAft>
               <a:buNone/>
             </a:pPr>
-            <a:r>
-              <a:t/>
-            </a:r>
             <a:endParaRPr/>
           </a:p>
         </p:txBody>
@@ -7439,7 +7394,7 @@
           </a:xfrm>
           <a:prstGeom prst="round1Rect">
             <a:avLst>
-              <a:gd fmla="val 22136" name="adj"/>
+              <a:gd name="adj" fmla="val 22136"/>
             </a:avLst>
           </a:prstGeom>
           <a:solidFill>
@@ -7450,12 +7405,12 @@
           </a:ln>
         </p:spPr>
         <p:txBody>
-          <a:bodyPr anchorCtr="0" anchor="ctr" bIns="91450" lIns="91450" spcFirstLastPara="1" rIns="91450" wrap="square" tIns="91450">
+          <a:bodyPr spcFirstLastPara="1" wrap="square" lIns="91450" tIns="91450" rIns="91450" bIns="91450" anchor="ctr" anchorCtr="0">
             <a:noAutofit/>
           </a:bodyPr>
           <a:lstStyle/>
           <a:p>
-            <a:pPr indent="0" lvl="0" marL="0" rtl="0" algn="l">
+            <a:pPr marL="0" lvl="0" indent="0" algn="l" rtl="0">
               <a:spcBef>
                 <a:spcPts val="0"/>
               </a:spcBef>
@@ -7464,9 +7419,6 @@
               </a:spcAft>
               <a:buNone/>
             </a:pPr>
-            <a:r>
-              <a:t/>
-            </a:r>
             <a:endParaRPr/>
           </a:p>
         </p:txBody>
@@ -7474,9 +7426,11 @@
       <p:sp>
         <p:nvSpPr>
           <p:cNvPr id="76" name="Google Shape;76;p9"/>
-          <p:cNvSpPr txBox="1"/>
+          <p:cNvSpPr txBox="1">
+            <a:spLocks noGrp="1"/>
+          </p:cNvSpPr>
           <p:nvPr>
-            <p:ph idx="1" type="body"/>
+            <p:ph type="body" idx="1"/>
           </p:nvPr>
         </p:nvSpPr>
         <p:spPr>
@@ -7489,11 +7443,11 @@
           </a:prstGeom>
         </p:spPr>
         <p:txBody>
-          <a:bodyPr anchorCtr="0" anchor="t" bIns="0" lIns="0" spcFirstLastPara="1" rIns="0" wrap="square" tIns="0">
+          <a:bodyPr spcFirstLastPara="1" wrap="square" lIns="0" tIns="0" rIns="0" bIns="0" anchor="t" anchorCtr="0">
             <a:noAutofit/>
           </a:bodyPr>
           <a:lstStyle>
-            <a:lvl1pPr indent="-457200" lvl="0" marL="457200" rtl="0">
+            <a:lvl1pPr marL="457200" lvl="0" indent="-457200" rtl="0">
               <a:spcBef>
                 <a:spcPts val="0"/>
               </a:spcBef>
@@ -7511,7 +7465,7 @@
                 </a:solidFill>
               </a:defRPr>
             </a:lvl1pPr>
-            <a:lvl2pPr indent="-419100" lvl="1" marL="914400" rtl="0">
+            <a:lvl2pPr marL="914400" lvl="1" indent="-419100" rtl="0">
               <a:spcBef>
                 <a:spcPts val="2000"/>
               </a:spcBef>
@@ -7529,7 +7483,7 @@
                 </a:solidFill>
               </a:defRPr>
             </a:lvl2pPr>
-            <a:lvl3pPr indent="-381000" lvl="2" marL="1371600" rtl="0">
+            <a:lvl3pPr marL="1371600" lvl="2" indent="-381000" rtl="0">
               <a:spcBef>
                 <a:spcPts val="2000"/>
               </a:spcBef>
@@ -7547,7 +7501,7 @@
                 </a:solidFill>
               </a:defRPr>
             </a:lvl3pPr>
-            <a:lvl4pPr indent="-381000" lvl="3" marL="1828800" rtl="0">
+            <a:lvl4pPr marL="1828800" lvl="3" indent="-381000" rtl="0">
               <a:spcBef>
                 <a:spcPts val="2000"/>
               </a:spcBef>
@@ -7565,7 +7519,7 @@
                 </a:solidFill>
               </a:defRPr>
             </a:lvl4pPr>
-            <a:lvl5pPr indent="-381000" lvl="4" marL="2286000" rtl="0">
+            <a:lvl5pPr marL="2286000" lvl="4" indent="-381000" rtl="0">
               <a:spcBef>
                 <a:spcPts val="2000"/>
               </a:spcBef>
@@ -7583,7 +7537,7 @@
                 </a:solidFill>
               </a:defRPr>
             </a:lvl5pPr>
-            <a:lvl6pPr indent="-381000" lvl="5" marL="2743200" rtl="0">
+            <a:lvl6pPr marL="2743200" lvl="5" indent="-381000" rtl="0">
               <a:spcBef>
                 <a:spcPts val="2000"/>
               </a:spcBef>
@@ -7601,7 +7555,7 @@
                 </a:solidFill>
               </a:defRPr>
             </a:lvl6pPr>
-            <a:lvl7pPr indent="-381000" lvl="6" marL="3200400" rtl="0">
+            <a:lvl7pPr marL="3200400" lvl="6" indent="-381000" rtl="0">
               <a:spcBef>
                 <a:spcPts val="2000"/>
               </a:spcBef>
@@ -7619,7 +7573,7 @@
                 </a:solidFill>
               </a:defRPr>
             </a:lvl7pPr>
-            <a:lvl8pPr indent="-381000" lvl="7" marL="3657600" rtl="0">
+            <a:lvl8pPr marL="3657600" lvl="7" indent="-381000" rtl="0">
               <a:spcBef>
                 <a:spcPts val="2000"/>
               </a:spcBef>
@@ -7637,7 +7591,7 @@
                 </a:solidFill>
               </a:defRPr>
             </a:lvl8pPr>
-            <a:lvl9pPr indent="-381000" lvl="8" marL="4114800" rtl="0">
+            <a:lvl9pPr marL="4114800" lvl="8" indent="-381000" rtl="0">
               <a:spcBef>
                 <a:spcPts val="2000"/>
               </a:spcBef>
@@ -7656,15 +7610,19 @@
               </a:defRPr>
             </a:lvl9pPr>
           </a:lstStyle>
-          <a:p/>
+          <a:p>
+            <a:endParaRPr/>
+          </a:p>
         </p:txBody>
       </p:sp>
       <p:sp>
         <p:nvSpPr>
           <p:cNvPr id="77" name="Google Shape;77;p9"/>
-          <p:cNvSpPr txBox="1"/>
+          <p:cNvSpPr txBox="1">
+            <a:spLocks noGrp="1"/>
+          </p:cNvSpPr>
           <p:nvPr>
-            <p:ph idx="2" type="subTitle"/>
+            <p:ph type="subTitle" idx="2"/>
           </p:nvPr>
         </p:nvSpPr>
         <p:spPr>
@@ -7677,7 +7635,7 @@
           </a:prstGeom>
         </p:spPr>
         <p:txBody>
-          <a:bodyPr anchorCtr="0" anchor="t" bIns="0" lIns="0" spcFirstLastPara="1" rIns="0" wrap="square" tIns="0">
+          <a:bodyPr spcFirstLastPara="1" wrap="square" lIns="0" tIns="0" rIns="0" bIns="0" anchor="t" anchorCtr="0">
             <a:noAutofit/>
           </a:bodyPr>
           <a:lstStyle>
@@ -7690,7 +7648,7 @@
               </a:spcAft>
               <a:buSzPts val="2600"/>
               <a:buNone/>
-              <a:defRPr b="1" sz="2600"/>
+              <a:defRPr sz="2600" b="1"/>
             </a:lvl1pPr>
             <a:lvl2pPr lvl="1" rtl="0">
               <a:spcBef>
@@ -7701,7 +7659,7 @@
               </a:spcAft>
               <a:buSzPts val="2600"/>
               <a:buNone/>
-              <a:defRPr b="1" sz="2600"/>
+              <a:defRPr sz="2600" b="1"/>
             </a:lvl2pPr>
             <a:lvl3pPr lvl="2" rtl="0">
               <a:spcBef>
@@ -7712,7 +7670,7 @@
               </a:spcAft>
               <a:buSzPts val="2600"/>
               <a:buNone/>
-              <a:defRPr b="1" sz="2600"/>
+              <a:defRPr sz="2600" b="1"/>
             </a:lvl3pPr>
             <a:lvl4pPr lvl="3" rtl="0">
               <a:spcBef>
@@ -7723,7 +7681,7 @@
               </a:spcAft>
               <a:buSzPts val="2600"/>
               <a:buNone/>
-              <a:defRPr b="1" sz="2600"/>
+              <a:defRPr sz="2600" b="1"/>
             </a:lvl4pPr>
             <a:lvl5pPr lvl="4" rtl="0">
               <a:spcBef>
@@ -7734,7 +7692,7 @@
               </a:spcAft>
               <a:buSzPts val="2600"/>
               <a:buNone/>
-              <a:defRPr b="1" sz="2600"/>
+              <a:defRPr sz="2600" b="1"/>
             </a:lvl5pPr>
             <a:lvl6pPr lvl="5" rtl="0">
               <a:spcBef>
@@ -7745,7 +7703,7 @@
               </a:spcAft>
               <a:buSzPts val="2600"/>
               <a:buNone/>
-              <a:defRPr b="1" sz="2600"/>
+              <a:defRPr sz="2600" b="1"/>
             </a:lvl6pPr>
             <a:lvl7pPr lvl="6" rtl="0">
               <a:spcBef>
@@ -7756,7 +7714,7 @@
               </a:spcAft>
               <a:buSzPts val="2600"/>
               <a:buNone/>
-              <a:defRPr b="1" sz="2600"/>
+              <a:defRPr sz="2600" b="1"/>
             </a:lvl7pPr>
             <a:lvl8pPr lvl="7" rtl="0">
               <a:spcBef>
@@ -7767,7 +7725,7 @@
               </a:spcAft>
               <a:buSzPts val="2600"/>
               <a:buNone/>
-              <a:defRPr b="1" sz="2600"/>
+              <a:defRPr sz="2600" b="1"/>
             </a:lvl8pPr>
             <a:lvl9pPr lvl="8" rtl="0">
               <a:spcBef>
@@ -7778,18 +7736,22 @@
               </a:spcAft>
               <a:buSzPts val="2600"/>
               <a:buNone/>
-              <a:defRPr b="1" sz="2600"/>
+              <a:defRPr sz="2600" b="1"/>
             </a:lvl9pPr>
           </a:lstStyle>
-          <a:p/>
+          <a:p>
+            <a:endParaRPr/>
+          </a:p>
         </p:txBody>
       </p:sp>
       <p:sp>
         <p:nvSpPr>
           <p:cNvPr id="78" name="Google Shape;78;p9"/>
-          <p:cNvSpPr txBox="1"/>
+          <p:cNvSpPr txBox="1">
+            <a:spLocks noGrp="1"/>
+          </p:cNvSpPr>
           <p:nvPr>
-            <p:ph idx="3" type="body"/>
+            <p:ph type="body" idx="3"/>
           </p:nvPr>
         </p:nvSpPr>
         <p:spPr>
@@ -7802,11 +7764,11 @@
           </a:prstGeom>
         </p:spPr>
         <p:txBody>
-          <a:bodyPr anchorCtr="0" anchor="t" bIns="0" lIns="0" spcFirstLastPara="1" rIns="0" wrap="square" tIns="0">
+          <a:bodyPr spcFirstLastPara="1" wrap="square" lIns="0" tIns="0" rIns="0" bIns="0" anchor="t" anchorCtr="0">
             <a:noAutofit/>
           </a:bodyPr>
           <a:lstStyle>
-            <a:lvl1pPr indent="-457200" lvl="0" marL="457200" rtl="0">
+            <a:lvl1pPr marL="457200" lvl="0" indent="-457200" rtl="0">
               <a:spcBef>
                 <a:spcPts val="0"/>
               </a:spcBef>
@@ -7824,7 +7786,7 @@
                 </a:solidFill>
               </a:defRPr>
             </a:lvl1pPr>
-            <a:lvl2pPr indent="-419100" lvl="1" marL="914400" rtl="0">
+            <a:lvl2pPr marL="914400" lvl="1" indent="-419100" rtl="0">
               <a:spcBef>
                 <a:spcPts val="2000"/>
               </a:spcBef>
@@ -7842,7 +7804,7 @@
                 </a:solidFill>
               </a:defRPr>
             </a:lvl2pPr>
-            <a:lvl3pPr indent="-381000" lvl="2" marL="1371600" rtl="0">
+            <a:lvl3pPr marL="1371600" lvl="2" indent="-381000" rtl="0">
               <a:spcBef>
                 <a:spcPts val="2000"/>
               </a:spcBef>
@@ -7860,7 +7822,7 @@
                 </a:solidFill>
               </a:defRPr>
             </a:lvl3pPr>
-            <a:lvl4pPr indent="-381000" lvl="3" marL="1828800" rtl="0">
+            <a:lvl4pPr marL="1828800" lvl="3" indent="-381000" rtl="0">
               <a:spcBef>
                 <a:spcPts val="2000"/>
               </a:spcBef>
@@ -7878,7 +7840,7 @@
                 </a:solidFill>
               </a:defRPr>
             </a:lvl4pPr>
-            <a:lvl5pPr indent="-381000" lvl="4" marL="2286000" rtl="0">
+            <a:lvl5pPr marL="2286000" lvl="4" indent="-381000" rtl="0">
               <a:spcBef>
                 <a:spcPts val="2000"/>
               </a:spcBef>
@@ -7896,7 +7858,7 @@
                 </a:solidFill>
               </a:defRPr>
             </a:lvl5pPr>
-            <a:lvl6pPr indent="-381000" lvl="5" marL="2743200" rtl="0">
+            <a:lvl6pPr marL="2743200" lvl="5" indent="-381000" rtl="0">
               <a:spcBef>
                 <a:spcPts val="2000"/>
               </a:spcBef>
@@ -7914,7 +7876,7 @@
                 </a:solidFill>
               </a:defRPr>
             </a:lvl6pPr>
-            <a:lvl7pPr indent="-381000" lvl="6" marL="3200400" rtl="0">
+            <a:lvl7pPr marL="3200400" lvl="6" indent="-381000" rtl="0">
               <a:spcBef>
                 <a:spcPts val="2000"/>
               </a:spcBef>
@@ -7932,7 +7894,7 @@
                 </a:solidFill>
               </a:defRPr>
             </a:lvl7pPr>
-            <a:lvl8pPr indent="-381000" lvl="7" marL="3657600" rtl="0">
+            <a:lvl8pPr marL="3657600" lvl="7" indent="-381000" rtl="0">
               <a:spcBef>
                 <a:spcPts val="2000"/>
               </a:spcBef>
@@ -7950,7 +7912,7 @@
                 </a:solidFill>
               </a:defRPr>
             </a:lvl8pPr>
-            <a:lvl9pPr indent="-381000" lvl="8" marL="4114800" rtl="0">
+            <a:lvl9pPr marL="4114800" lvl="8" indent="-381000" rtl="0">
               <a:spcBef>
                 <a:spcPts val="2000"/>
               </a:spcBef>
@@ -7969,15 +7931,19 @@
               </a:defRPr>
             </a:lvl9pPr>
           </a:lstStyle>
-          <a:p/>
+          <a:p>
+            <a:endParaRPr/>
+          </a:p>
         </p:txBody>
       </p:sp>
       <p:sp>
         <p:nvSpPr>
           <p:cNvPr id="79" name="Google Shape;79;p9"/>
-          <p:cNvSpPr txBox="1"/>
+          <p:cNvSpPr txBox="1">
+            <a:spLocks noGrp="1"/>
+          </p:cNvSpPr>
           <p:nvPr>
-            <p:ph idx="4" type="subTitle"/>
+            <p:ph type="subTitle" idx="4"/>
           </p:nvPr>
         </p:nvSpPr>
         <p:spPr>
@@ -7990,7 +7956,7 @@
           </a:prstGeom>
         </p:spPr>
         <p:txBody>
-          <a:bodyPr anchorCtr="0" anchor="t" bIns="0" lIns="0" spcFirstLastPara="1" rIns="0" wrap="square" tIns="0">
+          <a:bodyPr spcFirstLastPara="1" wrap="square" lIns="0" tIns="0" rIns="0" bIns="0" anchor="t" anchorCtr="0">
             <a:noAutofit/>
           </a:bodyPr>
           <a:lstStyle>
@@ -8003,7 +7969,7 @@
               </a:spcAft>
               <a:buSzPts val="2600"/>
               <a:buNone/>
-              <a:defRPr b="1" sz="2600"/>
+              <a:defRPr sz="2600" b="1"/>
             </a:lvl1pPr>
             <a:lvl2pPr lvl="1" rtl="0">
               <a:spcBef>
@@ -8014,7 +7980,7 @@
               </a:spcAft>
               <a:buSzPts val="2600"/>
               <a:buNone/>
-              <a:defRPr b="1" sz="2600"/>
+              <a:defRPr sz="2600" b="1"/>
             </a:lvl2pPr>
             <a:lvl3pPr lvl="2" rtl="0">
               <a:spcBef>
@@ -8025,7 +7991,7 @@
               </a:spcAft>
               <a:buSzPts val="2600"/>
               <a:buNone/>
-              <a:defRPr b="1" sz="2600"/>
+              <a:defRPr sz="2600" b="1"/>
             </a:lvl3pPr>
             <a:lvl4pPr lvl="3" rtl="0">
               <a:spcBef>
@@ -8036,7 +8002,7 @@
               </a:spcAft>
               <a:buSzPts val="2600"/>
               <a:buNone/>
-              <a:defRPr b="1" sz="2600"/>
+              <a:defRPr sz="2600" b="1"/>
             </a:lvl4pPr>
             <a:lvl5pPr lvl="4" rtl="0">
               <a:spcBef>
@@ -8047,7 +8013,7 @@
               </a:spcAft>
               <a:buSzPts val="2600"/>
               <a:buNone/>
-              <a:defRPr b="1" sz="2600"/>
+              <a:defRPr sz="2600" b="1"/>
             </a:lvl5pPr>
             <a:lvl6pPr lvl="5" rtl="0">
               <a:spcBef>
@@ -8058,7 +8024,7 @@
               </a:spcAft>
               <a:buSzPts val="2600"/>
               <a:buNone/>
-              <a:defRPr b="1" sz="2600"/>
+              <a:defRPr sz="2600" b="1"/>
             </a:lvl6pPr>
             <a:lvl7pPr lvl="6" rtl="0">
               <a:spcBef>
@@ -8069,7 +8035,7 @@
               </a:spcAft>
               <a:buSzPts val="2600"/>
               <a:buNone/>
-              <a:defRPr b="1" sz="2600"/>
+              <a:defRPr sz="2600" b="1"/>
             </a:lvl7pPr>
             <a:lvl8pPr lvl="7" rtl="0">
               <a:spcBef>
@@ -8080,7 +8046,7 @@
               </a:spcAft>
               <a:buSzPts val="2600"/>
               <a:buNone/>
-              <a:defRPr b="1" sz="2600"/>
+              <a:defRPr sz="2600" b="1"/>
             </a:lvl8pPr>
             <a:lvl9pPr lvl="8" rtl="0">
               <a:spcBef>
@@ -8091,18 +8057,22 @@
               </a:spcAft>
               <a:buSzPts val="2600"/>
               <a:buNone/>
-              <a:defRPr b="1" sz="2600"/>
+              <a:defRPr sz="2600" b="1"/>
             </a:lvl9pPr>
           </a:lstStyle>
-          <a:p/>
+          <a:p>
+            <a:endParaRPr/>
+          </a:p>
         </p:txBody>
       </p:sp>
       <p:sp>
         <p:nvSpPr>
           <p:cNvPr id="80" name="Google Shape;80;p9"/>
-          <p:cNvSpPr txBox="1"/>
+          <p:cNvSpPr txBox="1">
+            <a:spLocks noGrp="1"/>
+          </p:cNvSpPr>
           <p:nvPr>
-            <p:ph idx="5" type="body"/>
+            <p:ph type="body" idx="5"/>
           </p:nvPr>
         </p:nvSpPr>
         <p:spPr>
@@ -8115,11 +8085,11 @@
           </a:prstGeom>
         </p:spPr>
         <p:txBody>
-          <a:bodyPr anchorCtr="0" anchor="t" bIns="0" lIns="0" spcFirstLastPara="1" rIns="0" wrap="square" tIns="0">
+          <a:bodyPr spcFirstLastPara="1" wrap="square" lIns="0" tIns="0" rIns="0" bIns="0" anchor="t" anchorCtr="0">
             <a:noAutofit/>
           </a:bodyPr>
           <a:lstStyle>
-            <a:lvl1pPr indent="-457200" lvl="0" marL="457200" rtl="0">
+            <a:lvl1pPr marL="457200" lvl="0" indent="-457200" rtl="0">
               <a:spcBef>
                 <a:spcPts val="0"/>
               </a:spcBef>
@@ -8137,7 +8107,7 @@
                 </a:solidFill>
               </a:defRPr>
             </a:lvl1pPr>
-            <a:lvl2pPr indent="-419100" lvl="1" marL="914400" rtl="0">
+            <a:lvl2pPr marL="914400" lvl="1" indent="-419100" rtl="0">
               <a:spcBef>
                 <a:spcPts val="2000"/>
               </a:spcBef>
@@ -8155,7 +8125,7 @@
                 </a:solidFill>
               </a:defRPr>
             </a:lvl2pPr>
-            <a:lvl3pPr indent="-381000" lvl="2" marL="1371600" rtl="0">
+            <a:lvl3pPr marL="1371600" lvl="2" indent="-381000" rtl="0">
               <a:spcBef>
                 <a:spcPts val="2000"/>
               </a:spcBef>
@@ -8173,7 +8143,7 @@
                 </a:solidFill>
               </a:defRPr>
             </a:lvl3pPr>
-            <a:lvl4pPr indent="-381000" lvl="3" marL="1828800" rtl="0">
+            <a:lvl4pPr marL="1828800" lvl="3" indent="-381000" rtl="0">
               <a:spcBef>
                 <a:spcPts val="2000"/>
               </a:spcBef>
@@ -8191,7 +8161,7 @@
                 </a:solidFill>
               </a:defRPr>
             </a:lvl4pPr>
-            <a:lvl5pPr indent="-381000" lvl="4" marL="2286000" rtl="0">
+            <a:lvl5pPr marL="2286000" lvl="4" indent="-381000" rtl="0">
               <a:spcBef>
                 <a:spcPts val="2000"/>
               </a:spcBef>
@@ -8209,7 +8179,7 @@
                 </a:solidFill>
               </a:defRPr>
             </a:lvl5pPr>
-            <a:lvl6pPr indent="-381000" lvl="5" marL="2743200" rtl="0">
+            <a:lvl6pPr marL="2743200" lvl="5" indent="-381000" rtl="0">
               <a:spcBef>
                 <a:spcPts val="2000"/>
               </a:spcBef>
@@ -8227,7 +8197,7 @@
                 </a:solidFill>
               </a:defRPr>
             </a:lvl6pPr>
-            <a:lvl7pPr indent="-381000" lvl="6" marL="3200400" rtl="0">
+            <a:lvl7pPr marL="3200400" lvl="6" indent="-381000" rtl="0">
               <a:spcBef>
                 <a:spcPts val="2000"/>
               </a:spcBef>
@@ -8245,7 +8215,7 @@
                 </a:solidFill>
               </a:defRPr>
             </a:lvl7pPr>
-            <a:lvl8pPr indent="-381000" lvl="7" marL="3657600" rtl="0">
+            <a:lvl8pPr marL="3657600" lvl="7" indent="-381000" rtl="0">
               <a:spcBef>
                 <a:spcPts val="2000"/>
               </a:spcBef>
@@ -8263,7 +8233,7 @@
                 </a:solidFill>
               </a:defRPr>
             </a:lvl8pPr>
-            <a:lvl9pPr indent="-381000" lvl="8" marL="4114800" rtl="0">
+            <a:lvl9pPr marL="4114800" lvl="8" indent="-381000" rtl="0">
               <a:spcBef>
                 <a:spcPts val="2000"/>
               </a:spcBef>
@@ -8282,15 +8252,19 @@
               </a:defRPr>
             </a:lvl9pPr>
           </a:lstStyle>
-          <a:p/>
+          <a:p>
+            <a:endParaRPr/>
+          </a:p>
         </p:txBody>
       </p:sp>
       <p:sp>
         <p:nvSpPr>
           <p:cNvPr id="81" name="Google Shape;81;p9"/>
-          <p:cNvSpPr txBox="1"/>
+          <p:cNvSpPr txBox="1">
+            <a:spLocks noGrp="1"/>
+          </p:cNvSpPr>
           <p:nvPr>
-            <p:ph idx="6" type="subTitle"/>
+            <p:ph type="subTitle" idx="6"/>
           </p:nvPr>
         </p:nvSpPr>
         <p:spPr>
@@ -8303,7 +8277,7 @@
           </a:prstGeom>
         </p:spPr>
         <p:txBody>
-          <a:bodyPr anchorCtr="0" anchor="t" bIns="0" lIns="0" spcFirstLastPara="1" rIns="0" wrap="square" tIns="0">
+          <a:bodyPr spcFirstLastPara="1" wrap="square" lIns="0" tIns="0" rIns="0" bIns="0" anchor="t" anchorCtr="0">
             <a:noAutofit/>
           </a:bodyPr>
           <a:lstStyle>
@@ -8316,7 +8290,7 @@
               </a:spcAft>
               <a:buSzPts val="2600"/>
               <a:buNone/>
-              <a:defRPr b="1" sz="2600"/>
+              <a:defRPr sz="2600" b="1"/>
             </a:lvl1pPr>
             <a:lvl2pPr lvl="1" rtl="0">
               <a:spcBef>
@@ -8327,7 +8301,7 @@
               </a:spcAft>
               <a:buSzPts val="2600"/>
               <a:buNone/>
-              <a:defRPr b="1" sz="2600"/>
+              <a:defRPr sz="2600" b="1"/>
             </a:lvl2pPr>
             <a:lvl3pPr lvl="2" rtl="0">
               <a:spcBef>
@@ -8338,7 +8312,7 @@
               </a:spcAft>
               <a:buSzPts val="2600"/>
               <a:buNone/>
-              <a:defRPr b="1" sz="2600"/>
+              <a:defRPr sz="2600" b="1"/>
             </a:lvl3pPr>
             <a:lvl4pPr lvl="3" rtl="0">
               <a:spcBef>
@@ -8349,7 +8323,7 @@
               </a:spcAft>
               <a:buSzPts val="2600"/>
               <a:buNone/>
-              <a:defRPr b="1" sz="2600"/>
+              <a:defRPr sz="2600" b="1"/>
             </a:lvl4pPr>
             <a:lvl5pPr lvl="4" rtl="0">
               <a:spcBef>
@@ -8360,7 +8334,7 @@
               </a:spcAft>
               <a:buSzPts val="2600"/>
               <a:buNone/>
-              <a:defRPr b="1" sz="2600"/>
+              <a:defRPr sz="2600" b="1"/>
             </a:lvl5pPr>
             <a:lvl6pPr lvl="5" rtl="0">
               <a:spcBef>
@@ -8371,7 +8345,7 @@
               </a:spcAft>
               <a:buSzPts val="2600"/>
               <a:buNone/>
-              <a:defRPr b="1" sz="2600"/>
+              <a:defRPr sz="2600" b="1"/>
             </a:lvl6pPr>
             <a:lvl7pPr lvl="6" rtl="0">
               <a:spcBef>
@@ -8382,7 +8356,7 @@
               </a:spcAft>
               <a:buSzPts val="2600"/>
               <a:buNone/>
-              <a:defRPr b="1" sz="2600"/>
+              <a:defRPr sz="2600" b="1"/>
             </a:lvl7pPr>
             <a:lvl8pPr lvl="7" rtl="0">
               <a:spcBef>
@@ -8393,7 +8367,7 @@
               </a:spcAft>
               <a:buSzPts val="2600"/>
               <a:buNone/>
-              <a:defRPr b="1" sz="2600"/>
+              <a:defRPr sz="2600" b="1"/>
             </a:lvl8pPr>
             <a:lvl9pPr lvl="8" rtl="0">
               <a:spcBef>
@@ -8404,16 +8378,20 @@
               </a:spcAft>
               <a:buSzPts val="2600"/>
               <a:buNone/>
-              <a:defRPr b="1" sz="2600"/>
+              <a:defRPr sz="2600" b="1"/>
             </a:lvl9pPr>
           </a:lstStyle>
-          <a:p/>
+          <a:p>
+            <a:endParaRPr/>
+          </a:p>
         </p:txBody>
       </p:sp>
       <p:sp>
         <p:nvSpPr>
           <p:cNvPr id="82" name="Google Shape;82;p9"/>
-          <p:cNvSpPr txBox="1"/>
+          <p:cNvSpPr txBox="1">
+            <a:spLocks noGrp="1"/>
+          </p:cNvSpPr>
           <p:nvPr>
             <p:ph type="title"/>
           </p:nvPr>
@@ -8428,7 +8406,7 @@
           </a:prstGeom>
         </p:spPr>
         <p:txBody>
-          <a:bodyPr anchorCtr="0" anchor="ctr" bIns="0" lIns="0" spcFirstLastPara="1" rIns="0" wrap="square" tIns="0">
+          <a:bodyPr spcFirstLastPara="1" wrap="square" lIns="0" tIns="0" rIns="0" bIns="0" anchor="ctr" anchorCtr="0">
             <a:noAutofit/>
           </a:bodyPr>
           <a:lstStyle>
@@ -8538,7 +8516,9 @@
               <a:defRPr/>
             </a:lvl9pPr>
           </a:lstStyle>
-          <a:p/>
+          <a:p>
+            <a:endParaRPr/>
+          </a:p>
         </p:txBody>
       </p:sp>
     </p:spTree>
@@ -8548,7 +8528,7 @@
   </p:clrMapOvr>
   <p:extLst>
     <p:ext uri="{DCECCB84-F9BA-43D5-87BE-67443E8EF086}">
-      <p15:sldGuideLst>
+      <p15:sldGuideLst xmlns:p15="http://schemas.microsoft.com/office/powerpoint/2012/main">
         <p15:guide id="1" orient="horz" pos="3355">
           <p15:clr>
             <a:srgbClr val="FF0000"/>
@@ -8626,11 +8606,11 @@
 </file>
 
 <file path=ppt/slideLayouts/slideLayout9.xml><?xml version="1.0" encoding="utf-8"?>
-<p:sldLayout xmlns:a="http://schemas.openxmlformats.org/drawingml/2006/main" xmlns:r="http://schemas.openxmlformats.org/officeDocument/2006/relationships" xmlns:mc="http://schemas.openxmlformats.org/markup-compatibility/2006" xmlns:mv="urn:schemas-microsoft-com:mac:vml" xmlns:p="http://schemas.openxmlformats.org/presentationml/2006/main" xmlns:c="http://schemas.openxmlformats.org/drawingml/2006/chart" xmlns:dgm="http://schemas.openxmlformats.org/drawingml/2006/diagram" xmlns:o="urn:schemas-microsoft-com:office:office" xmlns:v="urn:schemas-microsoft-com:vml" xmlns:pvml="urn:schemas-microsoft-com:office:powerpoint" xmlns:com="http://schemas.openxmlformats.org/drawingml/2006/compatibility" xmlns:p14="http://schemas.microsoft.com/office/powerpoint/2010/main" xmlns:p15="http://schemas.microsoft.com/office/powerpoint/2012/main" xmlns:ahyp="http://schemas.microsoft.com/office/drawing/2018/hyperlinkcolor" matchingName="3. Code">
+<p:sldLayout xmlns:a="http://schemas.openxmlformats.org/drawingml/2006/main" xmlns:r="http://schemas.openxmlformats.org/officeDocument/2006/relationships" xmlns:p="http://schemas.openxmlformats.org/presentationml/2006/main" matchingName="3. Code">
   <p:cSld name="TITLE_AND_BODY_1_1_1_1">
     <p:spTree>
       <p:nvGrpSpPr>
-        <p:cNvPr id="83" name="Shape 83"/>
+        <p:cNvPr id="1" name="Shape 83"/>
         <p:cNvGrpSpPr/>
         <p:nvPr/>
       </p:nvGrpSpPr>
@@ -8692,12 +8672,12 @@
           </a:ln>
         </p:spPr>
         <p:txBody>
-          <a:bodyPr anchorCtr="0" anchor="ctr" bIns="91425" lIns="91425" spcFirstLastPara="1" rIns="91425" wrap="square" tIns="91425">
+          <a:bodyPr spcFirstLastPara="1" wrap="square" lIns="91425" tIns="91425" rIns="91425" bIns="91425" anchor="ctr" anchorCtr="0">
             <a:noAutofit/>
           </a:bodyPr>
           <a:lstStyle/>
           <a:p>
-            <a:pPr indent="0" lvl="0" marL="0" rtl="0" algn="ctr">
+            <a:pPr marL="0" lvl="0" indent="0" algn="ctr" rtl="0">
               <a:spcBef>
                 <a:spcPts val="0"/>
               </a:spcBef>
@@ -8706,9 +8686,6 @@
               </a:spcAft>
               <a:buNone/>
             </a:pPr>
-            <a:r>
-              <a:t/>
-            </a:r>
             <a:endParaRPr>
               <a:latin typeface="Open Sans"/>
               <a:ea typeface="Open Sans"/>
@@ -8767,7 +8744,7 @@
             <a:noFill/>
           </a:ln>
           <a:effectLst>
-            <a:outerShdw blurRad="714375" rotWithShape="0" algn="bl" dir="5400000" dist="238125">
+            <a:outerShdw blurRad="714375" dist="238125" dir="5400000" algn="bl" rotWithShape="0">
               <a:srgbClr val="000000">
                 <a:alpha val="25000"/>
               </a:srgbClr>
@@ -8775,12 +8752,12 @@
           </a:effectLst>
         </p:spPr>
         <p:txBody>
-          <a:bodyPr anchorCtr="0" anchor="ctr" bIns="91450" lIns="91450" spcFirstLastPara="1" rIns="91450" wrap="square" tIns="91450">
+          <a:bodyPr spcFirstLastPara="1" wrap="square" lIns="91450" tIns="91450" rIns="91450" bIns="91450" anchor="ctr" anchorCtr="0">
             <a:noAutofit/>
           </a:bodyPr>
           <a:lstStyle/>
           <a:p>
-            <a:pPr indent="0" lvl="0" marL="0" rtl="0" algn="l">
+            <a:pPr marL="0" lvl="0" indent="0" algn="l" rtl="0">
               <a:spcBef>
                 <a:spcPts val="0"/>
               </a:spcBef>
@@ -8789,9 +8766,6 @@
               </a:spcAft>
               <a:buNone/>
             </a:pPr>
-            <a:r>
-              <a:t/>
-            </a:r>
             <a:endParaRPr/>
           </a:p>
         </p:txBody>
@@ -8816,12 +8790,12 @@
           </a:ln>
         </p:spPr>
         <p:txBody>
-          <a:bodyPr anchorCtr="0" anchor="t" bIns="0" lIns="0" spcFirstLastPara="1" rIns="0" wrap="square" tIns="0">
+          <a:bodyPr spcFirstLastPara="1" wrap="square" lIns="0" tIns="0" rIns="0" bIns="0" anchor="t" anchorCtr="0">
             <a:noAutofit/>
           </a:bodyPr>
           <a:lstStyle/>
           <a:p>
-            <a:pPr indent="0" lvl="0" marL="0" rtl="0" algn="l">
+            <a:pPr marL="0" lvl="0" indent="0" algn="l" rtl="0">
               <a:lnSpc>
                 <a:spcPct val="115000"/>
               </a:lnSpc>
@@ -8860,9 +8834,11 @@
       <p:sp>
         <p:nvSpPr>
           <p:cNvPr id="89" name="Google Shape;89;p10"/>
-          <p:cNvSpPr txBox="1"/>
+          <p:cNvSpPr txBox="1">
+            <a:spLocks noGrp="1"/>
+          </p:cNvSpPr>
           <p:nvPr>
-            <p:ph idx="1" type="body"/>
+            <p:ph type="body" idx="1"/>
           </p:nvPr>
         </p:nvSpPr>
         <p:spPr>
@@ -8875,11 +8851,11 @@
           </a:prstGeom>
         </p:spPr>
         <p:txBody>
-          <a:bodyPr anchorCtr="0" anchor="t" bIns="0" lIns="0" spcFirstLastPara="1" rIns="0" wrap="square" tIns="0">
+          <a:bodyPr spcFirstLastPara="1" wrap="square" lIns="0" tIns="0" rIns="0" bIns="0" anchor="t" anchorCtr="0">
             <a:noAutofit/>
           </a:bodyPr>
           <a:lstStyle>
-            <a:lvl1pPr indent="-419100" lvl="0" marL="457200" rtl="0">
+            <a:lvl1pPr marL="457200" lvl="0" indent="-419100" rtl="0">
               <a:spcBef>
                 <a:spcPts val="0"/>
               </a:spcBef>
@@ -8902,7 +8878,7 @@
                 <a:sym typeface="Roboto Mono Light"/>
               </a:defRPr>
             </a:lvl1pPr>
-            <a:lvl2pPr indent="-419100" lvl="1" marL="914400" rtl="0">
+            <a:lvl2pPr marL="914400" lvl="1" indent="-419100" rtl="0">
               <a:spcBef>
                 <a:spcPts val="2000"/>
               </a:spcBef>
@@ -8925,7 +8901,7 @@
                 <a:sym typeface="Roboto Mono Light"/>
               </a:defRPr>
             </a:lvl2pPr>
-            <a:lvl3pPr indent="-381000" lvl="2" marL="1371600" rtl="0">
+            <a:lvl3pPr marL="1371600" lvl="2" indent="-381000" rtl="0">
               <a:spcBef>
                 <a:spcPts val="2000"/>
               </a:spcBef>
@@ -8948,7 +8924,7 @@
                 <a:sym typeface="Roboto Mono Light"/>
               </a:defRPr>
             </a:lvl3pPr>
-            <a:lvl4pPr indent="-381000" lvl="3" marL="1828800" rtl="0">
+            <a:lvl4pPr marL="1828800" lvl="3" indent="-381000" rtl="0">
               <a:spcBef>
                 <a:spcPts val="2000"/>
               </a:spcBef>
@@ -8971,7 +8947,7 @@
                 <a:sym typeface="Roboto Mono Light"/>
               </a:defRPr>
             </a:lvl4pPr>
-            <a:lvl5pPr indent="-381000" lvl="4" marL="2286000" rtl="0">
+            <a:lvl5pPr marL="2286000" lvl="4" indent="-381000" rtl="0">
               <a:spcBef>
                 <a:spcPts val="2000"/>
               </a:spcBef>
@@ -8994,7 +8970,7 @@
                 <a:sym typeface="Roboto Mono Light"/>
               </a:defRPr>
             </a:lvl5pPr>
-            <a:lvl6pPr indent="-381000" lvl="5" marL="2743200" rtl="0">
+            <a:lvl6pPr marL="2743200" lvl="5" indent="-381000" rtl="0">
               <a:spcBef>
                 <a:spcPts val="2000"/>
               </a:spcBef>
@@ -9017,7 +8993,7 @@
                 <a:sym typeface="Roboto Mono Light"/>
               </a:defRPr>
             </a:lvl6pPr>
-            <a:lvl7pPr indent="-381000" lvl="6" marL="3200400" rtl="0">
+            <a:lvl7pPr marL="3200400" lvl="6" indent="-381000" rtl="0">
               <a:spcBef>
                 <a:spcPts val="2000"/>
               </a:spcBef>
@@ -9040,7 +9016,7 @@
                 <a:sym typeface="Roboto Mono Light"/>
               </a:defRPr>
             </a:lvl7pPr>
-            <a:lvl8pPr indent="-381000" lvl="7" marL="3657600" rtl="0">
+            <a:lvl8pPr marL="3657600" lvl="7" indent="-381000" rtl="0">
               <a:spcBef>
                 <a:spcPts val="2000"/>
               </a:spcBef>
@@ -9063,7 +9039,7 @@
                 <a:sym typeface="Roboto Mono Light"/>
               </a:defRPr>
             </a:lvl8pPr>
-            <a:lvl9pPr indent="-381000" lvl="8" marL="4114800" rtl="0">
+            <a:lvl9pPr marL="4114800" lvl="8" indent="-381000" rtl="0">
               <a:spcBef>
                 <a:spcPts val="2000"/>
               </a:spcBef>
@@ -9087,7 +9063,9 @@
               </a:defRPr>
             </a:lvl9pPr>
           </a:lstStyle>
-          <a:p/>
+          <a:p>
+            <a:endParaRPr/>
+          </a:p>
         </p:txBody>
       </p:sp>
     </p:spTree>
@@ -9097,7 +9075,7 @@
   </p:clrMapOvr>
   <p:extLst>
     <p:ext uri="{DCECCB84-F9BA-43D5-87BE-67443E8EF086}">
-      <p15:sldGuideLst>
+      <p15:sldGuideLst xmlns:p15="http://schemas.microsoft.com/office/powerpoint/2012/main">
         <p15:guide id="1" pos="432">
           <p15:clr>
             <a:schemeClr val="accent1"/>
@@ -9145,18 +9123,19 @@
 </file>
 
 <file path=ppt/slideMasters/slideMaster1.xml><?xml version="1.0" encoding="utf-8"?>
-<p:sldMaster xmlns:a="http://schemas.openxmlformats.org/drawingml/2006/main" xmlns:r="http://schemas.openxmlformats.org/officeDocument/2006/relationships" xmlns:mc="http://schemas.openxmlformats.org/markup-compatibility/2006" xmlns:mv="urn:schemas-microsoft-com:mac:vml" xmlns:p="http://schemas.openxmlformats.org/presentationml/2006/main" xmlns:c="http://schemas.openxmlformats.org/drawingml/2006/chart" xmlns:dgm="http://schemas.openxmlformats.org/drawingml/2006/diagram" xmlns:o="urn:schemas-microsoft-com:office:office" xmlns:v="urn:schemas-microsoft-com:vml" xmlns:pvml="urn:schemas-microsoft-com:office:powerpoint" xmlns:com="http://schemas.openxmlformats.org/drawingml/2006/compatibility" xmlns:p14="http://schemas.microsoft.com/office/powerpoint/2010/main" xmlns:p15="http://schemas.microsoft.com/office/powerpoint/2012/main" xmlns:ahyp="http://schemas.microsoft.com/office/drawing/2018/hyperlinkcolor">
+<p:sldMaster xmlns:a="http://schemas.openxmlformats.org/drawingml/2006/main" xmlns:r="http://schemas.openxmlformats.org/officeDocument/2006/relationships" xmlns:p="http://schemas.openxmlformats.org/presentationml/2006/main">
   <p:cSld name="simple-light-2">
     <p:bg>
       <p:bgPr>
         <a:solidFill>
           <a:schemeClr val="lt1"/>
         </a:solidFill>
+        <a:effectLst/>
       </p:bgPr>
     </p:bg>
     <p:spTree>
       <p:nvGrpSpPr>
-        <p:cNvPr id="5" name="Shape 5"/>
+        <p:cNvPr id="1" name="Shape 5"/>
         <p:cNvGrpSpPr/>
         <p:nvPr/>
       </p:nvGrpSpPr>
@@ -9171,7 +9150,9 @@
       <p:sp>
         <p:nvSpPr>
           <p:cNvPr id="6" name="Google Shape;6;p1"/>
-          <p:cNvSpPr txBox="1"/>
+          <p:cNvSpPr txBox="1">
+            <a:spLocks noGrp="1"/>
+          </p:cNvSpPr>
           <p:nvPr>
             <p:ph type="title"/>
           </p:nvPr>
@@ -9190,7 +9171,7 @@
           </a:ln>
         </p:spPr>
         <p:txBody>
-          <a:bodyPr anchorCtr="0" anchor="t" bIns="0" lIns="0" spcFirstLastPara="1" rIns="0" wrap="square" tIns="0">
+          <a:bodyPr spcFirstLastPara="1" wrap="square" lIns="0" tIns="0" rIns="0" bIns="0" anchor="t" anchorCtr="0">
             <a:noAutofit/>
           </a:bodyPr>
           <a:lstStyle>
@@ -9402,15 +9383,19 @@
               </a:defRPr>
             </a:lvl9pPr>
           </a:lstStyle>
-          <a:p/>
+          <a:p>
+            <a:endParaRPr/>
+          </a:p>
         </p:txBody>
       </p:sp>
       <p:sp>
         <p:nvSpPr>
           <p:cNvPr id="7" name="Google Shape;7;p1"/>
-          <p:cNvSpPr txBox="1"/>
+          <p:cNvSpPr txBox="1">
+            <a:spLocks noGrp="1"/>
+          </p:cNvSpPr>
           <p:nvPr>
-            <p:ph idx="1" type="body"/>
+            <p:ph type="body" idx="1"/>
           </p:nvPr>
         </p:nvSpPr>
         <p:spPr>
@@ -9427,11 +9412,11 @@
           </a:ln>
         </p:spPr>
         <p:txBody>
-          <a:bodyPr anchorCtr="0" anchor="t" bIns="0" lIns="0" spcFirstLastPara="1" rIns="0" wrap="square" tIns="0">
+          <a:bodyPr spcFirstLastPara="1" wrap="square" lIns="0" tIns="0" rIns="0" bIns="0" anchor="t" anchorCtr="0">
             <a:noAutofit/>
           </a:bodyPr>
           <a:lstStyle>
-            <a:lvl1pPr indent="-457200" lvl="0" marL="457200" rtl="0">
+            <a:lvl1pPr marL="457200" lvl="0" indent="-457200" rtl="0">
               <a:lnSpc>
                 <a:spcPct val="115000"/>
               </a:lnSpc>
@@ -9457,7 +9442,7 @@
                 <a:sym typeface="Open Sans"/>
               </a:defRPr>
             </a:lvl1pPr>
-            <a:lvl2pPr indent="-419100" lvl="1" marL="914400" rtl="0">
+            <a:lvl2pPr marL="914400" lvl="1" indent="-419100" rtl="0">
               <a:lnSpc>
                 <a:spcPct val="115000"/>
               </a:lnSpc>
@@ -9483,7 +9468,7 @@
                 <a:sym typeface="Open Sans"/>
               </a:defRPr>
             </a:lvl2pPr>
-            <a:lvl3pPr indent="-381000" lvl="2" marL="1371600" rtl="0">
+            <a:lvl3pPr marL="1371600" lvl="2" indent="-381000" rtl="0">
               <a:lnSpc>
                 <a:spcPct val="115000"/>
               </a:lnSpc>
@@ -9509,7 +9494,7 @@
                 <a:sym typeface="Open Sans"/>
               </a:defRPr>
             </a:lvl3pPr>
-            <a:lvl4pPr indent="-381000" lvl="3" marL="1828800" rtl="0">
+            <a:lvl4pPr marL="1828800" lvl="3" indent="-381000" rtl="0">
               <a:lnSpc>
                 <a:spcPct val="115000"/>
               </a:lnSpc>
@@ -9535,7 +9520,7 @@
                 <a:sym typeface="Open Sans"/>
               </a:defRPr>
             </a:lvl4pPr>
-            <a:lvl5pPr indent="-381000" lvl="4" marL="2286000" rtl="0">
+            <a:lvl5pPr marL="2286000" lvl="4" indent="-381000" rtl="0">
               <a:lnSpc>
                 <a:spcPct val="115000"/>
               </a:lnSpc>
@@ -9561,7 +9546,7 @@
                 <a:sym typeface="Open Sans"/>
               </a:defRPr>
             </a:lvl5pPr>
-            <a:lvl6pPr indent="-381000" lvl="5" marL="2743200" rtl="0">
+            <a:lvl6pPr marL="2743200" lvl="5" indent="-381000" rtl="0">
               <a:lnSpc>
                 <a:spcPct val="115000"/>
               </a:lnSpc>
@@ -9587,7 +9572,7 @@
                 <a:sym typeface="Open Sans"/>
               </a:defRPr>
             </a:lvl6pPr>
-            <a:lvl7pPr indent="-381000" lvl="6" marL="3200400" rtl="0">
+            <a:lvl7pPr marL="3200400" lvl="6" indent="-381000" rtl="0">
               <a:lnSpc>
                 <a:spcPct val="115000"/>
               </a:lnSpc>
@@ -9613,7 +9598,7 @@
                 <a:sym typeface="Open Sans"/>
               </a:defRPr>
             </a:lvl7pPr>
-            <a:lvl8pPr indent="-381000" lvl="7" marL="3657600" rtl="0">
+            <a:lvl8pPr marL="3657600" lvl="7" indent="-381000" rtl="0">
               <a:lnSpc>
                 <a:spcPct val="115000"/>
               </a:lnSpc>
@@ -9639,7 +9624,7 @@
                 <a:sym typeface="Open Sans"/>
               </a:defRPr>
             </a:lvl8pPr>
-            <a:lvl9pPr indent="-381000" lvl="8" marL="4114800" rtl="0">
+            <a:lvl9pPr marL="4114800" lvl="8" indent="-381000" rtl="0">
               <a:lnSpc>
                 <a:spcPct val="115000"/>
               </a:lnSpc>
@@ -9666,15 +9651,19 @@
               </a:defRPr>
             </a:lvl9pPr>
           </a:lstStyle>
-          <a:p/>
+          <a:p>
+            <a:endParaRPr/>
+          </a:p>
         </p:txBody>
       </p:sp>
       <p:sp>
         <p:nvSpPr>
           <p:cNvPr id="8" name="Google Shape;8;p1"/>
-          <p:cNvSpPr txBox="1"/>
+          <p:cNvSpPr txBox="1">
+            <a:spLocks noGrp="1"/>
+          </p:cNvSpPr>
           <p:nvPr>
-            <p:ph idx="12" type="sldNum"/>
+            <p:ph type="sldNum" idx="12"/>
           </p:nvPr>
         </p:nvSpPr>
         <p:spPr>
@@ -9691,11 +9680,11 @@
           </a:ln>
         </p:spPr>
         <p:txBody>
-          <a:bodyPr anchorCtr="0" anchor="ctr" bIns="182850" lIns="182850" spcFirstLastPara="1" rIns="182850" wrap="square" tIns="182850">
+          <a:bodyPr spcFirstLastPara="1" wrap="square" lIns="182850" tIns="182850" rIns="182850" bIns="182850" anchor="ctr" anchorCtr="0">
             <a:normAutofit/>
           </a:bodyPr>
           <a:lstStyle>
-            <a:lvl1pPr lvl="0" rtl="0" algn="r">
+            <a:lvl1pPr lvl="0" algn="r" rtl="0">
               <a:buNone/>
               <a:defRPr sz="2000">
                 <a:solidFill>
@@ -9703,7 +9692,7 @@
                 </a:solidFill>
               </a:defRPr>
             </a:lvl1pPr>
-            <a:lvl2pPr lvl="1" rtl="0" algn="r">
+            <a:lvl2pPr lvl="1" algn="r" rtl="0">
               <a:buNone/>
               <a:defRPr sz="2000">
                 <a:solidFill>
@@ -9711,7 +9700,7 @@
                 </a:solidFill>
               </a:defRPr>
             </a:lvl2pPr>
-            <a:lvl3pPr lvl="2" rtl="0" algn="r">
+            <a:lvl3pPr lvl="2" algn="r" rtl="0">
               <a:buNone/>
               <a:defRPr sz="2000">
                 <a:solidFill>
@@ -9719,7 +9708,7 @@
                 </a:solidFill>
               </a:defRPr>
             </a:lvl3pPr>
-            <a:lvl4pPr lvl="3" rtl="0" algn="r">
+            <a:lvl4pPr lvl="3" algn="r" rtl="0">
               <a:buNone/>
               <a:defRPr sz="2000">
                 <a:solidFill>
@@ -9727,7 +9716,7 @@
                 </a:solidFill>
               </a:defRPr>
             </a:lvl4pPr>
-            <a:lvl5pPr lvl="4" rtl="0" algn="r">
+            <a:lvl5pPr lvl="4" algn="r" rtl="0">
               <a:buNone/>
               <a:defRPr sz="2000">
                 <a:solidFill>
@@ -9735,7 +9724,7 @@
                 </a:solidFill>
               </a:defRPr>
             </a:lvl5pPr>
-            <a:lvl6pPr lvl="5" rtl="0" algn="r">
+            <a:lvl6pPr lvl="5" algn="r" rtl="0">
               <a:buNone/>
               <a:defRPr sz="2000">
                 <a:solidFill>
@@ -9743,7 +9732,7 @@
                 </a:solidFill>
               </a:defRPr>
             </a:lvl6pPr>
-            <a:lvl7pPr lvl="6" rtl="0" algn="r">
+            <a:lvl7pPr lvl="6" algn="r" rtl="0">
               <a:buNone/>
               <a:defRPr sz="2000">
                 <a:solidFill>
@@ -9751,7 +9740,7 @@
                 </a:solidFill>
               </a:defRPr>
             </a:lvl7pPr>
-            <a:lvl8pPr lvl="7" rtl="0" algn="r">
+            <a:lvl8pPr lvl="7" algn="r" rtl="0">
               <a:buNone/>
               <a:defRPr sz="2000">
                 <a:solidFill>
@@ -9759,7 +9748,7 @@
                 </a:solidFill>
               </a:defRPr>
             </a:lvl8pPr>
-            <a:lvl9pPr lvl="8" rtl="0" algn="r">
+            <a:lvl9pPr lvl="8" algn="r" rtl="0">
               <a:buNone/>
               <a:defRPr sz="2000">
                 <a:solidFill>
@@ -9769,7 +9758,7 @@
             </a:lvl9pPr>
           </a:lstStyle>
           <a:p>
-            <a:pPr indent="0" lvl="0" marL="0" rtl="0" algn="r">
+            <a:pPr marL="0" lvl="0" indent="0" algn="r" rtl="0">
               <a:spcBef>
                 <a:spcPts val="0"/>
               </a:spcBef>
@@ -9780,7 +9769,7 @@
             </a:pPr>
             <a:fld id="{00000000-1234-1234-1234-123412341234}" type="slidenum">
               <a:rPr lang="en"/>
-              <a:t>‹#›</a:t>
+              <a:t>‹nº›</a:t>
             </a:fld>
             <a:endParaRPr/>
           </a:p>
@@ -9788,7 +9777,7 @@
       </p:sp>
     </p:spTree>
   </p:cSld>
-  <p:clrMap accent1="accent1" accent2="accent2" accent3="accent3" accent4="accent4" accent5="accent5" accent6="accent6" bg1="lt1" bg2="dk2" tx1="dk1" tx2="lt2" folHlink="folHlink" hlink="hlink"/>
+  <p:clrMap bg1="lt1" tx1="dk1" bg2="dk2" tx2="lt2" accent1="accent1" accent2="accent2" accent3="accent3" accent4="accent4" accent5="accent5" accent6="accent6" hlink="hlink" folHlink="folHlink"/>
   <p:sldLayoutIdLst>
     <p:sldLayoutId id="2147483648" r:id="rId1"/>
     <p:sldLayoutId id="2147483649" r:id="rId2"/>
@@ -9802,10 +9791,10 @@
     <p:sldLayoutId id="2147483657" r:id="rId10"/>
     <p:sldLayoutId id="2147483658" r:id="rId11"/>
   </p:sldLayoutIdLst>
-  <p:hf dt="0" ftr="0" hdr="0" sldNum="0"/>
+  <p:hf sldNum="0" hdr="0" ftr="0" dt="0"/>
   <p:txStyles>
     <p:titleStyle>
-      <a:defPPr lvl="0" marR="0" rtl="0" algn="l">
+      <a:defPPr marR="0" lvl="0" algn="l" rtl="0">
         <a:lnSpc>
           <a:spcPct val="100000"/>
         </a:lnSpc>
@@ -9816,7 +9805,7 @@
           <a:spcPts val="0"/>
         </a:spcAft>
       </a:defPPr>
-      <a:lvl1pPr lvl="0" marR="0" rtl="0" algn="l">
+      <a:lvl1pPr marR="0" lvl="0" algn="l" rtl="0">
         <a:lnSpc>
           <a:spcPct val="100000"/>
         </a:lnSpc>
@@ -9830,7 +9819,7 @@
           <a:srgbClr val="000000"/>
         </a:buClr>
         <a:buFont typeface="Arial"/>
-        <a:defRPr b="0" i="0" sz="1400" u="none" cap="none" strike="noStrike">
+        <a:defRPr sz="1400" b="0" i="0" u="none" strike="noStrike" cap="none">
           <a:solidFill>
             <a:srgbClr val="000000"/>
           </a:solidFill>
@@ -9840,7 +9829,7 @@
           <a:sym typeface="Arial"/>
         </a:defRPr>
       </a:lvl1pPr>
-      <a:lvl2pPr lvl="1" marR="0" rtl="0" algn="l">
+      <a:lvl2pPr marR="0" lvl="1" algn="l" rtl="0">
         <a:lnSpc>
           <a:spcPct val="100000"/>
         </a:lnSpc>
@@ -9854,7 +9843,7 @@
           <a:srgbClr val="000000"/>
         </a:buClr>
         <a:buFont typeface="Arial"/>
-        <a:defRPr b="0" i="0" sz="1400" u="none" cap="none" strike="noStrike">
+        <a:defRPr sz="1400" b="0" i="0" u="none" strike="noStrike" cap="none">
           <a:solidFill>
             <a:srgbClr val="000000"/>
           </a:solidFill>
@@ -9864,7 +9853,7 @@
           <a:sym typeface="Arial"/>
         </a:defRPr>
       </a:lvl2pPr>
-      <a:lvl3pPr lvl="2" marR="0" rtl="0" algn="l">
+      <a:lvl3pPr marR="0" lvl="2" algn="l" rtl="0">
         <a:lnSpc>
           <a:spcPct val="100000"/>
         </a:lnSpc>
@@ -9878,7 +9867,7 @@
           <a:srgbClr val="000000"/>
         </a:buClr>
         <a:buFont typeface="Arial"/>
-        <a:defRPr b="0" i="0" sz="1400" u="none" cap="none" strike="noStrike">
+        <a:defRPr sz="1400" b="0" i="0" u="none" strike="noStrike" cap="none">
           <a:solidFill>
             <a:srgbClr val="000000"/>
           </a:solidFill>
@@ -9888,7 +9877,7 @@
           <a:sym typeface="Arial"/>
         </a:defRPr>
       </a:lvl3pPr>
-      <a:lvl4pPr lvl="3" marR="0" rtl="0" algn="l">
+      <a:lvl4pPr marR="0" lvl="3" algn="l" rtl="0">
         <a:lnSpc>
           <a:spcPct val="100000"/>
         </a:lnSpc>
@@ -9902,7 +9891,7 @@
           <a:srgbClr val="000000"/>
         </a:buClr>
         <a:buFont typeface="Arial"/>
-        <a:defRPr b="0" i="0" sz="1400" u="none" cap="none" strike="noStrike">
+        <a:defRPr sz="1400" b="0" i="0" u="none" strike="noStrike" cap="none">
           <a:solidFill>
             <a:srgbClr val="000000"/>
           </a:solidFill>
@@ -9912,7 +9901,7 @@
           <a:sym typeface="Arial"/>
         </a:defRPr>
       </a:lvl4pPr>
-      <a:lvl5pPr lvl="4" marR="0" rtl="0" algn="l">
+      <a:lvl5pPr marR="0" lvl="4" algn="l" rtl="0">
         <a:lnSpc>
           <a:spcPct val="100000"/>
         </a:lnSpc>
@@ -9926,7 +9915,7 @@
           <a:srgbClr val="000000"/>
         </a:buClr>
         <a:buFont typeface="Arial"/>
-        <a:defRPr b="0" i="0" sz="1400" u="none" cap="none" strike="noStrike">
+        <a:defRPr sz="1400" b="0" i="0" u="none" strike="noStrike" cap="none">
           <a:solidFill>
             <a:srgbClr val="000000"/>
           </a:solidFill>
@@ -9936,7 +9925,7 @@
           <a:sym typeface="Arial"/>
         </a:defRPr>
       </a:lvl5pPr>
-      <a:lvl6pPr lvl="5" marR="0" rtl="0" algn="l">
+      <a:lvl6pPr marR="0" lvl="5" algn="l" rtl="0">
         <a:lnSpc>
           <a:spcPct val="100000"/>
         </a:lnSpc>
@@ -9950,7 +9939,7 @@
           <a:srgbClr val="000000"/>
         </a:buClr>
         <a:buFont typeface="Arial"/>
-        <a:defRPr b="0" i="0" sz="1400" u="none" cap="none" strike="noStrike">
+        <a:defRPr sz="1400" b="0" i="0" u="none" strike="noStrike" cap="none">
           <a:solidFill>
             <a:srgbClr val="000000"/>
           </a:solidFill>
@@ -9960,7 +9949,7 @@
           <a:sym typeface="Arial"/>
         </a:defRPr>
       </a:lvl6pPr>
-      <a:lvl7pPr lvl="6" marR="0" rtl="0" algn="l">
+      <a:lvl7pPr marR="0" lvl="6" algn="l" rtl="0">
         <a:lnSpc>
           <a:spcPct val="100000"/>
         </a:lnSpc>
@@ -9974,7 +9963,7 @@
           <a:srgbClr val="000000"/>
         </a:buClr>
         <a:buFont typeface="Arial"/>
-        <a:defRPr b="0" i="0" sz="1400" u="none" cap="none" strike="noStrike">
+        <a:defRPr sz="1400" b="0" i="0" u="none" strike="noStrike" cap="none">
           <a:solidFill>
             <a:srgbClr val="000000"/>
           </a:solidFill>
@@ -9984,7 +9973,7 @@
           <a:sym typeface="Arial"/>
         </a:defRPr>
       </a:lvl7pPr>
-      <a:lvl8pPr lvl="7" marR="0" rtl="0" algn="l">
+      <a:lvl8pPr marR="0" lvl="7" algn="l" rtl="0">
         <a:lnSpc>
           <a:spcPct val="100000"/>
         </a:lnSpc>
@@ -9998,7 +9987,7 @@
           <a:srgbClr val="000000"/>
         </a:buClr>
         <a:buFont typeface="Arial"/>
-        <a:defRPr b="0" i="0" sz="1400" u="none" cap="none" strike="noStrike">
+        <a:defRPr sz="1400" b="0" i="0" u="none" strike="noStrike" cap="none">
           <a:solidFill>
             <a:srgbClr val="000000"/>
           </a:solidFill>
@@ -10008,7 +9997,7 @@
           <a:sym typeface="Arial"/>
         </a:defRPr>
       </a:lvl8pPr>
-      <a:lvl9pPr lvl="8" marR="0" rtl="0" algn="l">
+      <a:lvl9pPr marR="0" lvl="8" algn="l" rtl="0">
         <a:lnSpc>
           <a:spcPct val="100000"/>
         </a:lnSpc>
@@ -10022,7 +10011,7 @@
           <a:srgbClr val="000000"/>
         </a:buClr>
         <a:buFont typeface="Arial"/>
-        <a:defRPr b="0" i="0" sz="1400" u="none" cap="none" strike="noStrike">
+        <a:defRPr sz="1400" b="0" i="0" u="none" strike="noStrike" cap="none">
           <a:solidFill>
             <a:srgbClr val="000000"/>
           </a:solidFill>
@@ -10034,7 +10023,7 @@
       </a:lvl9pPr>
     </p:titleStyle>
     <p:bodyStyle>
-      <a:defPPr lvl="0" marR="0" rtl="0" algn="l">
+      <a:defPPr marR="0" lvl="0" algn="l" rtl="0">
         <a:lnSpc>
           <a:spcPct val="100000"/>
         </a:lnSpc>
@@ -10045,7 +10034,7 @@
           <a:spcPts val="0"/>
         </a:spcAft>
       </a:defPPr>
-      <a:lvl1pPr lvl="0" marR="0" rtl="0" algn="l">
+      <a:lvl1pPr marR="0" lvl="0" algn="l" rtl="0">
         <a:lnSpc>
           <a:spcPct val="100000"/>
         </a:lnSpc>
@@ -10059,7 +10048,7 @@
           <a:srgbClr val="000000"/>
         </a:buClr>
         <a:buFont typeface="Arial"/>
-        <a:defRPr b="0" i="0" sz="1400" u="none" cap="none" strike="noStrike">
+        <a:defRPr sz="1400" b="0" i="0" u="none" strike="noStrike" cap="none">
           <a:solidFill>
             <a:srgbClr val="000000"/>
           </a:solidFill>
@@ -10069,7 +10058,7 @@
           <a:sym typeface="Arial"/>
         </a:defRPr>
       </a:lvl1pPr>
-      <a:lvl2pPr lvl="1" marR="0" rtl="0" algn="l">
+      <a:lvl2pPr marR="0" lvl="1" algn="l" rtl="0">
         <a:lnSpc>
           <a:spcPct val="100000"/>
         </a:lnSpc>
@@ -10083,7 +10072,7 @@
           <a:srgbClr val="000000"/>
         </a:buClr>
         <a:buFont typeface="Arial"/>
-        <a:defRPr b="0" i="0" sz="1400" u="none" cap="none" strike="noStrike">
+        <a:defRPr sz="1400" b="0" i="0" u="none" strike="noStrike" cap="none">
           <a:solidFill>
             <a:srgbClr val="000000"/>
           </a:solidFill>
@@ -10093,7 +10082,7 @@
           <a:sym typeface="Arial"/>
         </a:defRPr>
       </a:lvl2pPr>
-      <a:lvl3pPr lvl="2" marR="0" rtl="0" algn="l">
+      <a:lvl3pPr marR="0" lvl="2" algn="l" rtl="0">
         <a:lnSpc>
           <a:spcPct val="100000"/>
         </a:lnSpc>
@@ -10107,7 +10096,7 @@
           <a:srgbClr val="000000"/>
         </a:buClr>
         <a:buFont typeface="Arial"/>
-        <a:defRPr b="0" i="0" sz="1400" u="none" cap="none" strike="noStrike">
+        <a:defRPr sz="1400" b="0" i="0" u="none" strike="noStrike" cap="none">
           <a:solidFill>
             <a:srgbClr val="000000"/>
           </a:solidFill>
@@ -10117,7 +10106,7 @@
           <a:sym typeface="Arial"/>
         </a:defRPr>
       </a:lvl3pPr>
-      <a:lvl4pPr lvl="3" marR="0" rtl="0" algn="l">
+      <a:lvl4pPr marR="0" lvl="3" algn="l" rtl="0">
         <a:lnSpc>
           <a:spcPct val="100000"/>
         </a:lnSpc>
@@ -10131,7 +10120,7 @@
           <a:srgbClr val="000000"/>
         </a:buClr>
         <a:buFont typeface="Arial"/>
-        <a:defRPr b="0" i="0" sz="1400" u="none" cap="none" strike="noStrike">
+        <a:defRPr sz="1400" b="0" i="0" u="none" strike="noStrike" cap="none">
           <a:solidFill>
             <a:srgbClr val="000000"/>
           </a:solidFill>
@@ -10141,7 +10130,7 @@
           <a:sym typeface="Arial"/>
         </a:defRPr>
       </a:lvl4pPr>
-      <a:lvl5pPr lvl="4" marR="0" rtl="0" algn="l">
+      <a:lvl5pPr marR="0" lvl="4" algn="l" rtl="0">
         <a:lnSpc>
           <a:spcPct val="100000"/>
         </a:lnSpc>
@@ -10155,7 +10144,7 @@
           <a:srgbClr val="000000"/>
         </a:buClr>
         <a:buFont typeface="Arial"/>
-        <a:defRPr b="0" i="0" sz="1400" u="none" cap="none" strike="noStrike">
+        <a:defRPr sz="1400" b="0" i="0" u="none" strike="noStrike" cap="none">
           <a:solidFill>
             <a:srgbClr val="000000"/>
           </a:solidFill>
@@ -10165,7 +10154,7 @@
           <a:sym typeface="Arial"/>
         </a:defRPr>
       </a:lvl5pPr>
-      <a:lvl6pPr lvl="5" marR="0" rtl="0" algn="l">
+      <a:lvl6pPr marR="0" lvl="5" algn="l" rtl="0">
         <a:lnSpc>
           <a:spcPct val="100000"/>
         </a:lnSpc>
@@ -10179,7 +10168,7 @@
           <a:srgbClr val="000000"/>
         </a:buClr>
         <a:buFont typeface="Arial"/>
-        <a:defRPr b="0" i="0" sz="1400" u="none" cap="none" strike="noStrike">
+        <a:defRPr sz="1400" b="0" i="0" u="none" strike="noStrike" cap="none">
           <a:solidFill>
             <a:srgbClr val="000000"/>
           </a:solidFill>
@@ -10189,7 +10178,7 @@
           <a:sym typeface="Arial"/>
         </a:defRPr>
       </a:lvl6pPr>
-      <a:lvl7pPr lvl="6" marR="0" rtl="0" algn="l">
+      <a:lvl7pPr marR="0" lvl="6" algn="l" rtl="0">
         <a:lnSpc>
           <a:spcPct val="100000"/>
         </a:lnSpc>
@@ -10203,7 +10192,7 @@
           <a:srgbClr val="000000"/>
         </a:buClr>
         <a:buFont typeface="Arial"/>
-        <a:defRPr b="0" i="0" sz="1400" u="none" cap="none" strike="noStrike">
+        <a:defRPr sz="1400" b="0" i="0" u="none" strike="noStrike" cap="none">
           <a:solidFill>
             <a:srgbClr val="000000"/>
           </a:solidFill>
@@ -10213,7 +10202,7 @@
           <a:sym typeface="Arial"/>
         </a:defRPr>
       </a:lvl7pPr>
-      <a:lvl8pPr lvl="7" marR="0" rtl="0" algn="l">
+      <a:lvl8pPr marR="0" lvl="7" algn="l" rtl="0">
         <a:lnSpc>
           <a:spcPct val="100000"/>
         </a:lnSpc>
@@ -10227,7 +10216,7 @@
           <a:srgbClr val="000000"/>
         </a:buClr>
         <a:buFont typeface="Arial"/>
-        <a:defRPr b="0" i="0" sz="1400" u="none" cap="none" strike="noStrike">
+        <a:defRPr sz="1400" b="0" i="0" u="none" strike="noStrike" cap="none">
           <a:solidFill>
             <a:srgbClr val="000000"/>
           </a:solidFill>
@@ -10237,7 +10226,7 @@
           <a:sym typeface="Arial"/>
         </a:defRPr>
       </a:lvl8pPr>
-      <a:lvl9pPr lvl="8" marR="0" rtl="0" algn="l">
+      <a:lvl9pPr marR="0" lvl="8" algn="l" rtl="0">
         <a:lnSpc>
           <a:spcPct val="100000"/>
         </a:lnSpc>
@@ -10251,7 +10240,7 @@
           <a:srgbClr val="000000"/>
         </a:buClr>
         <a:buFont typeface="Arial"/>
-        <a:defRPr b="0" i="0" sz="1400" u="none" cap="none" strike="noStrike">
+        <a:defRPr sz="1400" b="0" i="0" u="none" strike="noStrike" cap="none">
           <a:solidFill>
             <a:srgbClr val="000000"/>
           </a:solidFill>
@@ -10263,7 +10252,7 @@
       </a:lvl9pPr>
     </p:bodyStyle>
     <p:otherStyle>
-      <a:defPPr lvl="0" marR="0" rtl="0" algn="l">
+      <a:defPPr marR="0" lvl="0" algn="l" rtl="0">
         <a:lnSpc>
           <a:spcPct val="100000"/>
         </a:lnSpc>
@@ -10274,7 +10263,7 @@
           <a:spcPts val="0"/>
         </a:spcAft>
       </a:defPPr>
-      <a:lvl1pPr lvl="0" marR="0" rtl="0" algn="l">
+      <a:lvl1pPr marR="0" lvl="0" algn="l" rtl="0">
         <a:lnSpc>
           <a:spcPct val="100000"/>
         </a:lnSpc>
@@ -10288,7 +10277,7 @@
           <a:srgbClr val="000000"/>
         </a:buClr>
         <a:buFont typeface="Arial"/>
-        <a:defRPr b="0" i="0" sz="1400" u="none" cap="none" strike="noStrike">
+        <a:defRPr sz="1400" b="0" i="0" u="none" strike="noStrike" cap="none">
           <a:solidFill>
             <a:srgbClr val="000000"/>
           </a:solidFill>
@@ -10298,7 +10287,7 @@
           <a:sym typeface="Arial"/>
         </a:defRPr>
       </a:lvl1pPr>
-      <a:lvl2pPr lvl="1" marR="0" rtl="0" algn="l">
+      <a:lvl2pPr marR="0" lvl="1" algn="l" rtl="0">
         <a:lnSpc>
           <a:spcPct val="100000"/>
         </a:lnSpc>
@@ -10312,7 +10301,7 @@
           <a:srgbClr val="000000"/>
         </a:buClr>
         <a:buFont typeface="Arial"/>
-        <a:defRPr b="0" i="0" sz="1400" u="none" cap="none" strike="noStrike">
+        <a:defRPr sz="1400" b="0" i="0" u="none" strike="noStrike" cap="none">
           <a:solidFill>
             <a:srgbClr val="000000"/>
           </a:solidFill>
@@ -10322,7 +10311,7 @@
           <a:sym typeface="Arial"/>
         </a:defRPr>
       </a:lvl2pPr>
-      <a:lvl3pPr lvl="2" marR="0" rtl="0" algn="l">
+      <a:lvl3pPr marR="0" lvl="2" algn="l" rtl="0">
         <a:lnSpc>
           <a:spcPct val="100000"/>
         </a:lnSpc>
@@ -10336,7 +10325,7 @@
           <a:srgbClr val="000000"/>
         </a:buClr>
         <a:buFont typeface="Arial"/>
-        <a:defRPr b="0" i="0" sz="1400" u="none" cap="none" strike="noStrike">
+        <a:defRPr sz="1400" b="0" i="0" u="none" strike="noStrike" cap="none">
           <a:solidFill>
             <a:srgbClr val="000000"/>
           </a:solidFill>
@@ -10346,7 +10335,7 @@
           <a:sym typeface="Arial"/>
         </a:defRPr>
       </a:lvl3pPr>
-      <a:lvl4pPr lvl="3" marR="0" rtl="0" algn="l">
+      <a:lvl4pPr marR="0" lvl="3" algn="l" rtl="0">
         <a:lnSpc>
           <a:spcPct val="100000"/>
         </a:lnSpc>
@@ -10360,7 +10349,7 @@
           <a:srgbClr val="000000"/>
         </a:buClr>
         <a:buFont typeface="Arial"/>
-        <a:defRPr b="0" i="0" sz="1400" u="none" cap="none" strike="noStrike">
+        <a:defRPr sz="1400" b="0" i="0" u="none" strike="noStrike" cap="none">
           <a:solidFill>
             <a:srgbClr val="000000"/>
           </a:solidFill>
@@ -10370,7 +10359,7 @@
           <a:sym typeface="Arial"/>
         </a:defRPr>
       </a:lvl4pPr>
-      <a:lvl5pPr lvl="4" marR="0" rtl="0" algn="l">
+      <a:lvl5pPr marR="0" lvl="4" algn="l" rtl="0">
         <a:lnSpc>
           <a:spcPct val="100000"/>
         </a:lnSpc>
@@ -10384,7 +10373,7 @@
           <a:srgbClr val="000000"/>
         </a:buClr>
         <a:buFont typeface="Arial"/>
-        <a:defRPr b="0" i="0" sz="1400" u="none" cap="none" strike="noStrike">
+        <a:defRPr sz="1400" b="0" i="0" u="none" strike="noStrike" cap="none">
           <a:solidFill>
             <a:srgbClr val="000000"/>
           </a:solidFill>
@@ -10394,7 +10383,7 @@
           <a:sym typeface="Arial"/>
         </a:defRPr>
       </a:lvl5pPr>
-      <a:lvl6pPr lvl="5" marR="0" rtl="0" algn="l">
+      <a:lvl6pPr marR="0" lvl="5" algn="l" rtl="0">
         <a:lnSpc>
           <a:spcPct val="100000"/>
         </a:lnSpc>
@@ -10408,7 +10397,7 @@
           <a:srgbClr val="000000"/>
         </a:buClr>
         <a:buFont typeface="Arial"/>
-        <a:defRPr b="0" i="0" sz="1400" u="none" cap="none" strike="noStrike">
+        <a:defRPr sz="1400" b="0" i="0" u="none" strike="noStrike" cap="none">
           <a:solidFill>
             <a:srgbClr val="000000"/>
           </a:solidFill>
@@ -10418,7 +10407,7 @@
           <a:sym typeface="Arial"/>
         </a:defRPr>
       </a:lvl6pPr>
-      <a:lvl7pPr lvl="6" marR="0" rtl="0" algn="l">
+      <a:lvl7pPr marR="0" lvl="6" algn="l" rtl="0">
         <a:lnSpc>
           <a:spcPct val="100000"/>
         </a:lnSpc>
@@ -10432,7 +10421,7 @@
           <a:srgbClr val="000000"/>
         </a:buClr>
         <a:buFont typeface="Arial"/>
-        <a:defRPr b="0" i="0" sz="1400" u="none" cap="none" strike="noStrike">
+        <a:defRPr sz="1400" b="0" i="0" u="none" strike="noStrike" cap="none">
           <a:solidFill>
             <a:srgbClr val="000000"/>
           </a:solidFill>
@@ -10442,7 +10431,7 @@
           <a:sym typeface="Arial"/>
         </a:defRPr>
       </a:lvl7pPr>
-      <a:lvl8pPr lvl="7" marR="0" rtl="0" algn="l">
+      <a:lvl8pPr marR="0" lvl="7" algn="l" rtl="0">
         <a:lnSpc>
           <a:spcPct val="100000"/>
         </a:lnSpc>
@@ -10456,7 +10445,7 @@
           <a:srgbClr val="000000"/>
         </a:buClr>
         <a:buFont typeface="Arial"/>
-        <a:defRPr b="0" i="0" sz="1400" u="none" cap="none" strike="noStrike">
+        <a:defRPr sz="1400" b="0" i="0" u="none" strike="noStrike" cap="none">
           <a:solidFill>
             <a:srgbClr val="000000"/>
           </a:solidFill>
@@ -10466,7 +10455,7 @@
           <a:sym typeface="Arial"/>
         </a:defRPr>
       </a:lvl8pPr>
-      <a:lvl9pPr lvl="8" marR="0" rtl="0" algn="l">
+      <a:lvl9pPr marR="0" lvl="8" algn="l" rtl="0">
         <a:lnSpc>
           <a:spcPct val="100000"/>
         </a:lnSpc>
@@ -10480,7 +10469,7 @@
           <a:srgbClr val="000000"/>
         </a:buClr>
         <a:buFont typeface="Arial"/>
-        <a:defRPr b="0" i="0" sz="1400" u="none" cap="none" strike="noStrike">
+        <a:defRPr sz="1400" b="0" i="0" u="none" strike="noStrike" cap="none">
           <a:solidFill>
             <a:srgbClr val="000000"/>
           </a:solidFill>
@@ -10496,11 +10485,11 @@
 </file>
 
 <file path=ppt/slides/slide1.xml><?xml version="1.0" encoding="utf-8"?>
-<p:sld xmlns:a="http://schemas.openxmlformats.org/drawingml/2006/main" xmlns:r="http://schemas.openxmlformats.org/officeDocument/2006/relationships" xmlns:mc="http://schemas.openxmlformats.org/markup-compatibility/2006" xmlns:mv="urn:schemas-microsoft-com:mac:vml" xmlns:p="http://schemas.openxmlformats.org/presentationml/2006/main" xmlns:c="http://schemas.openxmlformats.org/drawingml/2006/chart" xmlns:dgm="http://schemas.openxmlformats.org/drawingml/2006/diagram" xmlns:o="urn:schemas-microsoft-com:office:office" xmlns:v="urn:schemas-microsoft-com:vml" xmlns:pvml="urn:schemas-microsoft-com:office:powerpoint" xmlns:com="http://schemas.openxmlformats.org/drawingml/2006/compatibility" xmlns:p14="http://schemas.microsoft.com/office/powerpoint/2010/main" xmlns:p15="http://schemas.microsoft.com/office/powerpoint/2012/main" xmlns:ahyp="http://schemas.microsoft.com/office/drawing/2018/hyperlinkcolor">
+<p:sld xmlns:a="http://schemas.openxmlformats.org/drawingml/2006/main" xmlns:r="http://schemas.openxmlformats.org/officeDocument/2006/relationships" xmlns:p="http://schemas.openxmlformats.org/presentationml/2006/main">
   <p:cSld>
     <p:spTree>
       <p:nvGrpSpPr>
-        <p:cNvPr id="105" name="Shape 105"/>
+        <p:cNvPr id="1" name="Shape 105"/>
         <p:cNvGrpSpPr/>
         <p:nvPr/>
       </p:nvGrpSpPr>
@@ -10532,12 +10521,12 @@
           </a:ln>
         </p:spPr>
         <p:txBody>
-          <a:bodyPr anchorCtr="0" anchor="t" bIns="0" lIns="0" spcFirstLastPara="1" rIns="0" wrap="square" tIns="0">
+          <a:bodyPr spcFirstLastPara="1" wrap="square" lIns="0" tIns="0" rIns="0" bIns="0" anchor="t" anchorCtr="0">
             <a:noAutofit/>
           </a:bodyPr>
           <a:lstStyle/>
           <a:p>
-            <a:pPr indent="0" lvl="0" marL="0" rtl="0" algn="l">
+            <a:pPr marL="0" lvl="0" indent="0" algn="l" rtl="0">
               <a:spcBef>
                 <a:spcPts val="0"/>
               </a:spcBef>
@@ -10573,7 +10562,9 @@
       <p:sp>
         <p:nvSpPr>
           <p:cNvPr id="107" name="Google Shape;107;p13"/>
-          <p:cNvSpPr txBox="1"/>
+          <p:cNvSpPr txBox="1">
+            <a:spLocks noGrp="1"/>
+          </p:cNvSpPr>
           <p:nvPr>
             <p:ph type="ctrTitle"/>
           </p:nvPr>
@@ -10592,12 +10583,12 @@
           </a:ln>
         </p:spPr>
         <p:txBody>
-          <a:bodyPr anchorCtr="0" anchor="ctr" bIns="0" lIns="0" spcFirstLastPara="1" rIns="0" wrap="square" tIns="0">
+          <a:bodyPr spcFirstLastPara="1" wrap="square" lIns="0" tIns="0" rIns="0" bIns="0" anchor="ctr" anchorCtr="0">
             <a:noAutofit/>
           </a:bodyPr>
           <a:lstStyle/>
           <a:p>
-            <a:pPr indent="0" lvl="0" marL="0" marR="0" rtl="0" algn="l">
+            <a:pPr marL="0" marR="0" lvl="0" indent="0" algn="l" rtl="0">
               <a:lnSpc>
                 <a:spcPct val="120000"/>
               </a:lnSpc>
@@ -10624,9 +10615,11 @@
       <p:sp>
         <p:nvSpPr>
           <p:cNvPr id="108" name="Google Shape;108;p13"/>
-          <p:cNvSpPr txBox="1"/>
+          <p:cNvSpPr txBox="1">
+            <a:spLocks noGrp="1"/>
+          </p:cNvSpPr>
           <p:nvPr>
-            <p:ph idx="1" type="subTitle"/>
+            <p:ph type="subTitle" idx="1"/>
           </p:nvPr>
         </p:nvSpPr>
         <p:spPr>
@@ -10643,12 +10636,12 @@
           </a:ln>
         </p:spPr>
         <p:txBody>
-          <a:bodyPr anchorCtr="0" anchor="t" bIns="0" lIns="0" spcFirstLastPara="1" rIns="0" wrap="square" tIns="0">
+          <a:bodyPr spcFirstLastPara="1" wrap="square" lIns="0" tIns="0" rIns="0" bIns="0" anchor="t" anchorCtr="0">
             <a:noAutofit/>
           </a:bodyPr>
           <a:lstStyle/>
           <a:p>
-            <a:pPr indent="0" lvl="0" marL="0" marR="0" rtl="0" algn="l">
+            <a:pPr marL="0" marR="0" lvl="0" indent="0" algn="l" rtl="0">
               <a:lnSpc>
                 <a:spcPct val="131250"/>
               </a:lnSpc>
@@ -10665,13 +10658,17 @@
               <a:buNone/>
             </a:pPr>
             <a:r>
-              <a:rPr b="1" lang="en"/>
-              <a:t>Data Scientist: [Your Name]</a:t>
+              <a:rPr lang="en" b="1" dirty="0"/>
+              <a:t>Data Scientist: </a:t>
             </a:r>
-            <a:endParaRPr b="1"/>
+            <a:r>
+              <a:rPr lang="pt-BR" b="1" dirty="0"/>
+              <a:t>Marcos Roberto Souza</a:t>
+            </a:r>
+            <a:endParaRPr b="1" dirty="0"/>
           </a:p>
           <a:p>
-            <a:pPr indent="0" lvl="0" marL="0" marR="0" rtl="0" algn="l">
+            <a:pPr marL="0" marR="0" lvl="0" indent="0" algn="l" rtl="0">
               <a:lnSpc>
                 <a:spcPct val="131250"/>
               </a:lnSpc>
@@ -10687,10 +10684,7 @@
               <a:buFont typeface="Open Sans"/>
               <a:buNone/>
             </a:pPr>
-            <a:r>
-              <a:t/>
-            </a:r>
-            <a:endParaRPr sz="1000"/>
+            <a:endParaRPr sz="1000" dirty="0"/>
           </a:p>
         </p:txBody>
       </p:sp>
@@ -10703,11 +10697,11 @@
 </file>
 
 <file path=ppt/slides/slide2.xml><?xml version="1.0" encoding="utf-8"?>
-<p:sld xmlns:a="http://schemas.openxmlformats.org/drawingml/2006/main" xmlns:r="http://schemas.openxmlformats.org/officeDocument/2006/relationships" xmlns:mc="http://schemas.openxmlformats.org/markup-compatibility/2006" xmlns:mv="urn:schemas-microsoft-com:mac:vml" xmlns:p="http://schemas.openxmlformats.org/presentationml/2006/main" xmlns:c="http://schemas.openxmlformats.org/drawingml/2006/chart" xmlns:dgm="http://schemas.openxmlformats.org/drawingml/2006/diagram" xmlns:o="urn:schemas-microsoft-com:office:office" xmlns:v="urn:schemas-microsoft-com:vml" xmlns:pvml="urn:schemas-microsoft-com:office:powerpoint" xmlns:com="http://schemas.openxmlformats.org/drawingml/2006/compatibility" xmlns:p14="http://schemas.microsoft.com/office/powerpoint/2010/main" xmlns:p15="http://schemas.microsoft.com/office/powerpoint/2012/main" xmlns:ahyp="http://schemas.microsoft.com/office/drawing/2018/hyperlinkcolor">
+<p:sld xmlns:a="http://schemas.openxmlformats.org/drawingml/2006/main" xmlns:r="http://schemas.openxmlformats.org/officeDocument/2006/relationships" xmlns:p="http://schemas.openxmlformats.org/presentationml/2006/main">
   <p:cSld>
     <p:spTree>
       <p:nvGrpSpPr>
-        <p:cNvPr id="112" name="Shape 112"/>
+        <p:cNvPr id="1" name="Shape 122"/>
         <p:cNvGrpSpPr/>
         <p:nvPr/>
       </p:nvGrpSpPr>
@@ -10721,8 +10715,10 @@
       </p:grpSpPr>
       <p:sp>
         <p:nvSpPr>
-          <p:cNvPr id="113" name="Google Shape;113;p14"/>
-          <p:cNvSpPr txBox="1"/>
+          <p:cNvPr id="123" name="Google Shape;123;p15"/>
+          <p:cNvSpPr txBox="1">
+            <a:spLocks noGrp="1"/>
+          </p:cNvSpPr>
           <p:nvPr>
             <p:ph type="title"/>
           </p:nvPr>
@@ -10737,12 +10733,12 @@
           </a:prstGeom>
         </p:spPr>
         <p:txBody>
-          <a:bodyPr anchorCtr="0" anchor="ctr" bIns="0" lIns="0" spcFirstLastPara="1" rIns="0" wrap="square" tIns="0">
+          <a:bodyPr spcFirstLastPara="1" wrap="square" lIns="0" tIns="0" rIns="0" bIns="0" anchor="ctr" anchorCtr="0">
             <a:noAutofit/>
           </a:bodyPr>
           <a:lstStyle/>
           <a:p>
-            <a:pPr indent="0" lvl="0" marL="0" rtl="0" algn="l">
+            <a:pPr marL="0" lvl="0" indent="0" algn="l" rtl="0">
               <a:spcBef>
                 <a:spcPts val="0"/>
               </a:spcBef>
@@ -10753,7 +10749,7 @@
             </a:pPr>
             <a:r>
               <a:rPr lang="en" sz="6400"/>
-              <a:t>How to Use This Template</a:t>
+              <a:t>Agenda</a:t>
             </a:r>
             <a:endParaRPr sz="6400"/>
           </a:p>
@@ -10761,10 +10757,12 @@
       </p:sp>
       <p:sp>
         <p:nvSpPr>
-          <p:cNvPr id="114" name="Google Shape;114;p14"/>
-          <p:cNvSpPr txBox="1"/>
+          <p:cNvPr id="124" name="Google Shape;124;p15"/>
+          <p:cNvSpPr txBox="1">
+            <a:spLocks noGrp="1"/>
+          </p:cNvSpPr>
           <p:nvPr>
-            <p:ph idx="1" type="body"/>
+            <p:ph type="body" idx="1"/>
           </p:nvPr>
         </p:nvSpPr>
         <p:spPr>
@@ -10777,14 +10775,14 @@
           </a:prstGeom>
         </p:spPr>
         <p:txBody>
-          <a:bodyPr anchorCtr="0" anchor="t" bIns="0" lIns="0" spcFirstLastPara="1" rIns="0" wrap="square" tIns="0">
+          <a:bodyPr spcFirstLastPara="1" wrap="square" lIns="0" tIns="0" rIns="0" bIns="0" anchor="t" anchorCtr="0">
             <a:noAutofit/>
           </a:bodyPr>
           <a:lstStyle/>
           <a:p>
-            <a:pPr indent="-647700" lvl="0" marL="914400" rtl="0" algn="l">
+            <a:pPr marL="0" lvl="0" indent="0" algn="l" rtl="0">
               <a:lnSpc>
-                <a:spcPct val="115000"/>
+                <a:spcPct val="100000"/>
               </a:lnSpc>
               <a:spcBef>
                 <a:spcPts val="0"/>
@@ -10792,19 +10790,15 @@
               <a:spcAft>
                 <a:spcPts val="0"/>
               </a:spcAft>
-              <a:buClr>
-                <a:srgbClr val="2D3D4A"/>
-              </a:buClr>
-              <a:buSzPts val="3000"/>
-              <a:buChar char="●"/>
+              <a:buNone/>
             </a:pPr>
             <a:r>
-              <a:rPr lang="en" sz="3000">
-                <a:solidFill>
-                  <a:srgbClr val="2D3D4A"/>
+              <a:rPr lang="en">
+                <a:solidFill>
+                  <a:schemeClr val="accent1"/>
                 </a:solidFill>
               </a:rPr>
-              <a:t>Make a copy of this slide deck.</a:t>
+              <a:t>Findings of A/B test analysis</a:t>
             </a:r>
             <a:endParaRPr sz="3000">
               <a:solidFill>
@@ -10813,532 +10807,7 @@
             </a:endParaRPr>
           </a:p>
           <a:p>
-            <a:pPr indent="-647700" lvl="0" marL="914400" rtl="0" algn="l">
-              <a:lnSpc>
-                <a:spcPct val="115000"/>
-              </a:lnSpc>
-              <a:spcBef>
-                <a:spcPts val="0"/>
-              </a:spcBef>
-              <a:spcAft>
-                <a:spcPts val="0"/>
-              </a:spcAft>
-              <a:buClr>
-                <a:srgbClr val="2D3D4A"/>
-              </a:buClr>
-              <a:buSzPts val="3000"/>
-              <a:buChar char="●"/>
-            </a:pPr>
-            <a:r>
-              <a:rPr lang="en" sz="3000">
-                <a:solidFill>
-                  <a:srgbClr val="2D3D4A"/>
-                </a:solidFill>
-              </a:rPr>
-              <a:t>We have provided these slides as a guide to ensure that you submit all the required components to successfully complete your project. </a:t>
-            </a:r>
-            <a:endParaRPr sz="3000">
-              <a:solidFill>
-                <a:srgbClr val="2D3D4A"/>
-              </a:solidFill>
-            </a:endParaRPr>
-          </a:p>
-          <a:p>
-            <a:pPr indent="-647700" lvl="0" marL="914400" rtl="0" algn="l">
-              <a:lnSpc>
-                <a:spcPct val="115000"/>
-              </a:lnSpc>
-              <a:spcBef>
-                <a:spcPts val="0"/>
-              </a:spcBef>
-              <a:spcAft>
-                <a:spcPts val="0"/>
-              </a:spcAft>
-              <a:buClr>
-                <a:srgbClr val="2D3D4A"/>
-              </a:buClr>
-              <a:buSzPts val="3000"/>
-              <a:buChar char="●"/>
-            </a:pPr>
-            <a:r>
-              <a:rPr lang="en" sz="3000">
-                <a:solidFill>
-                  <a:srgbClr val="2D3D4A"/>
-                </a:solidFill>
-              </a:rPr>
-              <a:t>All red text should be replaced with the results of your analysis.</a:t>
-            </a:r>
-            <a:endParaRPr sz="3000">
-              <a:solidFill>
-                <a:srgbClr val="2D3D4A"/>
-              </a:solidFill>
-            </a:endParaRPr>
-          </a:p>
-          <a:p>
-            <a:pPr indent="-647700" lvl="0" marL="914400" rtl="0" algn="l">
-              <a:lnSpc>
-                <a:spcPct val="115000"/>
-              </a:lnSpc>
-              <a:spcBef>
-                <a:spcPts val="0"/>
-              </a:spcBef>
-              <a:spcAft>
-                <a:spcPts val="0"/>
-              </a:spcAft>
-              <a:buClr>
-                <a:srgbClr val="2D3D4A"/>
-              </a:buClr>
-              <a:buSzPts val="3000"/>
-              <a:buChar char="●"/>
-            </a:pPr>
-            <a:r>
-              <a:rPr lang="en" sz="3000">
-                <a:solidFill>
-                  <a:srgbClr val="2D3D4A"/>
-                </a:solidFill>
-              </a:rPr>
-              <a:t>When presenting your project, please only think of this as a guide. We encouraged you to use creative freedom when making changes as long as the required information is present. </a:t>
-            </a:r>
-            <a:endParaRPr sz="3000">
-              <a:solidFill>
-                <a:srgbClr val="2D3D4A"/>
-              </a:solidFill>
-            </a:endParaRPr>
-          </a:p>
-          <a:p>
-            <a:pPr indent="-647700" lvl="0" marL="914400" rtl="0" algn="l">
-              <a:lnSpc>
-                <a:spcPct val="115000"/>
-              </a:lnSpc>
-              <a:spcBef>
-                <a:spcPts val="0"/>
-              </a:spcBef>
-              <a:spcAft>
-                <a:spcPts val="0"/>
-              </a:spcAft>
-              <a:buClr>
-                <a:srgbClr val="2D3D4A"/>
-              </a:buClr>
-              <a:buSzPts val="3000"/>
-              <a:buChar char="●"/>
-            </a:pPr>
-            <a:r>
-              <a:rPr lang="en" sz="3000">
-                <a:solidFill>
-                  <a:srgbClr val="2D3D4A"/>
-                </a:solidFill>
-              </a:rPr>
-              <a:t>Don’t forget to delete this slide before you submit your project.</a:t>
-            </a:r>
-            <a:endParaRPr sz="3000">
-              <a:solidFill>
-                <a:srgbClr val="2D3D4A"/>
-              </a:solidFill>
-            </a:endParaRPr>
-          </a:p>
-          <a:p>
-            <a:pPr indent="0" lvl="0" marL="228600" rtl="0" algn="l">
-              <a:lnSpc>
-                <a:spcPct val="115000"/>
-              </a:lnSpc>
-              <a:spcBef>
-                <a:spcPts val="2000"/>
-              </a:spcBef>
-              <a:spcAft>
-                <a:spcPts val="2000"/>
-              </a:spcAft>
-              <a:buNone/>
-            </a:pPr>
-            <a:r>
-              <a:t/>
-            </a:r>
-            <a:endParaRPr sz="3000">
-              <a:solidFill>
-                <a:srgbClr val="000000"/>
-              </a:solidFill>
-            </a:endParaRPr>
-          </a:p>
-        </p:txBody>
-      </p:sp>
-      <p:sp>
-        <p:nvSpPr>
-          <p:cNvPr id="115" name="Google Shape;115;p14"/>
-          <p:cNvSpPr/>
-          <p:nvPr/>
-        </p:nvSpPr>
-        <p:spPr>
-          <a:xfrm flipH="1">
-            <a:off x="14646600" y="0"/>
-            <a:ext cx="3641400" cy="3247200"/>
-          </a:xfrm>
-          <a:prstGeom prst="diagStripe">
-            <a:avLst>
-              <a:gd fmla="val 52389" name="adj"/>
-            </a:avLst>
-          </a:prstGeom>
-          <a:solidFill>
-            <a:srgbClr val="CC0000"/>
-          </a:solidFill>
-          <a:ln cap="flat" cmpd="sng" w="9525">
-            <a:solidFill>
-              <a:srgbClr val="990000"/>
-            </a:solidFill>
-            <a:prstDash val="solid"/>
-            <a:round/>
-            <a:headEnd len="sm" w="sm" type="none"/>
-            <a:tailEnd len="sm" w="sm" type="none"/>
-          </a:ln>
-        </p:spPr>
-        <p:txBody>
-          <a:bodyPr anchorCtr="0" anchor="ctr" bIns="182850" lIns="182850" spcFirstLastPara="1" rIns="182850" wrap="square" tIns="182850">
-            <a:noAutofit/>
-          </a:bodyPr>
-          <a:lstStyle/>
-          <a:p>
-            <a:pPr indent="0" lvl="0" marL="0" marR="0" rtl="0" algn="l">
-              <a:lnSpc>
-                <a:spcPct val="100000"/>
-              </a:lnSpc>
-              <a:spcBef>
-                <a:spcPts val="0"/>
-              </a:spcBef>
-              <a:spcAft>
-                <a:spcPts val="0"/>
-              </a:spcAft>
-              <a:buClr>
-                <a:srgbClr val="000000"/>
-              </a:buClr>
-              <a:buSzPts val="2800"/>
-              <a:buFont typeface="Arial"/>
-              <a:buNone/>
-            </a:pPr>
-            <a:r>
-              <a:t/>
-            </a:r>
-            <a:endParaRPr b="0" i="0" sz="2800" u="none" cap="none" strike="noStrike">
-              <a:solidFill>
-                <a:srgbClr val="000000"/>
-              </a:solidFill>
-              <a:latin typeface="Arial"/>
-              <a:ea typeface="Arial"/>
-              <a:cs typeface="Arial"/>
-              <a:sym typeface="Arial"/>
-            </a:endParaRPr>
-          </a:p>
-        </p:txBody>
-      </p:sp>
-      <p:grpSp>
-        <p:nvGrpSpPr>
-          <p:cNvPr id="116" name="Google Shape;116;p14"/>
-          <p:cNvGrpSpPr/>
-          <p:nvPr/>
-        </p:nvGrpSpPr>
-        <p:grpSpPr>
-          <a:xfrm>
-            <a:off x="14646600" y="-496834"/>
-            <a:ext cx="4112283" cy="3744034"/>
-            <a:chOff x="7323300" y="-248417"/>
-            <a:chExt cx="2056141" cy="1872017"/>
-          </a:xfrm>
-        </p:grpSpPr>
-        <p:sp>
-          <p:nvSpPr>
-            <p:cNvPr id="117" name="Google Shape;117;p14"/>
-            <p:cNvSpPr/>
-            <p:nvPr/>
-          </p:nvSpPr>
-          <p:spPr>
-            <a:xfrm flipH="1">
-              <a:off x="7323300" y="0"/>
-              <a:ext cx="1820700" cy="1623600"/>
-            </a:xfrm>
-            <a:prstGeom prst="diagStripe">
-              <a:avLst>
-                <a:gd fmla="val 52389" name="adj"/>
-              </a:avLst>
-            </a:prstGeom>
-            <a:solidFill>
-              <a:srgbClr val="CC0000"/>
-            </a:solidFill>
-            <a:ln cap="flat" cmpd="sng" w="9525">
-              <a:solidFill>
-                <a:srgbClr val="990000"/>
-              </a:solidFill>
-              <a:prstDash val="solid"/>
-              <a:round/>
-              <a:headEnd len="sm" w="sm" type="none"/>
-              <a:tailEnd len="sm" w="sm" type="none"/>
-            </a:ln>
-          </p:spPr>
-          <p:txBody>
-            <a:bodyPr anchorCtr="0" anchor="ctr" bIns="182850" lIns="182850" spcFirstLastPara="1" rIns="182850" wrap="square" tIns="182850">
-              <a:noAutofit/>
-            </a:bodyPr>
-            <a:lstStyle/>
-            <a:p>
-              <a:pPr indent="0" lvl="0" marL="0" marR="0" rtl="0" algn="l">
-                <a:lnSpc>
-                  <a:spcPct val="100000"/>
-                </a:lnSpc>
-                <a:spcBef>
-                  <a:spcPts val="0"/>
-                </a:spcBef>
-                <a:spcAft>
-                  <a:spcPts val="0"/>
-                </a:spcAft>
-                <a:buClr>
-                  <a:srgbClr val="000000"/>
-                </a:buClr>
-                <a:buSzPts val="2800"/>
-                <a:buFont typeface="Arial"/>
-                <a:buNone/>
-              </a:pPr>
-              <a:r>
-                <a:t/>
-              </a:r>
-              <a:endParaRPr b="0" i="0" sz="2800" u="none" cap="none" strike="noStrike">
-                <a:solidFill>
-                  <a:srgbClr val="000000"/>
-                </a:solidFill>
-                <a:latin typeface="Arial"/>
-                <a:ea typeface="Arial"/>
-                <a:cs typeface="Arial"/>
-                <a:sym typeface="Arial"/>
-              </a:endParaRPr>
-            </a:p>
-          </p:txBody>
-        </p:sp>
-        <p:sp>
-          <p:nvSpPr>
-            <p:cNvPr id="118" name="Google Shape;118;p14"/>
-            <p:cNvSpPr txBox="1"/>
-            <p:nvPr/>
-          </p:nvSpPr>
-          <p:spPr>
-            <a:xfrm rot="2496869">
-              <a:off x="7526066" y="340302"/>
-              <a:ext cx="1946952" cy="458162"/>
-            </a:xfrm>
-            <a:prstGeom prst="rect">
-              <a:avLst/>
-            </a:prstGeom>
-            <a:noFill/>
-            <a:ln>
-              <a:noFill/>
-            </a:ln>
-          </p:spPr>
-          <p:txBody>
-            <a:bodyPr anchorCtr="0" anchor="t" bIns="182850" lIns="182850" spcFirstLastPara="1" rIns="182850" wrap="square" tIns="182850">
-              <a:noAutofit/>
-            </a:bodyPr>
-            <a:lstStyle/>
-            <a:p>
-              <a:pPr indent="0" lvl="0" marL="0" marR="0" rtl="0" algn="ctr">
-                <a:lnSpc>
-                  <a:spcPct val="100000"/>
-                </a:lnSpc>
-                <a:spcBef>
-                  <a:spcPts val="0"/>
-                </a:spcBef>
-                <a:spcAft>
-                  <a:spcPts val="0"/>
-                </a:spcAft>
-                <a:buClr>
-                  <a:srgbClr val="000000"/>
-                </a:buClr>
-                <a:buSzPts val="4400"/>
-                <a:buFont typeface="Arial"/>
-                <a:buNone/>
-              </a:pPr>
-              <a:r>
-                <a:rPr b="0" i="0" lang="en" sz="4400" u="none" cap="none" strike="noStrike">
-                  <a:solidFill>
-                    <a:srgbClr val="F3F3F3"/>
-                  </a:solidFill>
-                  <a:latin typeface="Open Sans"/>
-                  <a:ea typeface="Open Sans"/>
-                  <a:cs typeface="Open Sans"/>
-                  <a:sym typeface="Open Sans"/>
-                </a:rPr>
-                <a:t>REFERENCE</a:t>
-              </a:r>
-              <a:endParaRPr b="0" i="0" sz="4400" u="none" cap="none" strike="noStrike">
-                <a:solidFill>
-                  <a:srgbClr val="F3F3F3"/>
-                </a:solidFill>
-                <a:latin typeface="Open Sans"/>
-                <a:ea typeface="Open Sans"/>
-                <a:cs typeface="Open Sans"/>
-                <a:sym typeface="Open Sans"/>
-              </a:endParaRPr>
-            </a:p>
-            <a:p>
-              <a:pPr indent="0" lvl="0" marL="0" marR="0" rtl="0" algn="ctr">
-                <a:lnSpc>
-                  <a:spcPct val="100000"/>
-                </a:lnSpc>
-                <a:spcBef>
-                  <a:spcPts val="0"/>
-                </a:spcBef>
-                <a:spcAft>
-                  <a:spcPts val="0"/>
-                </a:spcAft>
-                <a:buClr>
-                  <a:srgbClr val="000000"/>
-                </a:buClr>
-                <a:buSzPts val="1800"/>
-                <a:buFont typeface="Arial"/>
-                <a:buNone/>
-              </a:pPr>
-              <a:r>
-                <a:rPr b="1" i="0" lang="en" sz="1800" u="none" cap="none" strike="noStrike">
-                  <a:solidFill>
-                    <a:srgbClr val="F3F3F3"/>
-                  </a:solidFill>
-                  <a:latin typeface="Open Sans"/>
-                  <a:ea typeface="Open Sans"/>
-                  <a:cs typeface="Open Sans"/>
-                  <a:sym typeface="Open Sans"/>
-                </a:rPr>
-                <a:t>REMOVE BEFORE SUBMITTING</a:t>
-              </a:r>
-              <a:endParaRPr b="1" i="0" sz="1800" u="none" cap="none" strike="noStrike">
-                <a:solidFill>
-                  <a:srgbClr val="F3F3F3"/>
-                </a:solidFill>
-                <a:latin typeface="Open Sans"/>
-                <a:ea typeface="Open Sans"/>
-                <a:cs typeface="Open Sans"/>
-                <a:sym typeface="Open Sans"/>
-              </a:endParaRPr>
-            </a:p>
-          </p:txBody>
-        </p:sp>
-      </p:grpSp>
-    </p:spTree>
-  </p:cSld>
-  <p:clrMapOvr>
-    <a:masterClrMapping/>
-  </p:clrMapOvr>
-</p:sld>
-</file>
-
-<file path=ppt/slides/slide3.xml><?xml version="1.0" encoding="utf-8"?>
-<p:sld xmlns:a="http://schemas.openxmlformats.org/drawingml/2006/main" xmlns:r="http://schemas.openxmlformats.org/officeDocument/2006/relationships" xmlns:mc="http://schemas.openxmlformats.org/markup-compatibility/2006" xmlns:mv="urn:schemas-microsoft-com:mac:vml" xmlns:p="http://schemas.openxmlformats.org/presentationml/2006/main" xmlns:c="http://schemas.openxmlformats.org/drawingml/2006/chart" xmlns:dgm="http://schemas.openxmlformats.org/drawingml/2006/diagram" xmlns:o="urn:schemas-microsoft-com:office:office" xmlns:v="urn:schemas-microsoft-com:vml" xmlns:pvml="urn:schemas-microsoft-com:office:powerpoint" xmlns:com="http://schemas.openxmlformats.org/drawingml/2006/compatibility" xmlns:p14="http://schemas.microsoft.com/office/powerpoint/2010/main" xmlns:p15="http://schemas.microsoft.com/office/powerpoint/2012/main" xmlns:ahyp="http://schemas.microsoft.com/office/drawing/2018/hyperlinkcolor">
-  <p:cSld>
-    <p:spTree>
-      <p:nvGrpSpPr>
-        <p:cNvPr id="122" name="Shape 122"/>
-        <p:cNvGrpSpPr/>
-        <p:nvPr/>
-      </p:nvGrpSpPr>
-      <p:grpSpPr>
-        <a:xfrm>
-          <a:off x="0" y="0"/>
-          <a:ext cx="0" cy="0"/>
-          <a:chOff x="0" y="0"/>
-          <a:chExt cx="0" cy="0"/>
-        </a:xfrm>
-      </p:grpSpPr>
-      <p:sp>
-        <p:nvSpPr>
-          <p:cNvPr id="123" name="Google Shape;123;p15"/>
-          <p:cNvSpPr txBox="1"/>
-          <p:nvPr>
-            <p:ph type="title"/>
-          </p:nvPr>
-        </p:nvSpPr>
-        <p:spPr>
-          <a:xfrm>
-            <a:off x="685800" y="307965"/>
-            <a:ext cx="16916400" cy="1509000"/>
-          </a:xfrm>
-          <a:prstGeom prst="rect">
-            <a:avLst/>
-          </a:prstGeom>
-        </p:spPr>
-        <p:txBody>
-          <a:bodyPr anchorCtr="0" anchor="ctr" bIns="0" lIns="0" spcFirstLastPara="1" rIns="0" wrap="square" tIns="0">
-            <a:noAutofit/>
-          </a:bodyPr>
-          <a:lstStyle/>
-          <a:p>
-            <a:pPr indent="0" lvl="0" marL="0" rtl="0" algn="l">
-              <a:spcBef>
-                <a:spcPts val="0"/>
-              </a:spcBef>
-              <a:spcAft>
-                <a:spcPts val="0"/>
-              </a:spcAft>
-              <a:buNone/>
-            </a:pPr>
-            <a:r>
-              <a:rPr lang="en" sz="6400"/>
-              <a:t>Agenda</a:t>
-            </a:r>
-            <a:endParaRPr sz="6400"/>
-          </a:p>
-        </p:txBody>
-      </p:sp>
-      <p:sp>
-        <p:nvSpPr>
-          <p:cNvPr id="124" name="Google Shape;124;p15"/>
-          <p:cNvSpPr txBox="1"/>
-          <p:nvPr>
-            <p:ph idx="1" type="body"/>
-          </p:nvPr>
-        </p:nvSpPr>
-        <p:spPr>
-          <a:xfrm>
-            <a:off x="685850" y="1828800"/>
-            <a:ext cx="16393800" cy="6629400"/>
-          </a:xfrm>
-          <a:prstGeom prst="rect">
-            <a:avLst/>
-          </a:prstGeom>
-        </p:spPr>
-        <p:txBody>
-          <a:bodyPr anchorCtr="0" anchor="t" bIns="0" lIns="0" spcFirstLastPara="1" rIns="0" wrap="square" tIns="0">
-            <a:noAutofit/>
-          </a:bodyPr>
-          <a:lstStyle/>
-          <a:p>
-            <a:pPr indent="0" lvl="0" marL="0" rtl="0" algn="l">
-              <a:lnSpc>
-                <a:spcPct val="100000"/>
-              </a:lnSpc>
-              <a:spcBef>
-                <a:spcPts val="0"/>
-              </a:spcBef>
-              <a:spcAft>
-                <a:spcPts val="0"/>
-              </a:spcAft>
-              <a:buNone/>
-            </a:pPr>
-            <a:r>
-              <a:rPr lang="en">
-                <a:solidFill>
-                  <a:schemeClr val="accent1"/>
-                </a:solidFill>
-              </a:rPr>
-              <a:t>Findings of</a:t>
-            </a:r>
-            <a:r>
-              <a:rPr lang="en">
-                <a:solidFill>
-                  <a:schemeClr val="accent1"/>
-                </a:solidFill>
-              </a:rPr>
-              <a:t> A/B test analysis</a:t>
-            </a:r>
-            <a:endParaRPr sz="3000">
-              <a:solidFill>
-                <a:srgbClr val="2D3D4A"/>
-              </a:solidFill>
-            </a:endParaRPr>
-          </a:p>
-          <a:p>
-            <a:pPr indent="-723900" lvl="0" marL="914400" rtl="0" algn="l">
+            <a:pPr marL="914400" lvl="0" indent="-723900" algn="l" rtl="0">
               <a:lnSpc>
                 <a:spcPct val="100000"/>
               </a:lnSpc>
@@ -11361,7 +10830,7 @@
             <a:endParaRPr sz="4200"/>
           </a:p>
           <a:p>
-            <a:pPr indent="-723900" lvl="0" marL="914400" rtl="0" algn="l">
+            <a:pPr marL="914400" lvl="0" indent="-723900" algn="l" rtl="0">
               <a:lnSpc>
                 <a:spcPct val="100000"/>
               </a:lnSpc>
@@ -11384,7 +10853,7 @@
             <a:endParaRPr sz="4200"/>
           </a:p>
           <a:p>
-            <a:pPr indent="-723900" lvl="0" marL="914400" rtl="0" algn="l">
+            <a:pPr marL="914400" lvl="0" indent="-723900" algn="l" rtl="0">
               <a:lnSpc>
                 <a:spcPct val="100000"/>
               </a:lnSpc>
@@ -11407,7 +10876,7 @@
             <a:endParaRPr sz="4200"/>
           </a:p>
           <a:p>
-            <a:pPr indent="0" lvl="0" marL="0" rtl="0" algn="l">
+            <a:pPr marL="0" lvl="0" indent="0" algn="l" rtl="0">
               <a:lnSpc>
                 <a:spcPct val="100000"/>
               </a:lnSpc>
@@ -11419,9 +10888,6 @@
               </a:spcAft>
               <a:buNone/>
             </a:pPr>
-            <a:r>
-              <a:t/>
-            </a:r>
             <a:endParaRPr sz="3000">
               <a:solidFill>
                 <a:srgbClr val="2D3D4A"/>
@@ -11429,7 +10895,7 @@
             </a:endParaRPr>
           </a:p>
           <a:p>
-            <a:pPr indent="0" lvl="0" marL="228600" rtl="0" algn="l">
+            <a:pPr marL="228600" lvl="0" indent="0" algn="l" rtl="0">
               <a:lnSpc>
                 <a:spcPct val="115000"/>
               </a:lnSpc>
@@ -11441,9 +10907,6 @@
               </a:spcAft>
               <a:buNone/>
             </a:pPr>
-            <a:r>
-              <a:t/>
-            </a:r>
             <a:endParaRPr sz="3000">
               <a:solidFill>
                 <a:srgbClr val="000000"/>
@@ -11460,12 +10923,12 @@
 </p:sld>
 </file>
 
-<file path=ppt/slides/slide4.xml><?xml version="1.0" encoding="utf-8"?>
-<p:sld xmlns:a="http://schemas.openxmlformats.org/drawingml/2006/main" xmlns:r="http://schemas.openxmlformats.org/officeDocument/2006/relationships" xmlns:mc="http://schemas.openxmlformats.org/markup-compatibility/2006" xmlns:mv="urn:schemas-microsoft-com:mac:vml" xmlns:p="http://schemas.openxmlformats.org/presentationml/2006/main" xmlns:c="http://schemas.openxmlformats.org/drawingml/2006/chart" xmlns:dgm="http://schemas.openxmlformats.org/drawingml/2006/diagram" xmlns:o="urn:schemas-microsoft-com:office:office" xmlns:v="urn:schemas-microsoft-com:vml" xmlns:pvml="urn:schemas-microsoft-com:office:powerpoint" xmlns:com="http://schemas.openxmlformats.org/drawingml/2006/compatibility" xmlns:p14="http://schemas.microsoft.com/office/powerpoint/2010/main" xmlns:p15="http://schemas.microsoft.com/office/powerpoint/2012/main" xmlns:ahyp="http://schemas.microsoft.com/office/drawing/2018/hyperlinkcolor">
+<file path=ppt/slides/slide3.xml><?xml version="1.0" encoding="utf-8"?>
+<p:sld xmlns:a="http://schemas.openxmlformats.org/drawingml/2006/main" xmlns:r="http://schemas.openxmlformats.org/officeDocument/2006/relationships" xmlns:p="http://schemas.openxmlformats.org/presentationml/2006/main">
   <p:cSld>
     <p:spTree>
       <p:nvGrpSpPr>
-        <p:cNvPr id="128" name="Shape 128"/>
+        <p:cNvPr id="1" name="Shape 128"/>
         <p:cNvGrpSpPr/>
         <p:nvPr/>
       </p:nvGrpSpPr>
@@ -11480,7 +10943,9 @@
       <p:sp>
         <p:nvSpPr>
           <p:cNvPr id="129" name="Google Shape;129;p16"/>
-          <p:cNvSpPr txBox="1"/>
+          <p:cNvSpPr txBox="1">
+            <a:spLocks noGrp="1"/>
+          </p:cNvSpPr>
           <p:nvPr>
             <p:ph type="title"/>
           </p:nvPr>
@@ -11495,12 +10960,12 @@
           </a:prstGeom>
         </p:spPr>
         <p:txBody>
-          <a:bodyPr anchorCtr="0" anchor="ctr" bIns="0" lIns="0" spcFirstLastPara="1" rIns="0" wrap="square" tIns="0">
+          <a:bodyPr spcFirstLastPara="1" wrap="square" lIns="0" tIns="0" rIns="0" bIns="0" anchor="ctr" anchorCtr="0">
             <a:noAutofit/>
           </a:bodyPr>
           <a:lstStyle/>
           <a:p>
-            <a:pPr indent="0" lvl="0" marL="0" rtl="0" algn="l">
+            <a:pPr marL="0" lvl="0" indent="0" algn="l" rtl="0">
               <a:spcBef>
                 <a:spcPts val="0"/>
               </a:spcBef>
@@ -11520,9 +10985,11 @@
       <p:sp>
         <p:nvSpPr>
           <p:cNvPr id="130" name="Google Shape;130;p16"/>
-          <p:cNvSpPr txBox="1"/>
+          <p:cNvSpPr txBox="1">
+            <a:spLocks noGrp="1"/>
+          </p:cNvSpPr>
           <p:nvPr>
-            <p:ph idx="1" type="body"/>
+            <p:ph type="body" idx="1"/>
           </p:nvPr>
         </p:nvSpPr>
         <p:spPr>
@@ -11535,136 +11002,55 @@
           </a:prstGeom>
         </p:spPr>
         <p:txBody>
-          <a:bodyPr anchorCtr="0" anchor="t" bIns="0" lIns="0" spcFirstLastPara="1" rIns="0" wrap="square" tIns="0">
+          <a:bodyPr spcFirstLastPara="1" wrap="square" lIns="0" tIns="0" rIns="0" bIns="0" anchor="t" anchorCtr="0">
             <a:noAutofit/>
           </a:bodyPr>
           <a:lstStyle/>
           <a:p>
-            <a:pPr indent="0" lvl="0" marL="0" rtl="0" algn="l">
+            <a:pPr marL="0" lvl="0" indent="0">
               <a:lnSpc>
                 <a:spcPct val="100000"/>
               </a:lnSpc>
               <a:spcBef>
                 <a:spcPts val="1400"/>
               </a:spcBef>
-              <a:spcAft>
-                <a:spcPts val="0"/>
-              </a:spcAft>
               <a:buNone/>
             </a:pPr>
             <a:r>
-              <a:rPr lang="en"/>
+              <a:rPr lang="en" dirty="0"/>
               <a:t>Total Variant Visitors: </a:t>
             </a:r>
             <a:r>
-              <a:rPr lang="en">
-                <a:solidFill>
-                  <a:srgbClr val="FF0000"/>
-                </a:solidFill>
-              </a:rPr>
-              <a:t>[The number of variant visitors]</a:t>
+              <a:rPr lang="pt-BR" dirty="0"/>
+              <a:t>35211</a:t>
             </a:r>
-            <a:endParaRPr>
+            <a:endParaRPr dirty="0">
               <a:solidFill>
                 <a:srgbClr val="FF0000"/>
               </a:solidFill>
             </a:endParaRPr>
           </a:p>
           <a:p>
-            <a:pPr indent="0" lvl="0" marL="0" rtl="0" algn="l">
+            <a:pPr marL="0" lvl="0" indent="0">
               <a:lnSpc>
                 <a:spcPct val="100000"/>
               </a:lnSpc>
               <a:spcBef>
                 <a:spcPts val="1400"/>
               </a:spcBef>
-              <a:spcAft>
-                <a:spcPts val="0"/>
-              </a:spcAft>
               <a:buNone/>
             </a:pPr>
             <a:r>
-              <a:rPr lang="en"/>
+              <a:rPr lang="en" dirty="0"/>
               <a:t>Total Control Participants: </a:t>
             </a:r>
             <a:r>
-              <a:rPr lang="en">
-                <a:solidFill>
-                  <a:srgbClr val="FF0000"/>
-                </a:solidFill>
-              </a:rPr>
-              <a:t>[The number of control visitors]</a:t>
+              <a:rPr lang="pt-BR" dirty="0"/>
+              <a:t>34678</a:t>
             </a:r>
-            <a:endParaRPr>
+            <a:endParaRPr dirty="0">
               <a:solidFill>
                 <a:srgbClr val="FF0000"/>
-              </a:solidFill>
-            </a:endParaRPr>
-          </a:p>
-          <a:p>
-            <a:pPr indent="0" lvl="0" marL="0" rtl="0" algn="l">
-              <a:lnSpc>
-                <a:spcPct val="100000"/>
-              </a:lnSpc>
-              <a:spcBef>
-                <a:spcPts val="1400"/>
-              </a:spcBef>
-              <a:spcAft>
-                <a:spcPts val="0"/>
-              </a:spcAft>
-              <a:buNone/>
-            </a:pPr>
-            <a:r>
-              <a:t/>
-            </a:r>
-            <a:endParaRPr/>
-          </a:p>
-          <a:p>
-            <a:pPr indent="0" lvl="0" marL="0" rtl="0" algn="l">
-              <a:lnSpc>
-                <a:spcPct val="100000"/>
-              </a:lnSpc>
-              <a:spcBef>
-                <a:spcPts val="1400"/>
-              </a:spcBef>
-              <a:spcAft>
-                <a:spcPts val="0"/>
-              </a:spcAft>
-              <a:buNone/>
-            </a:pPr>
-            <a:r>
-              <a:rPr lang="en">
-                <a:solidFill>
-                  <a:srgbClr val="FF0000"/>
-                </a:solidFill>
-              </a:rPr>
-              <a:t>[Update the below chart with your chart of where users are from]</a:t>
-            </a:r>
-            <a:endParaRPr>
-              <a:solidFill>
-                <a:srgbClr val="FF0000"/>
-              </a:solidFill>
-            </a:endParaRPr>
-          </a:p>
-          <a:p>
-            <a:pPr indent="0" lvl="0" marL="228600" rtl="0" algn="l">
-              <a:lnSpc>
-                <a:spcPct val="115000"/>
-              </a:lnSpc>
-              <a:spcBef>
-                <a:spcPts val="1400"/>
-              </a:spcBef>
-              <a:spcAft>
-                <a:spcPts val="2000"/>
-              </a:spcAft>
-              <a:buNone/>
-            </a:pPr>
-            <a:r>
-              <a:t/>
-            </a:r>
-            <a:endParaRPr sz="3000">
-              <a:solidFill>
-                <a:srgbClr val="000000"/>
               </a:solidFill>
             </a:endParaRPr>
           </a:p>
@@ -11672,30 +11058,32 @@
       </p:sp>
       <p:pic>
         <p:nvPicPr>
-          <p:cNvPr id="131" name="Google Shape;131;p16"/>
-          <p:cNvPicPr preferRelativeResize="0"/>
+          <p:cNvPr id="3" name="Imagem 2">
+            <a:extLst>
+              <a:ext uri="{FF2B5EF4-FFF2-40B4-BE49-F238E27FC236}">
+                <a16:creationId xmlns:a16="http://schemas.microsoft.com/office/drawing/2014/main" id="{7FAA6AC6-CACF-ACB4-A92F-DE0DB0ED6059}"/>
+              </a:ext>
+            </a:extLst>
+          </p:cNvPr>
+          <p:cNvPicPr>
+            <a:picLocks noChangeAspect="1"/>
+          </p:cNvPicPr>
           <p:nvPr/>
         </p:nvPicPr>
         <p:blipFill>
-          <a:blip r:embed="rId3">
-            <a:alphaModFix/>
-          </a:blip>
+          <a:blip r:embed="rId3"/>
           <a:stretch>
             <a:fillRect/>
           </a:stretch>
         </p:blipFill>
         <p:spPr>
           <a:xfrm>
-            <a:off x="4717475" y="4994500"/>
-            <a:ext cx="8853051" cy="3820550"/>
+            <a:off x="6223819" y="4174987"/>
+            <a:ext cx="6102634" cy="4766064"/>
           </a:xfrm>
           <a:prstGeom prst="rect">
             <a:avLst/>
           </a:prstGeom>
-          <a:noFill/>
-          <a:ln>
-            <a:noFill/>
-          </a:ln>
         </p:spPr>
       </p:pic>
     </p:spTree>
@@ -11706,12 +11094,12 @@
 </p:sld>
 </file>
 
-<file path=ppt/slides/slide5.xml><?xml version="1.0" encoding="utf-8"?>
-<p:sld xmlns:a="http://schemas.openxmlformats.org/drawingml/2006/main" xmlns:r="http://schemas.openxmlformats.org/officeDocument/2006/relationships" xmlns:mc="http://schemas.openxmlformats.org/markup-compatibility/2006" xmlns:mv="urn:schemas-microsoft-com:mac:vml" xmlns:p="http://schemas.openxmlformats.org/presentationml/2006/main" xmlns:c="http://schemas.openxmlformats.org/drawingml/2006/chart" xmlns:dgm="http://schemas.openxmlformats.org/drawingml/2006/diagram" xmlns:o="urn:schemas-microsoft-com:office:office" xmlns:v="urn:schemas-microsoft-com:vml" xmlns:pvml="urn:schemas-microsoft-com:office:powerpoint" xmlns:com="http://schemas.openxmlformats.org/drawingml/2006/compatibility" xmlns:p14="http://schemas.microsoft.com/office/powerpoint/2010/main" xmlns:p15="http://schemas.microsoft.com/office/powerpoint/2012/main" xmlns:ahyp="http://schemas.microsoft.com/office/drawing/2018/hyperlinkcolor">
+<file path=ppt/slides/slide4.xml><?xml version="1.0" encoding="utf-8"?>
+<p:sld xmlns:a="http://schemas.openxmlformats.org/drawingml/2006/main" xmlns:r="http://schemas.openxmlformats.org/officeDocument/2006/relationships" xmlns:p="http://schemas.openxmlformats.org/presentationml/2006/main">
   <p:cSld>
     <p:spTree>
       <p:nvGrpSpPr>
-        <p:cNvPr id="135" name="Shape 135"/>
+        <p:cNvPr id="1" name="Shape 135"/>
         <p:cNvGrpSpPr/>
         <p:nvPr/>
       </p:nvGrpSpPr>
@@ -11726,7 +11114,9 @@
       <p:sp>
         <p:nvSpPr>
           <p:cNvPr id="136" name="Google Shape;136;p17"/>
-          <p:cNvSpPr txBox="1"/>
+          <p:cNvSpPr txBox="1">
+            <a:spLocks noGrp="1"/>
+          </p:cNvSpPr>
           <p:nvPr>
             <p:ph type="title"/>
           </p:nvPr>
@@ -11741,12 +11131,12 @@
           </a:prstGeom>
         </p:spPr>
         <p:txBody>
-          <a:bodyPr anchorCtr="0" anchor="ctr" bIns="0" lIns="0" spcFirstLastPara="1" rIns="0" wrap="square" tIns="0">
+          <a:bodyPr spcFirstLastPara="1" wrap="square" lIns="0" tIns="0" rIns="0" bIns="0" anchor="ctr" anchorCtr="0">
             <a:noAutofit/>
           </a:bodyPr>
           <a:lstStyle/>
           <a:p>
-            <a:pPr indent="0" lvl="0" marL="0" rtl="0" algn="l">
+            <a:pPr marL="0" lvl="0" indent="0" algn="l" rtl="0">
               <a:spcBef>
                 <a:spcPts val="0"/>
               </a:spcBef>
@@ -11757,11 +11147,7 @@
             </a:pPr>
             <a:r>
               <a:rPr lang="en" sz="6400"/>
-              <a:t>Conversion</a:t>
-            </a:r>
-            <a:r>
-              <a:rPr lang="en" sz="6400"/>
-              <a:t> Rates</a:t>
+              <a:t>Conversion Rates</a:t>
             </a:r>
             <a:endParaRPr sz="6400"/>
           </a:p>
@@ -11770,27 +11156,29 @@
       <p:sp>
         <p:nvSpPr>
           <p:cNvPr id="137" name="Google Shape;137;p17"/>
-          <p:cNvSpPr txBox="1"/>
+          <p:cNvSpPr txBox="1">
+            <a:spLocks noGrp="1"/>
+          </p:cNvSpPr>
           <p:nvPr>
-            <p:ph idx="1" type="body"/>
+            <p:ph type="body" idx="1"/>
           </p:nvPr>
         </p:nvSpPr>
         <p:spPr>
           <a:xfrm>
-            <a:off x="947100" y="5878275"/>
-            <a:ext cx="16393800" cy="2580000"/>
+            <a:off x="947100" y="5314951"/>
+            <a:ext cx="16393800" cy="3693428"/>
           </a:xfrm>
           <a:prstGeom prst="rect">
             <a:avLst/>
           </a:prstGeom>
         </p:spPr>
         <p:txBody>
-          <a:bodyPr anchorCtr="0" anchor="t" bIns="0" lIns="0" spcFirstLastPara="1" rIns="0" wrap="square" tIns="0">
+          <a:bodyPr spcFirstLastPara="1" wrap="square" lIns="0" tIns="0" rIns="0" bIns="0" anchor="t" anchorCtr="0">
             <a:noAutofit/>
           </a:bodyPr>
           <a:lstStyle/>
           <a:p>
-            <a:pPr indent="0" lvl="0" marL="0" rtl="0" algn="l">
+            <a:pPr marL="0" lvl="0" indent="0" algn="l" rtl="0">
               <a:lnSpc>
                 <a:spcPct val="100000"/>
               </a:lnSpc>
@@ -11803,7 +11191,7 @@
               <a:buNone/>
             </a:pPr>
             <a:r>
-              <a:rPr lang="en">
+              <a:rPr lang="en" dirty="0">
                 <a:solidFill>
                   <a:schemeClr val="accent1"/>
                 </a:solidFill>
@@ -11811,38 +11199,46 @@
               <a:t>Executive Summary: </a:t>
             </a:r>
             <a:r>
-              <a:rPr lang="en">
+              <a:rPr lang="en-US" dirty="0">
                 <a:solidFill>
                   <a:srgbClr val="FF0000"/>
                 </a:solidFill>
               </a:rPr>
-              <a:t>[What do these probabilities suggest in how the `Treatment` or `Country` are associated with conversion rates?]</a:t>
+              <a:t> </a:t>
             </a:r>
-            <a:endParaRPr>
-              <a:solidFill>
-                <a:srgbClr val="FF0000"/>
-              </a:solidFill>
-            </a:endParaRPr>
+            <a:r>
+              <a:rPr lang="en-US" dirty="0">
+                <a:solidFill>
+                  <a:schemeClr val="tx1"/>
+                </a:solidFill>
+              </a:rPr>
+              <a:t>The treatment group consistently outperforms the control across all countries, with ~5 percentage points higher conversion rates. Country of origin has minimal impact on conversion. </a:t>
+            </a:r>
           </a:p>
           <a:p>
-            <a:pPr indent="0" lvl="0" marL="228600" rtl="0" algn="l">
+            <a:pPr marL="0" lvl="0" indent="0" algn="l" rtl="0">
               <a:lnSpc>
-                <a:spcPct val="115000"/>
+                <a:spcPct val="100000"/>
               </a:lnSpc>
               <a:spcBef>
                 <a:spcPts val="1400"/>
               </a:spcBef>
               <a:spcAft>
-                <a:spcPts val="2000"/>
+                <a:spcPts val="0"/>
               </a:spcAft>
               <a:buNone/>
             </a:pPr>
             <a:r>
-              <a:t/>
+              <a:rPr lang="en-US" dirty="0">
+                <a:solidFill>
+                  <a:schemeClr val="tx1"/>
+                </a:solidFill>
+              </a:rPr>
+              <a:t>Group assignment (treatment vs. control) is a stronger predictor of conversion than country. These results suggest the treatment page leads to meaningfully higher conversion rates.</a:t>
             </a:r>
-            <a:endParaRPr sz="3000">
+            <a:endParaRPr sz="3000" dirty="0">
               <a:solidFill>
-                <a:srgbClr val="000000"/>
+                <a:schemeClr val="tx1"/>
               </a:solidFill>
             </a:endParaRPr>
           </a:p>
@@ -11852,11 +11248,17 @@
         <p:nvGraphicFramePr>
           <p:cNvPr id="138" name="Google Shape;138;p17"/>
           <p:cNvGraphicFramePr/>
-          <p:nvPr/>
+          <p:nvPr>
+            <p:extLst>
+              <p:ext uri="{D42A27DB-BD31-4B8C-83A1-F6EECF244321}">
+                <p14:modId xmlns:p14="http://schemas.microsoft.com/office/powerpoint/2010/main" val="2021520466"/>
+              </p:ext>
+            </p:extLst>
+          </p:nvPr>
         </p:nvGraphicFramePr>
         <p:xfrm>
           <a:off x="952500" y="2028150"/>
-          <a:ext cx="3000000" cy="3000000"/>
+          <a:ext cx="16383000" cy="2943900"/>
         </p:xfrm>
         <a:graphic>
           <a:graphicData uri="http://schemas.openxmlformats.org/drawingml/2006/table">
@@ -11866,10 +11268,34 @@
                 <a:tableStyleId>{E1C8DA9E-B1A0-4A86-91D4-0D2497F3468D}</a:tableStyleId>
               </a:tblPr>
               <a:tblGrid>
-                <a:gridCol w="4095750"/>
-                <a:gridCol w="4095750"/>
-                <a:gridCol w="4095750"/>
-                <a:gridCol w="4095750"/>
+                <a:gridCol w="4095750">
+                  <a:extLst>
+                    <a:ext uri="{9D8B030D-6E8A-4147-A177-3AD203B41FA5}">
+                      <a16:colId xmlns:a16="http://schemas.microsoft.com/office/drawing/2014/main" val="20000"/>
+                    </a:ext>
+                  </a:extLst>
+                </a:gridCol>
+                <a:gridCol w="4095750">
+                  <a:extLst>
+                    <a:ext uri="{9D8B030D-6E8A-4147-A177-3AD203B41FA5}">
+                      <a16:colId xmlns:a16="http://schemas.microsoft.com/office/drawing/2014/main" val="20001"/>
+                    </a:ext>
+                  </a:extLst>
+                </a:gridCol>
+                <a:gridCol w="4095750">
+                  <a:extLst>
+                    <a:ext uri="{9D8B030D-6E8A-4147-A177-3AD203B41FA5}">
+                      <a16:colId xmlns:a16="http://schemas.microsoft.com/office/drawing/2014/main" val="20002"/>
+                    </a:ext>
+                  </a:extLst>
+                </a:gridCol>
+                <a:gridCol w="4095750">
+                  <a:extLst>
+                    <a:ext uri="{9D8B030D-6E8A-4147-A177-3AD203B41FA5}">
+                      <a16:colId xmlns:a16="http://schemas.microsoft.com/office/drawing/2014/main" val="20003"/>
+                    </a:ext>
+                  </a:extLst>
+                </a:gridCol>
               </a:tblGrid>
               <a:tr h="981300">
                 <a:tc>
@@ -11877,7 +11303,7 @@
                     <a:bodyPr/>
                     <a:lstStyle/>
                     <a:p>
-                      <a:pPr indent="0" lvl="0" marL="0" rtl="0" algn="l">
+                      <a:pPr marL="0" lvl="0" indent="0" algn="l" rtl="0">
                         <a:spcBef>
                           <a:spcPts val="0"/>
                         </a:spcBef>
@@ -11886,9 +11312,6 @@
                         </a:spcAft>
                         <a:buNone/>
                       </a:pPr>
-                      <a:r>
-                        <a:t/>
-                      </a:r>
                       <a:endParaRPr sz="2800">
                         <a:latin typeface="Open Sans"/>
                         <a:ea typeface="Open Sans"/>
@@ -11897,7 +11320,7 @@
                       </a:endParaRPr>
                     </a:p>
                   </a:txBody>
-                  <a:tcPr marT="91425" marB="91425" marR="91425" marL="91425" anchor="ctr">
+                  <a:tcPr marL="91425" marR="91425" marT="91425" marB="91425" anchor="ctr">
                     <a:solidFill>
                       <a:srgbClr val="D9D9D9"/>
                     </a:solidFill>
@@ -11908,7 +11331,7 @@
                     <a:bodyPr/>
                     <a:lstStyle/>
                     <a:p>
-                      <a:pPr indent="0" lvl="0" marL="0" rtl="0" algn="l">
+                      <a:pPr marL="0" lvl="0" indent="0" algn="l" rtl="0">
                         <a:spcBef>
                           <a:spcPts val="0"/>
                         </a:spcBef>
@@ -11918,7 +11341,7 @@
                         <a:buNone/>
                       </a:pPr>
                       <a:r>
-                        <a:rPr b="1" lang="en" sz="3200">
+                        <a:rPr lang="en" sz="3200" b="1">
                           <a:latin typeface="Open Sans"/>
                           <a:ea typeface="Open Sans"/>
                           <a:cs typeface="Open Sans"/>
@@ -11926,7 +11349,7 @@
                         </a:rPr>
                         <a:t>U.S.</a:t>
                       </a:r>
-                      <a:endParaRPr b="1" sz="3200">
+                      <a:endParaRPr sz="3200" b="1">
                         <a:latin typeface="Open Sans"/>
                         <a:ea typeface="Open Sans"/>
                         <a:cs typeface="Open Sans"/>
@@ -11934,7 +11357,7 @@
                       </a:endParaRPr>
                     </a:p>
                   </a:txBody>
-                  <a:tcPr marT="91425" marB="91425" marR="91425" marL="91425" anchor="ctr">
+                  <a:tcPr marL="91425" marR="91425" marT="91425" marB="91425" anchor="ctr">
                     <a:solidFill>
                       <a:srgbClr val="D9D9D9"/>
                     </a:solidFill>
@@ -11945,7 +11368,7 @@
                     <a:bodyPr/>
                     <a:lstStyle/>
                     <a:p>
-                      <a:pPr indent="0" lvl="0" marL="0" rtl="0" algn="l">
+                      <a:pPr marL="0" lvl="0" indent="0" algn="l" rtl="0">
                         <a:spcBef>
                           <a:spcPts val="0"/>
                         </a:spcBef>
@@ -11955,7 +11378,7 @@
                         <a:buNone/>
                       </a:pPr>
                       <a:r>
-                        <a:rPr b="1" lang="en" sz="3200">
+                        <a:rPr lang="en" sz="3200" b="1">
                           <a:latin typeface="Open Sans"/>
                           <a:ea typeface="Open Sans"/>
                           <a:cs typeface="Open Sans"/>
@@ -11963,7 +11386,7 @@
                         </a:rPr>
                         <a:t>U.K.</a:t>
                       </a:r>
-                      <a:endParaRPr b="1" sz="3200">
+                      <a:endParaRPr sz="3200" b="1">
                         <a:latin typeface="Open Sans"/>
                         <a:ea typeface="Open Sans"/>
                         <a:cs typeface="Open Sans"/>
@@ -11971,7 +11394,7 @@
                       </a:endParaRPr>
                     </a:p>
                   </a:txBody>
-                  <a:tcPr marT="91425" marB="91425" marR="91425" marL="91425" anchor="ctr">
+                  <a:tcPr marL="91425" marR="91425" marT="91425" marB="91425" anchor="ctr">
                     <a:solidFill>
                       <a:srgbClr val="D9D9D9"/>
                     </a:solidFill>
@@ -11982,7 +11405,7 @@
                     <a:bodyPr/>
                     <a:lstStyle/>
                     <a:p>
-                      <a:pPr indent="0" lvl="0" marL="0" rtl="0" algn="l">
+                      <a:pPr marL="0" lvl="0" indent="0" algn="l" rtl="0">
                         <a:spcBef>
                           <a:spcPts val="0"/>
                         </a:spcBef>
@@ -11992,7 +11415,7 @@
                         <a:buNone/>
                       </a:pPr>
                       <a:r>
-                        <a:rPr b="1" lang="en" sz="3200">
+                        <a:rPr lang="en" sz="3200" b="1">
                           <a:latin typeface="Open Sans"/>
                           <a:ea typeface="Open Sans"/>
                           <a:cs typeface="Open Sans"/>
@@ -12000,7 +11423,7 @@
                         </a:rPr>
                         <a:t>CA</a:t>
                       </a:r>
-                      <a:endParaRPr b="1" sz="3200">
+                      <a:endParaRPr sz="3200" b="1">
                         <a:latin typeface="Open Sans"/>
                         <a:ea typeface="Open Sans"/>
                         <a:cs typeface="Open Sans"/>
@@ -12008,12 +11431,17 @@
                       </a:endParaRPr>
                     </a:p>
                   </a:txBody>
-                  <a:tcPr marT="91425" marB="91425" marR="91425" marL="91425" anchor="ctr">
+                  <a:tcPr marL="91425" marR="91425" marT="91425" marB="91425" anchor="ctr">
                     <a:solidFill>
                       <a:srgbClr val="D9D9D9"/>
                     </a:solidFill>
                   </a:tcPr>
                 </a:tc>
+                <a:extLst>
+                  <a:ext uri="{0D108BD9-81ED-4DB2-BD59-A6C34878D82A}">
+                    <a16:rowId xmlns:a16="http://schemas.microsoft.com/office/drawing/2014/main" val="10000"/>
+                  </a:ext>
+                </a:extLst>
               </a:tr>
               <a:tr h="981300">
                 <a:tc>
@@ -12021,7 +11449,7 @@
                     <a:bodyPr/>
                     <a:lstStyle/>
                     <a:p>
-                      <a:pPr indent="0" lvl="0" marL="0" rtl="0" algn="l">
+                      <a:pPr marL="0" lvl="0" indent="0" algn="l" rtl="0">
                         <a:spcBef>
                           <a:spcPts val="0"/>
                         </a:spcBef>
@@ -12031,7 +11459,7 @@
                         <a:buNone/>
                       </a:pPr>
                       <a:r>
-                        <a:rPr b="1" lang="en" sz="3200">
+                        <a:rPr lang="en" sz="3200" b="1">
                           <a:latin typeface="Open Sans"/>
                           <a:ea typeface="Open Sans"/>
                           <a:cs typeface="Open Sans"/>
@@ -12039,7 +11467,7 @@
                         </a:rPr>
                         <a:t>Control</a:t>
                       </a:r>
-                      <a:endParaRPr b="1" sz="3200">
+                      <a:endParaRPr sz="3200" b="1">
                         <a:latin typeface="Open Sans"/>
                         <a:ea typeface="Open Sans"/>
                         <a:cs typeface="Open Sans"/>
@@ -12047,7 +11475,7 @@
                       </a:endParaRPr>
                     </a:p>
                   </a:txBody>
-                  <a:tcPr marT="91425" marB="91425" marR="91425" marL="91425" anchor="ctr">
+                  <a:tcPr marL="91425" marR="91425" marT="91425" marB="91425" anchor="ctr">
                     <a:solidFill>
                       <a:srgbClr val="D9D9D9"/>
                     </a:solidFill>
@@ -12058,7 +11486,7 @@
                     <a:bodyPr/>
                     <a:lstStyle/>
                     <a:p>
-                      <a:pPr indent="0" lvl="0" marL="0" rtl="0" algn="l">
+                      <a:pPr marL="0" lvl="0" indent="0" algn="ctr" rtl="0">
                         <a:spcBef>
                           <a:spcPts val="0"/>
                         </a:spcBef>
@@ -12068,7 +11496,7 @@
                         <a:buNone/>
                       </a:pPr>
                       <a:r>
-                        <a:rPr lang="en" sz="2800">
+                        <a:rPr lang="en" sz="2800" dirty="0">
                           <a:solidFill>
                             <a:srgbClr val="FF0000"/>
                           </a:solidFill>
@@ -12077,9 +11505,9 @@
                           <a:cs typeface="Open Sans"/>
                           <a:sym typeface="Open Sans"/>
                         </a:rPr>
-                        <a:t>Your Values Here</a:t>
+                        <a:t>10.7% </a:t>
                       </a:r>
-                      <a:endParaRPr sz="2800">
+                      <a:endParaRPr sz="2800" dirty="0">
                         <a:solidFill>
                           <a:srgbClr val="FF0000"/>
                         </a:solidFill>
@@ -12090,14 +11518,14 @@
                       </a:endParaRPr>
                     </a:p>
                   </a:txBody>
-                  <a:tcPr marT="91425" marB="91425" marR="91425" marL="91425" anchor="ctr"/>
+                  <a:tcPr marL="91425" marR="91425" marT="91425" marB="91425" anchor="ctr"/>
                 </a:tc>
                 <a:tc>
                   <a:txBody>
                     <a:bodyPr/>
                     <a:lstStyle/>
                     <a:p>
-                      <a:pPr indent="0" lvl="0" marL="0" rtl="0" algn="l">
+                      <a:pPr marL="0" lvl="0" indent="0" algn="ctr" rtl="0">
                         <a:spcBef>
                           <a:spcPts val="0"/>
                         </a:spcBef>
@@ -12107,7 +11535,7 @@
                         <a:buNone/>
                       </a:pPr>
                       <a:r>
-                        <a:rPr lang="en" sz="2800">
+                        <a:rPr lang="pt-BR" sz="2800" dirty="0">
                           <a:solidFill>
                             <a:srgbClr val="FF0000"/>
                           </a:solidFill>
@@ -12116,9 +11544,9 @@
                           <a:cs typeface="Open Sans"/>
                           <a:sym typeface="Open Sans"/>
                         </a:rPr>
-                        <a:t>Your Values Here</a:t>
+                        <a:t>10.16%</a:t>
                       </a:r>
-                      <a:endParaRPr sz="2800">
+                      <a:endParaRPr sz="2800" dirty="0">
                         <a:solidFill>
                           <a:srgbClr val="FF0000"/>
                         </a:solidFill>
@@ -12129,14 +11557,14 @@
                       </a:endParaRPr>
                     </a:p>
                   </a:txBody>
-                  <a:tcPr marT="91425" marB="91425" marR="91425" marL="91425" anchor="ctr"/>
+                  <a:tcPr marL="91425" marR="91425" marT="91425" marB="91425" anchor="ctr"/>
                 </a:tc>
                 <a:tc>
                   <a:txBody>
                     <a:bodyPr/>
                     <a:lstStyle/>
                     <a:p>
-                      <a:pPr indent="0" lvl="0" marL="0" rtl="0" algn="l">
+                      <a:pPr marL="0" lvl="0" indent="0" algn="ctr" rtl="0">
                         <a:spcBef>
                           <a:spcPts val="0"/>
                         </a:spcBef>
@@ -12146,7 +11574,7 @@
                         <a:buNone/>
                       </a:pPr>
                       <a:r>
-                        <a:rPr lang="en" sz="2800">
+                        <a:rPr lang="pt-BR" sz="2800" dirty="0">
                           <a:solidFill>
                             <a:srgbClr val="FF0000"/>
                           </a:solidFill>
@@ -12155,9 +11583,9 @@
                           <a:cs typeface="Open Sans"/>
                           <a:sym typeface="Open Sans"/>
                         </a:rPr>
-                        <a:t>Your Values Here</a:t>
+                        <a:t>9.44%</a:t>
                       </a:r>
-                      <a:endParaRPr sz="2800">
+                      <a:endParaRPr sz="2800" dirty="0">
                         <a:solidFill>
                           <a:srgbClr val="FF0000"/>
                         </a:solidFill>
@@ -12168,8 +11596,13 @@
                       </a:endParaRPr>
                     </a:p>
                   </a:txBody>
-                  <a:tcPr marT="91425" marB="91425" marR="91425" marL="91425" anchor="ctr"/>
+                  <a:tcPr marL="91425" marR="91425" marT="91425" marB="91425" anchor="ctr"/>
                 </a:tc>
+                <a:extLst>
+                  <a:ext uri="{0D108BD9-81ED-4DB2-BD59-A6C34878D82A}">
+                    <a16:rowId xmlns:a16="http://schemas.microsoft.com/office/drawing/2014/main" val="10001"/>
+                  </a:ext>
+                </a:extLst>
               </a:tr>
               <a:tr h="981300">
                 <a:tc>
@@ -12177,7 +11610,7 @@
                     <a:bodyPr/>
                     <a:lstStyle/>
                     <a:p>
-                      <a:pPr indent="0" lvl="0" marL="0" rtl="0" algn="l">
+                      <a:pPr marL="0" lvl="0" indent="0" algn="l" rtl="0">
                         <a:spcBef>
                           <a:spcPts val="0"/>
                         </a:spcBef>
@@ -12187,7 +11620,7 @@
                         <a:buNone/>
                       </a:pPr>
                       <a:r>
-                        <a:rPr b="1" lang="en" sz="3200">
+                        <a:rPr lang="en" sz="3200" b="1">
                           <a:latin typeface="Open Sans"/>
                           <a:ea typeface="Open Sans"/>
                           <a:cs typeface="Open Sans"/>
@@ -12195,7 +11628,7 @@
                         </a:rPr>
                         <a:t>Treatment</a:t>
                       </a:r>
-                      <a:endParaRPr b="1" sz="3200">
+                      <a:endParaRPr sz="3200" b="1">
                         <a:latin typeface="Open Sans"/>
                         <a:ea typeface="Open Sans"/>
                         <a:cs typeface="Open Sans"/>
@@ -12203,7 +11636,7 @@
                       </a:endParaRPr>
                     </a:p>
                   </a:txBody>
-                  <a:tcPr marT="91425" marB="91425" marR="91425" marL="91425" anchor="ctr">
+                  <a:tcPr marL="91425" marR="91425" marT="91425" marB="91425" anchor="ctr">
                     <a:solidFill>
                       <a:srgbClr val="D9D9D9"/>
                     </a:solidFill>
@@ -12214,7 +11647,7 @@
                     <a:bodyPr/>
                     <a:lstStyle/>
                     <a:p>
-                      <a:pPr indent="0" lvl="0" marL="0" rtl="0" algn="l">
+                      <a:pPr marL="0" lvl="0" indent="0" algn="ctr" rtl="0">
                         <a:spcBef>
                           <a:spcPts val="0"/>
                         </a:spcBef>
@@ -12224,7 +11657,7 @@
                         <a:buNone/>
                       </a:pPr>
                       <a:r>
-                        <a:rPr lang="en" sz="2800">
+                        <a:rPr lang="en" sz="2800" dirty="0">
                           <a:solidFill>
                             <a:srgbClr val="FF0000"/>
                           </a:solidFill>
@@ -12233,9 +11666,9 @@
                           <a:cs typeface="Open Sans"/>
                           <a:sym typeface="Open Sans"/>
                         </a:rPr>
-                        <a:t>Your Values Here</a:t>
+                        <a:t>15.8%</a:t>
                       </a:r>
-                      <a:endParaRPr sz="2800">
+                      <a:endParaRPr sz="2800" dirty="0">
                         <a:solidFill>
                           <a:srgbClr val="FF0000"/>
                         </a:solidFill>
@@ -12246,14 +11679,14 @@
                       </a:endParaRPr>
                     </a:p>
                   </a:txBody>
-                  <a:tcPr marT="91425" marB="91425" marR="91425" marL="91425" anchor="ctr"/>
+                  <a:tcPr marL="91425" marR="91425" marT="91425" marB="91425" anchor="ctr"/>
                 </a:tc>
                 <a:tc>
                   <a:txBody>
                     <a:bodyPr/>
                     <a:lstStyle/>
                     <a:p>
-                      <a:pPr indent="0" lvl="0" marL="0" rtl="0" algn="l">
+                      <a:pPr marL="0" lvl="0" indent="0" algn="ctr" rtl="0">
                         <a:spcBef>
                           <a:spcPts val="0"/>
                         </a:spcBef>
@@ -12263,7 +11696,7 @@
                         <a:buNone/>
                       </a:pPr>
                       <a:r>
-                        <a:rPr lang="en" sz="2800">
+                        <a:rPr lang="pt-BR" sz="2800" dirty="0">
                           <a:solidFill>
                             <a:srgbClr val="FF0000"/>
                           </a:solidFill>
@@ -12272,9 +11705,9 @@
                           <a:cs typeface="Open Sans"/>
                           <a:sym typeface="Open Sans"/>
                         </a:rPr>
-                        <a:t>Your Values Here</a:t>
+                        <a:t>14.87%</a:t>
                       </a:r>
-                      <a:endParaRPr sz="2800">
+                      <a:endParaRPr sz="2800" dirty="0">
                         <a:solidFill>
                           <a:srgbClr val="FF0000"/>
                         </a:solidFill>
@@ -12285,14 +11718,14 @@
                       </a:endParaRPr>
                     </a:p>
                   </a:txBody>
-                  <a:tcPr marT="91425" marB="91425" marR="91425" marL="91425" anchor="ctr"/>
+                  <a:tcPr marL="91425" marR="91425" marT="91425" marB="91425" anchor="ctr"/>
                 </a:tc>
                 <a:tc>
                   <a:txBody>
                     <a:bodyPr/>
                     <a:lstStyle/>
                     <a:p>
-                      <a:pPr indent="0" lvl="0" marL="0" rtl="0" algn="l">
+                      <a:pPr marL="0" lvl="0" indent="0" algn="ctr" rtl="0">
                         <a:spcBef>
                           <a:spcPts val="0"/>
                         </a:spcBef>
@@ -12302,7 +11735,7 @@
                         <a:buNone/>
                       </a:pPr>
                       <a:r>
-                        <a:rPr lang="en" sz="2800">
+                        <a:rPr lang="pt-BR" sz="2800" dirty="0">
                           <a:solidFill>
                             <a:srgbClr val="FF0000"/>
                           </a:solidFill>
@@ -12311,9 +11744,9 @@
                           <a:cs typeface="Open Sans"/>
                           <a:sym typeface="Open Sans"/>
                         </a:rPr>
-                        <a:t>Your Values Here</a:t>
+                        <a:t>15.40%</a:t>
                       </a:r>
-                      <a:endParaRPr sz="2800">
+                      <a:endParaRPr sz="2800" dirty="0">
                         <a:solidFill>
                           <a:srgbClr val="FF0000"/>
                         </a:solidFill>
@@ -12324,8 +11757,13 @@
                       </a:endParaRPr>
                     </a:p>
                   </a:txBody>
-                  <a:tcPr marT="91425" marB="91425" marR="91425" marL="91425" anchor="ctr"/>
+                  <a:tcPr marL="91425" marR="91425" marT="91425" marB="91425" anchor="ctr"/>
                 </a:tc>
+                <a:extLst>
+                  <a:ext uri="{0D108BD9-81ED-4DB2-BD59-A6C34878D82A}">
+                    <a16:rowId xmlns:a16="http://schemas.microsoft.com/office/drawing/2014/main" val="10002"/>
+                  </a:ext>
+                </a:extLst>
               </a:tr>
             </a:tbl>
           </a:graphicData>
@@ -12339,12 +11777,12 @@
 </p:sld>
 </file>
 
-<file path=ppt/slides/slide6.xml><?xml version="1.0" encoding="utf-8"?>
-<p:sld xmlns:a="http://schemas.openxmlformats.org/drawingml/2006/main" xmlns:r="http://schemas.openxmlformats.org/officeDocument/2006/relationships" xmlns:mc="http://schemas.openxmlformats.org/markup-compatibility/2006" xmlns:mv="urn:schemas-microsoft-com:mac:vml" xmlns:p="http://schemas.openxmlformats.org/presentationml/2006/main" xmlns:c="http://schemas.openxmlformats.org/drawingml/2006/chart" xmlns:dgm="http://schemas.openxmlformats.org/drawingml/2006/diagram" xmlns:o="urn:schemas-microsoft-com:office:office" xmlns:v="urn:schemas-microsoft-com:vml" xmlns:pvml="urn:schemas-microsoft-com:office:powerpoint" xmlns:com="http://schemas.openxmlformats.org/drawingml/2006/compatibility" xmlns:p14="http://schemas.microsoft.com/office/powerpoint/2010/main" xmlns:p15="http://schemas.microsoft.com/office/powerpoint/2012/main" xmlns:ahyp="http://schemas.microsoft.com/office/drawing/2018/hyperlinkcolor">
+<file path=ppt/slides/slide5.xml><?xml version="1.0" encoding="utf-8"?>
+<p:sld xmlns:a="http://schemas.openxmlformats.org/drawingml/2006/main" xmlns:r="http://schemas.openxmlformats.org/officeDocument/2006/relationships" xmlns:p="http://schemas.openxmlformats.org/presentationml/2006/main">
   <p:cSld>
     <p:spTree>
       <p:nvGrpSpPr>
-        <p:cNvPr id="142" name="Shape 142"/>
+        <p:cNvPr id="1" name="Shape 142"/>
         <p:cNvGrpSpPr/>
         <p:nvPr/>
       </p:nvGrpSpPr>
@@ -12359,7 +11797,9 @@
       <p:sp>
         <p:nvSpPr>
           <p:cNvPr id="143" name="Google Shape;143;p18"/>
-          <p:cNvSpPr txBox="1"/>
+          <p:cNvSpPr txBox="1">
+            <a:spLocks noGrp="1"/>
+          </p:cNvSpPr>
           <p:nvPr>
             <p:ph type="title"/>
           </p:nvPr>
@@ -12374,12 +11814,12 @@
           </a:prstGeom>
         </p:spPr>
         <p:txBody>
-          <a:bodyPr anchorCtr="0" anchor="ctr" bIns="0" lIns="0" spcFirstLastPara="1" rIns="0" wrap="square" tIns="0">
+          <a:bodyPr spcFirstLastPara="1" wrap="square" lIns="0" tIns="0" rIns="0" bIns="0" anchor="ctr" anchorCtr="0">
             <a:noAutofit/>
           </a:bodyPr>
           <a:lstStyle/>
           <a:p>
-            <a:pPr indent="0" lvl="0" marL="0" rtl="0" algn="l">
+            <a:pPr marL="0" lvl="0" indent="0" algn="l" rtl="0">
               <a:spcBef>
                 <a:spcPts val="0"/>
               </a:spcBef>
@@ -12399,9 +11839,11 @@
       <p:sp>
         <p:nvSpPr>
           <p:cNvPr id="144" name="Google Shape;144;p18"/>
-          <p:cNvSpPr txBox="1"/>
+          <p:cNvSpPr txBox="1">
+            <a:spLocks noGrp="1"/>
+          </p:cNvSpPr>
           <p:nvPr>
-            <p:ph idx="1" type="body"/>
+            <p:ph type="body" idx="1"/>
           </p:nvPr>
         </p:nvSpPr>
         <p:spPr>
@@ -12414,26 +11856,18 @@
           </a:prstGeom>
         </p:spPr>
         <p:txBody>
-          <a:bodyPr anchorCtr="0" anchor="t" bIns="0" lIns="0" spcFirstLastPara="1" rIns="0" wrap="square" tIns="0">
+          <a:bodyPr spcFirstLastPara="1" wrap="square" lIns="0" tIns="0" rIns="0" bIns="0" anchor="t" anchorCtr="0">
             <a:noAutofit/>
           </a:bodyPr>
           <a:lstStyle/>
           <a:p>
-            <a:pPr indent="-457200" lvl="0" marL="457200" rtl="0" algn="l">
+            <a:pPr lvl="0">
               <a:lnSpc>
                 <a:spcPct val="100000"/>
               </a:lnSpc>
-              <a:spcBef>
-                <a:spcPts val="0"/>
-              </a:spcBef>
-              <a:spcAft>
-                <a:spcPts val="0"/>
-              </a:spcAft>
-              <a:buSzPts val="3600"/>
-              <a:buChar char="●"/>
             </a:pPr>
             <a:r>
-              <a:rPr lang="en">
+              <a:rPr lang="en" dirty="0">
                 <a:solidFill>
                   <a:srgbClr val="0B0B0B"/>
                 </a:solidFill>
@@ -12441,57 +11875,79 @@
               <a:t>Treatment Conversion Rate: </a:t>
             </a:r>
             <a:r>
-              <a:rPr lang="en">
-                <a:solidFill>
-                  <a:srgbClr val="FF0000"/>
+              <a:rPr lang="pt-BR" dirty="0"/>
+              <a:t>15.53%</a:t>
+            </a:r>
+          </a:p>
+          <a:p>
+            <a:pPr lvl="0">
+              <a:lnSpc>
+                <a:spcPct val="100000"/>
+              </a:lnSpc>
+            </a:pPr>
+            <a:r>
+              <a:rPr lang="en" dirty="0">
+                <a:solidFill>
+                  <a:srgbClr val="0B0B0B"/>
                 </a:solidFill>
               </a:rPr>
-              <a:t>[Treatment Conversion Rate]</a:t>
+              <a:t>Control Conversion Rate:​ </a:t>
             </a:r>
-            <a:endParaRPr>
+            <a:r>
+              <a:rPr lang="pt-BR" dirty="0"/>
+              <a:t>10.53%</a:t>
+            </a:r>
+            <a:endParaRPr dirty="0">
               <a:solidFill>
                 <a:srgbClr val="FF0000"/>
               </a:solidFill>
             </a:endParaRPr>
           </a:p>
           <a:p>
-            <a:pPr indent="-457200" lvl="0" marL="457200" rtl="0" algn="l">
+            <a:pPr lvl="0">
               <a:lnSpc>
                 <a:spcPct val="100000"/>
               </a:lnSpc>
-              <a:spcBef>
-                <a:spcPts val="0"/>
-              </a:spcBef>
-              <a:spcAft>
-                <a:spcPts val="0"/>
-              </a:spcAft>
-              <a:buSzPts val="3600"/>
-              <a:buChar char="●"/>
             </a:pPr>
             <a:r>
-              <a:rPr lang="en">
+              <a:rPr lang="en" dirty="0">
                 <a:solidFill>
                   <a:srgbClr val="0B0B0B"/>
                 </a:solidFill>
               </a:rPr>
-              <a:t>Control Conversion Rate:​ </a:t>
+              <a:t>Delta in Treatment vs. Control Conversion Rate:​ </a:t>
             </a:r>
             <a:r>
-              <a:rPr lang="en">
-                <a:solidFill>
-                  <a:srgbClr val="FF0000"/>
+              <a:rPr lang="pt-BR" dirty="0"/>
+              <a:t>+5.00 pp</a:t>
+            </a:r>
+          </a:p>
+          <a:p>
+            <a:pPr lvl="0">
+              <a:lnSpc>
+                <a:spcPct val="100000"/>
+              </a:lnSpc>
+            </a:pPr>
+            <a:r>
+              <a:rPr lang="en" dirty="0">
+                <a:solidFill>
+                  <a:srgbClr val="0B0B0B"/>
                 </a:solidFill>
               </a:rPr>
-              <a:t>[Control Conversion Rate]</a:t>
+              <a:t>p-value:​ </a:t>
             </a:r>
-            <a:endParaRPr>
+            <a:r>
+              <a:rPr lang="pt-BR" dirty="0"/>
+              <a:t>≈ 0.00</a:t>
+            </a:r>
+            <a:endParaRPr dirty="0">
               <a:solidFill>
                 <a:srgbClr val="FF0000"/>
               </a:solidFill>
             </a:endParaRPr>
           </a:p>
           <a:p>
-            <a:pPr indent="-457200" lvl="0" marL="457200" rtl="0" algn="l">
+            <a:pPr marL="457200" lvl="0" indent="-457200" algn="l" rtl="0">
               <a:lnSpc>
                 <a:spcPct val="100000"/>
               </a:lnSpc>
@@ -12505,107 +11961,30 @@
               <a:buChar char="●"/>
             </a:pPr>
             <a:r>
-              <a:rPr lang="en">
-                <a:solidFill>
-                  <a:srgbClr val="0B0B0B"/>
-                </a:solidFill>
-              </a:rPr>
-              <a:t>Delta in Treatment vs. Control Conversion Rate:​ </a:t>
-            </a:r>
-            <a:r>
-              <a:rPr lang="en">
-                <a:solidFill>
-                  <a:srgbClr val="FF0000"/>
-                </a:solidFill>
-              </a:rPr>
-              <a:t>[Difference in Rates]</a:t>
-            </a:r>
-            <a:endParaRPr>
-              <a:solidFill>
-                <a:srgbClr val="FF0000"/>
-              </a:solidFill>
-            </a:endParaRPr>
-          </a:p>
-          <a:p>
-            <a:pPr indent="-457200" lvl="0" marL="457200" rtl="0" algn="l">
-              <a:lnSpc>
-                <a:spcPct val="100000"/>
-              </a:lnSpc>
-              <a:spcBef>
-                <a:spcPts val="0"/>
-              </a:spcBef>
-              <a:spcAft>
-                <a:spcPts val="0"/>
-              </a:spcAft>
-              <a:buSzPts val="3600"/>
-              <a:buChar char="●"/>
-            </a:pPr>
-            <a:r>
-              <a:rPr lang="en">
-                <a:solidFill>
-                  <a:srgbClr val="0B0B0B"/>
-                </a:solidFill>
-              </a:rPr>
-              <a:t>p-value:​ </a:t>
-            </a:r>
-            <a:r>
-              <a:rPr lang="en">
-                <a:solidFill>
-                  <a:srgbClr val="FF0000"/>
-                </a:solidFill>
-              </a:rPr>
-              <a:t>[p-value]</a:t>
-            </a:r>
-            <a:endParaRPr>
-              <a:solidFill>
-                <a:srgbClr val="FF0000"/>
-              </a:solidFill>
-            </a:endParaRPr>
-          </a:p>
-          <a:p>
-            <a:pPr indent="-457200" lvl="0" marL="457200" rtl="0" algn="l">
-              <a:lnSpc>
-                <a:spcPct val="100000"/>
-              </a:lnSpc>
-              <a:spcBef>
-                <a:spcPts val="0"/>
-              </a:spcBef>
-              <a:spcAft>
-                <a:spcPts val="0"/>
-              </a:spcAft>
-              <a:buSzPts val="3600"/>
-              <a:buChar char="●"/>
-            </a:pPr>
-            <a:r>
-              <a:rPr lang="en">
+              <a:rPr lang="en" dirty="0">
                 <a:solidFill>
                   <a:srgbClr val="0B0B0B"/>
                 </a:solidFill>
               </a:rPr>
               <a:t>Conclusion:</a:t>
             </a:r>
-            <a:endParaRPr>
+            <a:endParaRPr dirty="0">
               <a:solidFill>
                 <a:srgbClr val="0B0B0B"/>
               </a:solidFill>
             </a:endParaRPr>
           </a:p>
           <a:p>
-            <a:pPr indent="-419100" lvl="1" marL="914400" rtl="0" algn="l">
+            <a:pPr lvl="1">
               <a:lnSpc>
                 <a:spcPct val="100000"/>
               </a:lnSpc>
               <a:spcBef>
                 <a:spcPts val="0"/>
               </a:spcBef>
-              <a:spcAft>
-                <a:spcPts val="0"/>
-              </a:spcAft>
-              <a:buSzPts val="3000"/>
-              <a:buChar char="○"/>
             </a:pPr>
             <a:r>
-              <a:rPr lang="en">
+              <a:rPr lang="en" dirty="0">
                 <a:solidFill>
                   <a:srgbClr val="0B0B0B"/>
                 </a:solidFill>
@@ -12613,43 +11992,17 @@
               <a:t>​</a:t>
             </a:r>
             <a:r>
-              <a:rPr lang="en">
-                <a:solidFill>
-                  <a:srgbClr val="FF0000"/>
-                </a:solidFill>
-              </a:rPr>
-              <a:t>[Conclusion - what does the above suggest in terms of treatment and control - do you have statistically significant evidence of a difference? What should the takeaways be?]</a:t>
+              <a:rPr lang="en-US" dirty="0"/>
+              <a:t>The p-value is effectively 0, well below the 0.05 threshold, so we reject H₀. There is statistically significant evidence that the treatment page leads to a higher conversion rate. The takeaway is that the company should consider adopting the treatment page, as it consistently outperforms the control across all countries.</a:t>
             </a:r>
-            <a:endParaRPr>
-              <a:solidFill>
-                <a:srgbClr val="FF0000"/>
-              </a:solidFill>
-            </a:endParaRPr>
-          </a:p>
-          <a:p>
-            <a:pPr indent="0" lvl="0" marL="0" rtl="0" algn="l">
-              <a:lnSpc>
-                <a:spcPct val="100000"/>
-              </a:lnSpc>
-              <a:spcBef>
-                <a:spcPts val="0"/>
-              </a:spcBef>
-              <a:spcAft>
-                <a:spcPts val="0"/>
-              </a:spcAft>
-              <a:buNone/>
-            </a:pPr>
-            <a:r>
-              <a:t/>
-            </a:r>
-            <a:endParaRPr>
+            <a:endParaRPr dirty="0">
               <a:solidFill>
                 <a:srgbClr val="0B0B0B"/>
               </a:solidFill>
             </a:endParaRPr>
           </a:p>
           <a:p>
-            <a:pPr indent="0" lvl="0" marL="228600" rtl="0" algn="l">
+            <a:pPr marL="228600" lvl="0" indent="0" algn="l" rtl="0">
               <a:lnSpc>
                 <a:spcPct val="115000"/>
               </a:lnSpc>
@@ -12661,10 +12014,7 @@
               </a:spcAft>
               <a:buNone/>
             </a:pPr>
-            <a:r>
-              <a:t/>
-            </a:r>
-            <a:endParaRPr sz="3000">
+            <a:endParaRPr sz="3000" dirty="0">
               <a:solidFill>
                 <a:srgbClr val="0B0B0B"/>
               </a:solidFill>
@@ -12681,7 +12031,7 @@
 </file>
 
 <file path=ppt/theme/theme1.xml><?xml version="1.0" encoding="utf-8"?>
-<a:theme xmlns:a="http://schemas.openxmlformats.org/drawingml/2006/main" xmlns:r="http://schemas.openxmlformats.org/officeDocument/2006/relationships" name="Udacity 2024 Student Template">
+<a:theme xmlns:a="http://schemas.openxmlformats.org/drawingml/2006/main" name="Udacity 2024 Student Template">
   <a:themeElements>
     <a:clrScheme name="Simple Light">
       <a:dk1>
@@ -12956,11 +12306,13 @@
       </a:bgFillStyleLst>
     </a:fmtScheme>
   </a:themeElements>
+  <a:objectDefaults/>
+  <a:extraClrSchemeLst/>
 </a:theme>
 </file>
 
 <file path=ppt/theme/theme2.xml><?xml version="1.0" encoding="utf-8"?>
-<a:theme xmlns:a="http://schemas.openxmlformats.org/drawingml/2006/main" xmlns:r="http://schemas.openxmlformats.org/officeDocument/2006/relationships">
+<a:theme xmlns:a="http://schemas.openxmlformats.org/drawingml/2006/main">
   <a:themeElements>
     <a:clrScheme name="Default">
       <a:dk1>
@@ -13235,5 +12587,7 @@
       </a:bgFillStyleLst>
     </a:fmtScheme>
   </a:themeElements>
+  <a:objectDefaults/>
+  <a:extraClrSchemeLst/>
 </a:theme>
 </file>